--- a/output/wordlabs-dict-3day.pptx
+++ b/output/wordlabs-dict-3day.pptx
@@ -6088,7 +6088,7 @@
                 <a:ea typeface="Calibri" pitchFamily="34" charset="-122"/>
                 <a:cs typeface="Calibri" pitchFamily="34" charset="-120"/>
               </a:rPr>
-              <a:t>verdict</a:t>
+              <a:t>dictator</a:t>
             </a:r>
             <a:pPr algn="l" indent="0" marL="0">
               <a:buNone/>
@@ -6102,7 +6102,7 @@
                 <a:ea typeface="Calibri" pitchFamily="34" charset="-122"/>
                 <a:cs typeface="Calibri" pitchFamily="34" charset="-120"/>
               </a:rPr>
-              <a:t> will be at the end of the trial?</a:t>
+              <a:t> will do next in the story?</a:t>
             </a:r>
             <a:endParaRPr lang="en-US" sz="1800" dirty="0"/>
           </a:p>
@@ -6385,7 +6385,7 @@
                 <a:ea typeface="Trebuchet MS" pitchFamily="34" charset="-122"/>
                 <a:cs typeface="Trebuchet MS" pitchFamily="34" charset="-120"/>
               </a:rPr>
-              <a:t>verdict</a:t>
+              <a:t>dictator</a:t>
             </a:r>
             <a:endParaRPr lang="en-US" sz="1400" dirty="0"/>
           </a:p>
@@ -11363,7 +11363,7 @@
                 <a:ea typeface="Trebuchet MS" pitchFamily="34" charset="-122"/>
                 <a:cs typeface="Trebuchet MS" pitchFamily="34" charset="-120"/>
               </a:rPr>
-              <a:t>verdict</a:t>
+              <a:t>dictator</a:t>
             </a:r>
             <a:endParaRPr lang="en-US" sz="2800" dirty="0"/>
           </a:p>
@@ -12190,7 +12190,7 @@
                 <a:ea typeface="Trebuchet MS" pitchFamily="34" charset="-122"/>
                 <a:cs typeface="Trebuchet MS" pitchFamily="34" charset="-120"/>
               </a:rPr>
-              <a:t>verdict</a:t>
+              <a:t>dictator</a:t>
             </a:r>
             <a:endParaRPr lang="en-US" sz="2800" dirty="0"/>
           </a:p>
@@ -12270,7 +12270,7 @@
         </p:nvSpPr>
         <p:spPr>
           <a:xfrm>
-            <a:off x="2938272" y="2258568"/>
+            <a:off x="2221992" y="2258568"/>
             <a:ext cx="1828800" cy="292608"/>
           </a:xfrm>
           <a:prstGeom prst="rect">
@@ -12279,11 +12279,11 @@
             </a:avLst>
           </a:prstGeom>
           <a:solidFill>
-            <a:srgbClr val="DDD6FE"/>
+            <a:srgbClr val="CCFBF1"/>
           </a:solidFill>
           <a:ln w="19050">
             <a:solidFill>
-              <a:srgbClr val="7C3AED"/>
+              <a:srgbClr val="0D9488"/>
             </a:solidFill>
             <a:prstDash val="solid"/>
           </a:ln>
@@ -12304,7 +12304,7 @@
         </p:nvSpPr>
         <p:spPr>
           <a:xfrm>
-            <a:off x="2938272" y="2258568"/>
+            <a:off x="2221992" y="2258568"/>
             <a:ext cx="1828800" cy="292608"/>
           </a:xfrm>
           <a:prstGeom prst="rect">
@@ -12323,13 +12323,13 @@
             <a:r>
               <a:rPr lang="en-US" sz="1300" b="1" dirty="0">
                 <a:solidFill>
-                  <a:srgbClr val="4C1D95"/>
+                  <a:srgbClr val="0F766E"/>
                 </a:solidFill>
                 <a:latin typeface="Trebuchet MS" pitchFamily="34" charset="0"/>
                 <a:ea typeface="Trebuchet MS" pitchFamily="34" charset="-122"/>
                 <a:cs typeface="Trebuchet MS" pitchFamily="34" charset="-120"/>
               </a:rPr>
-              <a:t>ver</a:t>
+              <a:t>dict</a:t>
             </a:r>
             <a:endParaRPr lang="en-US" sz="1300" dirty="0"/>
           </a:p>
@@ -12343,7 +12343,7 @@
         </p:nvSpPr>
         <p:spPr>
           <a:xfrm>
-            <a:off x="2938272" y="2569464"/>
+            <a:off x="2221992" y="2569464"/>
             <a:ext cx="1828800" cy="201168"/>
           </a:xfrm>
           <a:prstGeom prst="rect">
@@ -12368,7 +12368,7 @@
                 <a:ea typeface="Calibri" pitchFamily="34" charset="-122"/>
                 <a:cs typeface="Calibri" pitchFamily="34" charset="-120"/>
               </a:rPr>
-              <a:t>truly, truth</a:t>
+              <a:t>say, speak</a:t>
             </a:r>
             <a:endParaRPr lang="en-US" sz="850" dirty="0"/>
           </a:p>
@@ -12382,7 +12382,7 @@
         </p:nvSpPr>
         <p:spPr>
           <a:xfrm>
-            <a:off x="5803392" y="2258568"/>
+            <a:off x="4370832" y="2258568"/>
             <a:ext cx="1828800" cy="292608"/>
           </a:xfrm>
           <a:prstGeom prst="rect">
@@ -12391,11 +12391,11 @@
             </a:avLst>
           </a:prstGeom>
           <a:solidFill>
-            <a:srgbClr val="CCFBF1"/>
+            <a:srgbClr val="FCE7F3"/>
           </a:solidFill>
           <a:ln w="19050">
             <a:solidFill>
-              <a:srgbClr val="0D9488"/>
+              <a:srgbClr val="DB2777"/>
             </a:solidFill>
             <a:prstDash val="solid"/>
           </a:ln>
@@ -12416,7 +12416,7 @@
         </p:nvSpPr>
         <p:spPr>
           <a:xfrm>
-            <a:off x="5803392" y="2258568"/>
+            <a:off x="4370832" y="2258568"/>
             <a:ext cx="1828800" cy="292608"/>
           </a:xfrm>
           <a:prstGeom prst="rect">
@@ -12435,13 +12435,13 @@
             <a:r>
               <a:rPr lang="en-US" sz="1300" b="1" dirty="0">
                 <a:solidFill>
-                  <a:srgbClr val="0F766E"/>
+                  <a:srgbClr val="9D174D"/>
                 </a:solidFill>
                 <a:latin typeface="Trebuchet MS" pitchFamily="34" charset="0"/>
                 <a:ea typeface="Trebuchet MS" pitchFamily="34" charset="-122"/>
                 <a:cs typeface="Trebuchet MS" pitchFamily="34" charset="-120"/>
               </a:rPr>
-              <a:t>dict</a:t>
+              <a:t>at</a:t>
             </a:r>
             <a:endParaRPr lang="en-US" sz="1300" dirty="0"/>
           </a:p>
@@ -12455,7 +12455,7 @@
         </p:nvSpPr>
         <p:spPr>
           <a:xfrm>
-            <a:off x="5803392" y="2569464"/>
+            <a:off x="4370832" y="2569464"/>
             <a:ext cx="1828800" cy="201168"/>
           </a:xfrm>
           <a:prstGeom prst="rect">
@@ -12480,7 +12480,7 @@
                 <a:ea typeface="Calibri" pitchFamily="34" charset="-122"/>
                 <a:cs typeface="Calibri" pitchFamily="34" charset="-120"/>
               </a:rPr>
-              <a:t>say, speak</a:t>
+              <a:t>one who does</a:t>
             </a:r>
             <a:endParaRPr lang="en-US" sz="850" dirty="0"/>
           </a:p>
@@ -12489,6 +12489,118 @@
       <p:sp>
         <p:nvSpPr>
           <p:cNvPr id="22" name="Shape 20"/>
+          <p:cNvSpPr/>
+          <p:nvPr/>
+        </p:nvSpPr>
+        <p:spPr>
+          <a:xfrm>
+            <a:off x="6519672" y="2258568"/>
+            <a:ext cx="1828800" cy="292608"/>
+          </a:xfrm>
+          <a:prstGeom prst="rect">
+            <a:avLst>
+              <a:gd name="adj" fmla="val 25000"/>
+            </a:avLst>
+          </a:prstGeom>
+          <a:solidFill>
+            <a:srgbClr val="FCE7F3"/>
+          </a:solidFill>
+          <a:ln w="19050">
+            <a:solidFill>
+              <a:srgbClr val="DB2777"/>
+            </a:solidFill>
+            <a:prstDash val="solid"/>
+          </a:ln>
+          <a:effectLst>
+            <a:outerShdw sx="100000" sy="100000" kx="0" ky="0" algn="bl" rotWithShape="0" blurRad="101600" dist="38100" dir="8100000">
+              <a:srgbClr val="000000">
+                <a:alpha val="12000"/>
+              </a:srgbClr>
+            </a:outerShdw>
+          </a:effectLst>
+        </p:spPr>
+      </p:sp>
+      <p:sp>
+        <p:nvSpPr>
+          <p:cNvPr id="23" name="Text 21"/>
+          <p:cNvSpPr/>
+          <p:nvPr/>
+        </p:nvSpPr>
+        <p:spPr>
+          <a:xfrm>
+            <a:off x="6519672" y="2258568"/>
+            <a:ext cx="1828800" cy="292608"/>
+          </a:xfrm>
+          <a:prstGeom prst="rect">
+            <a:avLst/>
+          </a:prstGeom>
+          <a:noFill/>
+          <a:ln/>
+        </p:spPr>
+        <p:txBody>
+          <a:bodyPr wrap="square" lIns="0" tIns="0" rIns="0" bIns="0" rtlCol="0" anchor="ctr"/>
+          <a:lstStyle/>
+          <a:p>
+            <a:pPr algn="ctr" indent="0" marL="0">
+              <a:buNone/>
+            </a:pPr>
+            <a:r>
+              <a:rPr lang="en-US" sz="1300" b="1" dirty="0">
+                <a:solidFill>
+                  <a:srgbClr val="9D174D"/>
+                </a:solidFill>
+                <a:latin typeface="Trebuchet MS" pitchFamily="34" charset="0"/>
+                <a:ea typeface="Trebuchet MS" pitchFamily="34" charset="-122"/>
+                <a:cs typeface="Trebuchet MS" pitchFamily="34" charset="-120"/>
+              </a:rPr>
+              <a:t>or</a:t>
+            </a:r>
+            <a:endParaRPr lang="en-US" sz="1300" dirty="0"/>
+          </a:p>
+        </p:txBody>
+      </p:sp>
+      <p:sp>
+        <p:nvSpPr>
+          <p:cNvPr id="24" name="Text 22"/>
+          <p:cNvSpPr/>
+          <p:nvPr/>
+        </p:nvSpPr>
+        <p:spPr>
+          <a:xfrm>
+            <a:off x="6519672" y="2569464"/>
+            <a:ext cx="1828800" cy="201168"/>
+          </a:xfrm>
+          <a:prstGeom prst="rect">
+            <a:avLst/>
+          </a:prstGeom>
+          <a:noFill/>
+          <a:ln/>
+        </p:spPr>
+        <p:txBody>
+          <a:bodyPr wrap="square" lIns="0" tIns="0" rIns="0" bIns="0" rtlCol="0" anchor="t"/>
+          <a:lstStyle/>
+          <a:p>
+            <a:pPr algn="ctr" indent="0" marL="0">
+              <a:buNone/>
+            </a:pPr>
+            <a:r>
+              <a:rPr lang="en-US" sz="850" dirty="0">
+                <a:solidFill>
+                  <a:srgbClr val="475569"/>
+                </a:solidFill>
+                <a:latin typeface="Calibri" pitchFamily="34" charset="0"/>
+                <a:ea typeface="Calibri" pitchFamily="34" charset="-122"/>
+                <a:cs typeface="Calibri" pitchFamily="34" charset="-120"/>
+              </a:rPr>
+              <a:t>person or agent</a:t>
+            </a:r>
+            <a:endParaRPr lang="en-US" sz="850" dirty="0"/>
+          </a:p>
+        </p:txBody>
+      </p:sp>
+      <p:sp>
+        <p:nvSpPr>
+          <p:cNvPr id="25" name="Shape 23"/>
           <p:cNvSpPr/>
           <p:nvPr/>
         </p:nvSpPr>
@@ -12515,7 +12627,7 @@
       </p:sp>
       <p:sp>
         <p:nvSpPr>
-          <p:cNvPr id="23" name="Text 21"/>
+          <p:cNvPr id="26" name="Text 24"/>
           <p:cNvSpPr/>
           <p:nvPr/>
         </p:nvSpPr>
@@ -12554,7 +12666,7 @@
       </p:sp>
       <p:sp>
         <p:nvSpPr>
-          <p:cNvPr id="24" name="Shape 22"/>
+          <p:cNvPr id="27" name="Shape 25"/>
           <p:cNvSpPr/>
           <p:nvPr/>
         </p:nvSpPr>
@@ -12581,7 +12693,7 @@
       </p:sp>
       <p:sp>
         <p:nvSpPr>
-          <p:cNvPr id="25" name="Text 23"/>
+          <p:cNvPr id="28" name="Text 26"/>
           <p:cNvSpPr/>
           <p:nvPr/>
         </p:nvSpPr>
@@ -12620,7 +12732,7 @@
       </p:sp>
       <p:sp>
         <p:nvSpPr>
-          <p:cNvPr id="26" name="Shape 24"/>
+          <p:cNvPr id="29" name="Shape 27"/>
           <p:cNvSpPr/>
           <p:nvPr/>
         </p:nvSpPr>
@@ -12647,7 +12759,7 @@
       </p:sp>
       <p:sp>
         <p:nvSpPr>
-          <p:cNvPr id="27" name="Text 25"/>
+          <p:cNvPr id="30" name="Text 28"/>
           <p:cNvSpPr/>
           <p:nvPr/>
         </p:nvSpPr>
@@ -12686,7 +12798,7 @@
       </p:sp>
       <p:sp>
         <p:nvSpPr>
-          <p:cNvPr id="28" name="Shape 26"/>
+          <p:cNvPr id="31" name="Shape 29"/>
           <p:cNvSpPr/>
           <p:nvPr/>
         </p:nvSpPr>
@@ -12713,7 +12825,7 @@
       </p:sp>
       <p:sp>
         <p:nvSpPr>
-          <p:cNvPr id="29" name="Text 27"/>
+          <p:cNvPr id="32" name="Text 30"/>
           <p:cNvSpPr/>
           <p:nvPr/>
         </p:nvSpPr>
@@ -13175,7 +13287,7 @@
                 <a:ea typeface="Trebuchet MS" pitchFamily="34" charset="-122"/>
                 <a:cs typeface="Trebuchet MS" pitchFamily="34" charset="-120"/>
               </a:rPr>
-              <a:t>verdict</a:t>
+              <a:t>dictator</a:t>
             </a:r>
             <a:endParaRPr lang="en-US" sz="2800" dirty="0"/>
           </a:p>
@@ -13255,7 +13367,7 @@
         </p:nvSpPr>
         <p:spPr>
           <a:xfrm>
-            <a:off x="2938272" y="2258568"/>
+            <a:off x="2221992" y="2258568"/>
             <a:ext cx="1828800" cy="292608"/>
           </a:xfrm>
           <a:prstGeom prst="rect">
@@ -13264,11 +13376,11 @@
             </a:avLst>
           </a:prstGeom>
           <a:solidFill>
-            <a:srgbClr val="DDD6FE"/>
+            <a:srgbClr val="CCFBF1"/>
           </a:solidFill>
           <a:ln w="19050">
             <a:solidFill>
-              <a:srgbClr val="7C3AED"/>
+              <a:srgbClr val="0D9488"/>
             </a:solidFill>
             <a:prstDash val="solid"/>
           </a:ln>
@@ -13289,7 +13401,7 @@
         </p:nvSpPr>
         <p:spPr>
           <a:xfrm>
-            <a:off x="2938272" y="2258568"/>
+            <a:off x="2221992" y="2258568"/>
             <a:ext cx="1828800" cy="292608"/>
           </a:xfrm>
           <a:prstGeom prst="rect">
@@ -13308,13 +13420,13 @@
             <a:r>
               <a:rPr lang="en-US" sz="1300" b="1" dirty="0">
                 <a:solidFill>
-                  <a:srgbClr val="4C1D95"/>
+                  <a:srgbClr val="0F766E"/>
                 </a:solidFill>
                 <a:latin typeface="Trebuchet MS" pitchFamily="34" charset="0"/>
                 <a:ea typeface="Trebuchet MS" pitchFamily="34" charset="-122"/>
                 <a:cs typeface="Trebuchet MS" pitchFamily="34" charset="-120"/>
               </a:rPr>
-              <a:t>ver</a:t>
+              <a:t>dict</a:t>
             </a:r>
             <a:endParaRPr lang="en-US" sz="1300" dirty="0"/>
           </a:p>
@@ -13328,7 +13440,7 @@
         </p:nvSpPr>
         <p:spPr>
           <a:xfrm>
-            <a:off x="2938272" y="2569464"/>
+            <a:off x="2221992" y="2569464"/>
             <a:ext cx="1828800" cy="201168"/>
           </a:xfrm>
           <a:prstGeom prst="rect">
@@ -13353,7 +13465,7 @@
                 <a:ea typeface="Calibri" pitchFamily="34" charset="-122"/>
                 <a:cs typeface="Calibri" pitchFamily="34" charset="-120"/>
               </a:rPr>
-              <a:t>truly, truth</a:t>
+              <a:t>say, speak</a:t>
             </a:r>
             <a:endParaRPr lang="en-US" sz="850" dirty="0"/>
           </a:p>
@@ -13367,7 +13479,7 @@
         </p:nvSpPr>
         <p:spPr>
           <a:xfrm>
-            <a:off x="5803392" y="2258568"/>
+            <a:off x="4370832" y="2258568"/>
             <a:ext cx="1828800" cy="292608"/>
           </a:xfrm>
           <a:prstGeom prst="rect">
@@ -13376,11 +13488,11 @@
             </a:avLst>
           </a:prstGeom>
           <a:solidFill>
-            <a:srgbClr val="CCFBF1"/>
+            <a:srgbClr val="FCE7F3"/>
           </a:solidFill>
           <a:ln w="19050">
             <a:solidFill>
-              <a:srgbClr val="0D9488"/>
+              <a:srgbClr val="DB2777"/>
             </a:solidFill>
             <a:prstDash val="solid"/>
           </a:ln>
@@ -13401,7 +13513,7 @@
         </p:nvSpPr>
         <p:spPr>
           <a:xfrm>
-            <a:off x="5803392" y="2258568"/>
+            <a:off x="4370832" y="2258568"/>
             <a:ext cx="1828800" cy="292608"/>
           </a:xfrm>
           <a:prstGeom prst="rect">
@@ -13420,13 +13532,13 @@
             <a:r>
               <a:rPr lang="en-US" sz="1300" b="1" dirty="0">
                 <a:solidFill>
-                  <a:srgbClr val="0F766E"/>
+                  <a:srgbClr val="9D174D"/>
                 </a:solidFill>
                 <a:latin typeface="Trebuchet MS" pitchFamily="34" charset="0"/>
                 <a:ea typeface="Trebuchet MS" pitchFamily="34" charset="-122"/>
                 <a:cs typeface="Trebuchet MS" pitchFamily="34" charset="-120"/>
               </a:rPr>
-              <a:t>dict</a:t>
+              <a:t>at</a:t>
             </a:r>
             <a:endParaRPr lang="en-US" sz="1300" dirty="0"/>
           </a:p>
@@ -13440,7 +13552,7 @@
         </p:nvSpPr>
         <p:spPr>
           <a:xfrm>
-            <a:off x="5803392" y="2569464"/>
+            <a:off x="4370832" y="2569464"/>
             <a:ext cx="1828800" cy="201168"/>
           </a:xfrm>
           <a:prstGeom prst="rect">
@@ -13465,7 +13577,7 @@
                 <a:ea typeface="Calibri" pitchFamily="34" charset="-122"/>
                 <a:cs typeface="Calibri" pitchFamily="34" charset="-120"/>
               </a:rPr>
-              <a:t>say, speak</a:t>
+              <a:t>one who does</a:t>
             </a:r>
             <a:endParaRPr lang="en-US" sz="850" dirty="0"/>
           </a:p>
@@ -13474,6 +13586,118 @@
       <p:sp>
         <p:nvSpPr>
           <p:cNvPr id="22" name="Shape 20"/>
+          <p:cNvSpPr/>
+          <p:nvPr/>
+        </p:nvSpPr>
+        <p:spPr>
+          <a:xfrm>
+            <a:off x="6519672" y="2258568"/>
+            <a:ext cx="1828800" cy="292608"/>
+          </a:xfrm>
+          <a:prstGeom prst="rect">
+            <a:avLst>
+              <a:gd name="adj" fmla="val 25000"/>
+            </a:avLst>
+          </a:prstGeom>
+          <a:solidFill>
+            <a:srgbClr val="FCE7F3"/>
+          </a:solidFill>
+          <a:ln w="19050">
+            <a:solidFill>
+              <a:srgbClr val="DB2777"/>
+            </a:solidFill>
+            <a:prstDash val="solid"/>
+          </a:ln>
+          <a:effectLst>
+            <a:outerShdw sx="100000" sy="100000" kx="0" ky="0" algn="bl" rotWithShape="0" blurRad="101600" dist="38100" dir="8100000">
+              <a:srgbClr val="000000">
+                <a:alpha val="12000"/>
+              </a:srgbClr>
+            </a:outerShdw>
+          </a:effectLst>
+        </p:spPr>
+      </p:sp>
+      <p:sp>
+        <p:nvSpPr>
+          <p:cNvPr id="23" name="Text 21"/>
+          <p:cNvSpPr/>
+          <p:nvPr/>
+        </p:nvSpPr>
+        <p:spPr>
+          <a:xfrm>
+            <a:off x="6519672" y="2258568"/>
+            <a:ext cx="1828800" cy="292608"/>
+          </a:xfrm>
+          <a:prstGeom prst="rect">
+            <a:avLst/>
+          </a:prstGeom>
+          <a:noFill/>
+          <a:ln/>
+        </p:spPr>
+        <p:txBody>
+          <a:bodyPr wrap="square" lIns="0" tIns="0" rIns="0" bIns="0" rtlCol="0" anchor="ctr"/>
+          <a:lstStyle/>
+          <a:p>
+            <a:pPr algn="ctr" indent="0" marL="0">
+              <a:buNone/>
+            </a:pPr>
+            <a:r>
+              <a:rPr lang="en-US" sz="1300" b="1" dirty="0">
+                <a:solidFill>
+                  <a:srgbClr val="9D174D"/>
+                </a:solidFill>
+                <a:latin typeface="Trebuchet MS" pitchFamily="34" charset="0"/>
+                <a:ea typeface="Trebuchet MS" pitchFamily="34" charset="-122"/>
+                <a:cs typeface="Trebuchet MS" pitchFamily="34" charset="-120"/>
+              </a:rPr>
+              <a:t>or</a:t>
+            </a:r>
+            <a:endParaRPr lang="en-US" sz="1300" dirty="0"/>
+          </a:p>
+        </p:txBody>
+      </p:sp>
+      <p:sp>
+        <p:nvSpPr>
+          <p:cNvPr id="24" name="Text 22"/>
+          <p:cNvSpPr/>
+          <p:nvPr/>
+        </p:nvSpPr>
+        <p:spPr>
+          <a:xfrm>
+            <a:off x="6519672" y="2569464"/>
+            <a:ext cx="1828800" cy="201168"/>
+          </a:xfrm>
+          <a:prstGeom prst="rect">
+            <a:avLst/>
+          </a:prstGeom>
+          <a:noFill/>
+          <a:ln/>
+        </p:spPr>
+        <p:txBody>
+          <a:bodyPr wrap="square" lIns="0" tIns="0" rIns="0" bIns="0" rtlCol="0" anchor="t"/>
+          <a:lstStyle/>
+          <a:p>
+            <a:pPr algn="ctr" indent="0" marL="0">
+              <a:buNone/>
+            </a:pPr>
+            <a:r>
+              <a:rPr lang="en-US" sz="850" dirty="0">
+                <a:solidFill>
+                  <a:srgbClr val="475569"/>
+                </a:solidFill>
+                <a:latin typeface="Calibri" pitchFamily="34" charset="0"/>
+                <a:ea typeface="Calibri" pitchFamily="34" charset="-122"/>
+                <a:cs typeface="Calibri" pitchFamily="34" charset="-120"/>
+              </a:rPr>
+              <a:t>person or agent</a:t>
+            </a:r>
+            <a:endParaRPr lang="en-US" sz="850" dirty="0"/>
+          </a:p>
+        </p:txBody>
+      </p:sp>
+      <p:sp>
+        <p:nvSpPr>
+          <p:cNvPr id="25" name="Shape 23"/>
           <p:cNvSpPr/>
           <p:nvPr/>
         </p:nvSpPr>
@@ -13500,7 +13724,7 @@
       </p:sp>
       <p:sp>
         <p:nvSpPr>
-          <p:cNvPr id="23" name="Text 21"/>
+          <p:cNvPr id="26" name="Text 24"/>
           <p:cNvSpPr/>
           <p:nvPr/>
         </p:nvSpPr>
@@ -13539,7 +13763,7 @@
       </p:sp>
       <p:sp>
         <p:nvSpPr>
-          <p:cNvPr id="24" name="Shape 22"/>
+          <p:cNvPr id="27" name="Shape 25"/>
           <p:cNvSpPr/>
           <p:nvPr/>
         </p:nvSpPr>
@@ -13566,13 +13790,13 @@
       </p:sp>
       <p:sp>
         <p:nvSpPr>
-          <p:cNvPr id="25" name="Shape 23"/>
-          <p:cNvSpPr/>
-          <p:nvPr/>
-        </p:nvSpPr>
-        <p:spPr>
-          <a:xfrm>
-            <a:off x="2999232" y="3364992"/>
+          <p:cNvPr id="28" name="Shape 26"/>
+          <p:cNvSpPr/>
+          <p:nvPr/>
+        </p:nvSpPr>
+        <p:spPr>
+          <a:xfrm>
+            <a:off x="2313432" y="3364992"/>
             <a:ext cx="1645920" cy="475488"/>
           </a:xfrm>
           <a:prstGeom prst="rect">
@@ -13593,13 +13817,13 @@
       </p:sp>
       <p:sp>
         <p:nvSpPr>
-          <p:cNvPr id="26" name="Text 24"/>
-          <p:cNvSpPr/>
-          <p:nvPr/>
-        </p:nvSpPr>
-        <p:spPr>
-          <a:xfrm>
-            <a:off x="2999232" y="3364992"/>
+          <p:cNvPr id="29" name="Text 27"/>
+          <p:cNvSpPr/>
+          <p:nvPr/>
+        </p:nvSpPr>
+        <p:spPr>
+          <a:xfrm>
+            <a:off x="2313432" y="3364992"/>
             <a:ext cx="1645920" cy="475488"/>
           </a:xfrm>
           <a:prstGeom prst="rect">
@@ -13624,7 +13848,7 @@
                 <a:ea typeface="Trebuchet MS" pitchFamily="34" charset="-122"/>
                 <a:cs typeface="Trebuchet MS" pitchFamily="34" charset="-120"/>
               </a:rPr>
-              <a:t>ver</a:t>
+              <a:t>dic</a:t>
             </a:r>
             <a:endParaRPr lang="en-US" sz="1400" dirty="0"/>
           </a:p>
@@ -13632,14 +13856,14 @@
       </p:sp>
       <p:sp>
         <p:nvSpPr>
-          <p:cNvPr id="27" name="Text 25"/>
-          <p:cNvSpPr/>
-          <p:nvPr/>
-        </p:nvSpPr>
-        <p:spPr>
-          <a:xfrm>
-            <a:off x="4645152" y="3364992"/>
-            <a:ext cx="1097280" cy="475488"/>
+          <p:cNvPr id="30" name="Text 28"/>
+          <p:cNvSpPr/>
+          <p:nvPr/>
+        </p:nvSpPr>
+        <p:spPr>
+          <a:xfrm>
+            <a:off x="3959352" y="3364992"/>
+            <a:ext cx="411480" cy="475488"/>
           </a:xfrm>
           <a:prstGeom prst="rect">
             <a:avLst/>
@@ -13671,13 +13895,13 @@
       </p:sp>
       <p:sp>
         <p:nvSpPr>
-          <p:cNvPr id="28" name="Shape 26"/>
-          <p:cNvSpPr/>
-          <p:nvPr/>
-        </p:nvSpPr>
-        <p:spPr>
-          <a:xfrm>
-            <a:off x="5742432" y="3364992"/>
+          <p:cNvPr id="31" name="Shape 29"/>
+          <p:cNvSpPr/>
+          <p:nvPr/>
+        </p:nvSpPr>
+        <p:spPr>
+          <a:xfrm>
+            <a:off x="4370832" y="3364992"/>
             <a:ext cx="1645920" cy="475488"/>
           </a:xfrm>
           <a:prstGeom prst="rect">
@@ -13698,13 +13922,13 @@
       </p:sp>
       <p:sp>
         <p:nvSpPr>
-          <p:cNvPr id="29" name="Text 27"/>
-          <p:cNvSpPr/>
-          <p:nvPr/>
-        </p:nvSpPr>
-        <p:spPr>
-          <a:xfrm>
-            <a:off x="5742432" y="3364992"/>
+          <p:cNvPr id="32" name="Text 30"/>
+          <p:cNvSpPr/>
+          <p:nvPr/>
+        </p:nvSpPr>
+        <p:spPr>
+          <a:xfrm>
+            <a:off x="4370832" y="3364992"/>
             <a:ext cx="1645920" cy="475488"/>
           </a:xfrm>
           <a:prstGeom prst="rect">
@@ -13729,7 +13953,7 @@
                 <a:ea typeface="Trebuchet MS" pitchFamily="34" charset="-122"/>
                 <a:cs typeface="Trebuchet MS" pitchFamily="34" charset="-120"/>
               </a:rPr>
-              <a:t>dict</a:t>
+              <a:t>ta</a:t>
             </a:r>
             <a:endParaRPr lang="en-US" sz="1400" dirty="0"/>
           </a:p>
@@ -13737,7 +13961,112 @@
       </p:sp>
       <p:sp>
         <p:nvSpPr>
-          <p:cNvPr id="30" name="Shape 28"/>
+          <p:cNvPr id="33" name="Text 31"/>
+          <p:cNvSpPr/>
+          <p:nvPr/>
+        </p:nvSpPr>
+        <p:spPr>
+          <a:xfrm>
+            <a:off x="6016752" y="3364992"/>
+            <a:ext cx="411480" cy="475488"/>
+          </a:xfrm>
+          <a:prstGeom prst="rect">
+            <a:avLst/>
+          </a:prstGeom>
+          <a:noFill/>
+          <a:ln/>
+        </p:spPr>
+        <p:txBody>
+          <a:bodyPr wrap="square" lIns="0" tIns="0" rIns="0" bIns="0" rtlCol="0" anchor="ctr"/>
+          <a:lstStyle/>
+          <a:p>
+            <a:pPr algn="ctr" indent="0" marL="0">
+              <a:buNone/>
+            </a:pPr>
+            <a:r>
+              <a:rPr lang="en-US" sz="1600" b="1" dirty="0">
+                <a:solidFill>
+                  <a:srgbClr val="0D9488"/>
+                </a:solidFill>
+                <a:latin typeface="Trebuchet MS" pitchFamily="34" charset="0"/>
+                <a:ea typeface="Trebuchet MS" pitchFamily="34" charset="-122"/>
+                <a:cs typeface="Trebuchet MS" pitchFamily="34" charset="-120"/>
+              </a:rPr>
+              <a:t>·</a:t>
+            </a:r>
+            <a:endParaRPr lang="en-US" sz="1600" dirty="0"/>
+          </a:p>
+        </p:txBody>
+      </p:sp>
+      <p:sp>
+        <p:nvSpPr>
+          <p:cNvPr id="34" name="Shape 32"/>
+          <p:cNvSpPr/>
+          <p:nvPr/>
+        </p:nvSpPr>
+        <p:spPr>
+          <a:xfrm>
+            <a:off x="6428232" y="3364992"/>
+            <a:ext cx="1645920" cy="475488"/>
+          </a:xfrm>
+          <a:prstGeom prst="rect">
+            <a:avLst>
+              <a:gd name="adj" fmla="val 9615"/>
+            </a:avLst>
+          </a:prstGeom>
+          <a:solidFill>
+            <a:srgbClr val="FFFFFF"/>
+          </a:solidFill>
+          <a:ln w="12700">
+            <a:solidFill>
+              <a:srgbClr val="0D9488"/>
+            </a:solidFill>
+            <a:prstDash val="solid"/>
+          </a:ln>
+        </p:spPr>
+      </p:sp>
+      <p:sp>
+        <p:nvSpPr>
+          <p:cNvPr id="35" name="Text 33"/>
+          <p:cNvSpPr/>
+          <p:nvPr/>
+        </p:nvSpPr>
+        <p:spPr>
+          <a:xfrm>
+            <a:off x="6428232" y="3364992"/>
+            <a:ext cx="1645920" cy="475488"/>
+          </a:xfrm>
+          <a:prstGeom prst="rect">
+            <a:avLst/>
+          </a:prstGeom>
+          <a:noFill/>
+          <a:ln/>
+        </p:spPr>
+        <p:txBody>
+          <a:bodyPr wrap="square" lIns="0" tIns="0" rIns="0" bIns="0" rtlCol="0" anchor="ctr"/>
+          <a:lstStyle/>
+          <a:p>
+            <a:pPr algn="ctr" indent="0" marL="0">
+              <a:buNone/>
+            </a:pPr>
+            <a:r>
+              <a:rPr lang="en-US" sz="1400" b="1" dirty="0">
+                <a:solidFill>
+                  <a:srgbClr val="0D9488"/>
+                </a:solidFill>
+                <a:latin typeface="Trebuchet MS" pitchFamily="34" charset="0"/>
+                <a:ea typeface="Trebuchet MS" pitchFamily="34" charset="-122"/>
+                <a:cs typeface="Trebuchet MS" pitchFamily="34" charset="-120"/>
+              </a:rPr>
+              <a:t>tor</a:t>
+            </a:r>
+            <a:endParaRPr lang="en-US" sz="1400" dirty="0"/>
+          </a:p>
+        </p:txBody>
+      </p:sp>
+      <p:sp>
+        <p:nvSpPr>
+          <p:cNvPr id="36" name="Shape 34"/>
           <p:cNvSpPr/>
           <p:nvPr/>
         </p:nvSpPr>
@@ -13764,7 +14093,7 @@
       </p:sp>
       <p:sp>
         <p:nvSpPr>
-          <p:cNvPr id="31" name="Text 29"/>
+          <p:cNvPr id="37" name="Text 35"/>
           <p:cNvSpPr/>
           <p:nvPr/>
         </p:nvSpPr>
@@ -13803,7 +14132,7 @@
       </p:sp>
       <p:sp>
         <p:nvSpPr>
-          <p:cNvPr id="32" name="Shape 30"/>
+          <p:cNvPr id="38" name="Shape 36"/>
           <p:cNvSpPr/>
           <p:nvPr/>
         </p:nvSpPr>
@@ -13830,7 +14159,7 @@
       </p:sp>
       <p:sp>
         <p:nvSpPr>
-          <p:cNvPr id="33" name="Text 31"/>
+          <p:cNvPr id="39" name="Text 37"/>
           <p:cNvSpPr/>
           <p:nvPr/>
         </p:nvSpPr>
@@ -14557,7 +14886,7 @@
                 <a:ea typeface="Trebuchet MS" pitchFamily="34" charset="-122"/>
                 <a:cs typeface="Trebuchet MS" pitchFamily="34" charset="-120"/>
               </a:rPr>
-              <a:t>verdict</a:t>
+              <a:t>dictator</a:t>
             </a:r>
             <a:endParaRPr lang="en-US" sz="2800" dirty="0"/>
           </a:p>
@@ -14637,7 +14966,7 @@
         </p:nvSpPr>
         <p:spPr>
           <a:xfrm>
-            <a:off x="2938272" y="2258568"/>
+            <a:off x="2221992" y="2258568"/>
             <a:ext cx="1828800" cy="292608"/>
           </a:xfrm>
           <a:prstGeom prst="rect">
@@ -14646,11 +14975,11 @@
             </a:avLst>
           </a:prstGeom>
           <a:solidFill>
-            <a:srgbClr val="DDD6FE"/>
+            <a:srgbClr val="CCFBF1"/>
           </a:solidFill>
           <a:ln w="19050">
             <a:solidFill>
-              <a:srgbClr val="7C3AED"/>
+              <a:srgbClr val="0D9488"/>
             </a:solidFill>
             <a:prstDash val="solid"/>
           </a:ln>
@@ -14671,7 +15000,7 @@
         </p:nvSpPr>
         <p:spPr>
           <a:xfrm>
-            <a:off x="2938272" y="2258568"/>
+            <a:off x="2221992" y="2258568"/>
             <a:ext cx="1828800" cy="292608"/>
           </a:xfrm>
           <a:prstGeom prst="rect">
@@ -14690,13 +15019,13 @@
             <a:r>
               <a:rPr lang="en-US" sz="1300" b="1" dirty="0">
                 <a:solidFill>
-                  <a:srgbClr val="4C1D95"/>
+                  <a:srgbClr val="0F766E"/>
                 </a:solidFill>
                 <a:latin typeface="Trebuchet MS" pitchFamily="34" charset="0"/>
                 <a:ea typeface="Trebuchet MS" pitchFamily="34" charset="-122"/>
                 <a:cs typeface="Trebuchet MS" pitchFamily="34" charset="-120"/>
               </a:rPr>
-              <a:t>ver</a:t>
+              <a:t>dict</a:t>
             </a:r>
             <a:endParaRPr lang="en-US" sz="1300" dirty="0"/>
           </a:p>
@@ -14710,7 +15039,7 @@
         </p:nvSpPr>
         <p:spPr>
           <a:xfrm>
-            <a:off x="2938272" y="2569464"/>
+            <a:off x="2221992" y="2569464"/>
             <a:ext cx="1828800" cy="201168"/>
           </a:xfrm>
           <a:prstGeom prst="rect">
@@ -14735,7 +15064,7 @@
                 <a:ea typeface="Calibri" pitchFamily="34" charset="-122"/>
                 <a:cs typeface="Calibri" pitchFamily="34" charset="-120"/>
               </a:rPr>
-              <a:t>truly, truth</a:t>
+              <a:t>say, speak</a:t>
             </a:r>
             <a:endParaRPr lang="en-US" sz="850" dirty="0"/>
           </a:p>
@@ -14749,7 +15078,7 @@
         </p:nvSpPr>
         <p:spPr>
           <a:xfrm>
-            <a:off x="5803392" y="2258568"/>
+            <a:off x="4370832" y="2258568"/>
             <a:ext cx="1828800" cy="292608"/>
           </a:xfrm>
           <a:prstGeom prst="rect">
@@ -14758,11 +15087,11 @@
             </a:avLst>
           </a:prstGeom>
           <a:solidFill>
-            <a:srgbClr val="CCFBF1"/>
+            <a:srgbClr val="FCE7F3"/>
           </a:solidFill>
           <a:ln w="19050">
             <a:solidFill>
-              <a:srgbClr val="0D9488"/>
+              <a:srgbClr val="DB2777"/>
             </a:solidFill>
             <a:prstDash val="solid"/>
           </a:ln>
@@ -14783,7 +15112,7 @@
         </p:nvSpPr>
         <p:spPr>
           <a:xfrm>
-            <a:off x="5803392" y="2258568"/>
+            <a:off x="4370832" y="2258568"/>
             <a:ext cx="1828800" cy="292608"/>
           </a:xfrm>
           <a:prstGeom prst="rect">
@@ -14802,13 +15131,13 @@
             <a:r>
               <a:rPr lang="en-US" sz="1300" b="1" dirty="0">
                 <a:solidFill>
-                  <a:srgbClr val="0F766E"/>
+                  <a:srgbClr val="9D174D"/>
                 </a:solidFill>
                 <a:latin typeface="Trebuchet MS" pitchFamily="34" charset="0"/>
                 <a:ea typeface="Trebuchet MS" pitchFamily="34" charset="-122"/>
                 <a:cs typeface="Trebuchet MS" pitchFamily="34" charset="-120"/>
               </a:rPr>
-              <a:t>dict</a:t>
+              <a:t>at</a:t>
             </a:r>
             <a:endParaRPr lang="en-US" sz="1300" dirty="0"/>
           </a:p>
@@ -14822,7 +15151,7 @@
         </p:nvSpPr>
         <p:spPr>
           <a:xfrm>
-            <a:off x="5803392" y="2569464"/>
+            <a:off x="4370832" y="2569464"/>
             <a:ext cx="1828800" cy="201168"/>
           </a:xfrm>
           <a:prstGeom prst="rect">
@@ -14847,7 +15176,7 @@
                 <a:ea typeface="Calibri" pitchFamily="34" charset="-122"/>
                 <a:cs typeface="Calibri" pitchFamily="34" charset="-120"/>
               </a:rPr>
-              <a:t>say, speak</a:t>
+              <a:t>one who does</a:t>
             </a:r>
             <a:endParaRPr lang="en-US" sz="850" dirty="0"/>
           </a:p>
@@ -14856,6 +15185,118 @@
       <p:sp>
         <p:nvSpPr>
           <p:cNvPr id="22" name="Shape 20"/>
+          <p:cNvSpPr/>
+          <p:nvPr/>
+        </p:nvSpPr>
+        <p:spPr>
+          <a:xfrm>
+            <a:off x="6519672" y="2258568"/>
+            <a:ext cx="1828800" cy="292608"/>
+          </a:xfrm>
+          <a:prstGeom prst="rect">
+            <a:avLst>
+              <a:gd name="adj" fmla="val 25000"/>
+            </a:avLst>
+          </a:prstGeom>
+          <a:solidFill>
+            <a:srgbClr val="FCE7F3"/>
+          </a:solidFill>
+          <a:ln w="19050">
+            <a:solidFill>
+              <a:srgbClr val="DB2777"/>
+            </a:solidFill>
+            <a:prstDash val="solid"/>
+          </a:ln>
+          <a:effectLst>
+            <a:outerShdw sx="100000" sy="100000" kx="0" ky="0" algn="bl" rotWithShape="0" blurRad="101600" dist="38100" dir="8100000">
+              <a:srgbClr val="000000">
+                <a:alpha val="12000"/>
+              </a:srgbClr>
+            </a:outerShdw>
+          </a:effectLst>
+        </p:spPr>
+      </p:sp>
+      <p:sp>
+        <p:nvSpPr>
+          <p:cNvPr id="23" name="Text 21"/>
+          <p:cNvSpPr/>
+          <p:nvPr/>
+        </p:nvSpPr>
+        <p:spPr>
+          <a:xfrm>
+            <a:off x="6519672" y="2258568"/>
+            <a:ext cx="1828800" cy="292608"/>
+          </a:xfrm>
+          <a:prstGeom prst="rect">
+            <a:avLst/>
+          </a:prstGeom>
+          <a:noFill/>
+          <a:ln/>
+        </p:spPr>
+        <p:txBody>
+          <a:bodyPr wrap="square" lIns="0" tIns="0" rIns="0" bIns="0" rtlCol="0" anchor="ctr"/>
+          <a:lstStyle/>
+          <a:p>
+            <a:pPr algn="ctr" indent="0" marL="0">
+              <a:buNone/>
+            </a:pPr>
+            <a:r>
+              <a:rPr lang="en-US" sz="1300" b="1" dirty="0">
+                <a:solidFill>
+                  <a:srgbClr val="9D174D"/>
+                </a:solidFill>
+                <a:latin typeface="Trebuchet MS" pitchFamily="34" charset="0"/>
+                <a:ea typeface="Trebuchet MS" pitchFamily="34" charset="-122"/>
+                <a:cs typeface="Trebuchet MS" pitchFamily="34" charset="-120"/>
+              </a:rPr>
+              <a:t>or</a:t>
+            </a:r>
+            <a:endParaRPr lang="en-US" sz="1300" dirty="0"/>
+          </a:p>
+        </p:txBody>
+      </p:sp>
+      <p:sp>
+        <p:nvSpPr>
+          <p:cNvPr id="24" name="Text 22"/>
+          <p:cNvSpPr/>
+          <p:nvPr/>
+        </p:nvSpPr>
+        <p:spPr>
+          <a:xfrm>
+            <a:off x="6519672" y="2569464"/>
+            <a:ext cx="1828800" cy="201168"/>
+          </a:xfrm>
+          <a:prstGeom prst="rect">
+            <a:avLst/>
+          </a:prstGeom>
+          <a:noFill/>
+          <a:ln/>
+        </p:spPr>
+        <p:txBody>
+          <a:bodyPr wrap="square" lIns="0" tIns="0" rIns="0" bIns="0" rtlCol="0" anchor="t"/>
+          <a:lstStyle/>
+          <a:p>
+            <a:pPr algn="ctr" indent="0" marL="0">
+              <a:buNone/>
+            </a:pPr>
+            <a:r>
+              <a:rPr lang="en-US" sz="850" dirty="0">
+                <a:solidFill>
+                  <a:srgbClr val="475569"/>
+                </a:solidFill>
+                <a:latin typeface="Calibri" pitchFamily="34" charset="0"/>
+                <a:ea typeface="Calibri" pitchFamily="34" charset="-122"/>
+                <a:cs typeface="Calibri" pitchFamily="34" charset="-120"/>
+              </a:rPr>
+              <a:t>person or agent</a:t>
+            </a:r>
+            <a:endParaRPr lang="en-US" sz="850" dirty="0"/>
+          </a:p>
+        </p:txBody>
+      </p:sp>
+      <p:sp>
+        <p:nvSpPr>
+          <p:cNvPr id="25" name="Shape 23"/>
           <p:cNvSpPr/>
           <p:nvPr/>
         </p:nvSpPr>
@@ -14882,7 +15323,7 @@
       </p:sp>
       <p:sp>
         <p:nvSpPr>
-          <p:cNvPr id="23" name="Text 21"/>
+          <p:cNvPr id="26" name="Text 24"/>
           <p:cNvSpPr/>
           <p:nvPr/>
         </p:nvSpPr>
@@ -14921,7 +15362,7 @@
       </p:sp>
       <p:sp>
         <p:nvSpPr>
-          <p:cNvPr id="24" name="Shape 22"/>
+          <p:cNvPr id="27" name="Shape 25"/>
           <p:cNvSpPr/>
           <p:nvPr/>
         </p:nvSpPr>
@@ -14948,13 +15389,13 @@
       </p:sp>
       <p:sp>
         <p:nvSpPr>
-          <p:cNvPr id="25" name="Shape 23"/>
-          <p:cNvSpPr/>
-          <p:nvPr/>
-        </p:nvSpPr>
-        <p:spPr>
-          <a:xfrm>
-            <a:off x="2999232" y="3364992"/>
+          <p:cNvPr id="28" name="Shape 26"/>
+          <p:cNvSpPr/>
+          <p:nvPr/>
+        </p:nvSpPr>
+        <p:spPr>
+          <a:xfrm>
+            <a:off x="2313432" y="3364992"/>
             <a:ext cx="1645920" cy="475488"/>
           </a:xfrm>
           <a:prstGeom prst="rect">
@@ -14975,13 +15416,13 @@
       </p:sp>
       <p:sp>
         <p:nvSpPr>
-          <p:cNvPr id="26" name="Text 24"/>
-          <p:cNvSpPr/>
-          <p:nvPr/>
-        </p:nvSpPr>
-        <p:spPr>
-          <a:xfrm>
-            <a:off x="2999232" y="3364992"/>
+          <p:cNvPr id="29" name="Text 27"/>
+          <p:cNvSpPr/>
+          <p:nvPr/>
+        </p:nvSpPr>
+        <p:spPr>
+          <a:xfrm>
+            <a:off x="2313432" y="3364992"/>
             <a:ext cx="1645920" cy="475488"/>
           </a:xfrm>
           <a:prstGeom prst="rect">
@@ -15006,7 +15447,7 @@
                 <a:ea typeface="Trebuchet MS" pitchFamily="34" charset="-122"/>
                 <a:cs typeface="Trebuchet MS" pitchFamily="34" charset="-120"/>
               </a:rPr>
-              <a:t>ver</a:t>
+              <a:t>dic</a:t>
             </a:r>
             <a:endParaRPr lang="en-US" sz="1400" dirty="0"/>
           </a:p>
@@ -15014,14 +15455,14 @@
       </p:sp>
       <p:sp>
         <p:nvSpPr>
-          <p:cNvPr id="27" name="Text 25"/>
-          <p:cNvSpPr/>
-          <p:nvPr/>
-        </p:nvSpPr>
-        <p:spPr>
-          <a:xfrm>
-            <a:off x="4645152" y="3364992"/>
-            <a:ext cx="1097280" cy="475488"/>
+          <p:cNvPr id="30" name="Text 28"/>
+          <p:cNvSpPr/>
+          <p:nvPr/>
+        </p:nvSpPr>
+        <p:spPr>
+          <a:xfrm>
+            <a:off x="3959352" y="3364992"/>
+            <a:ext cx="411480" cy="475488"/>
           </a:xfrm>
           <a:prstGeom prst="rect">
             <a:avLst/>
@@ -15053,13 +15494,13 @@
       </p:sp>
       <p:sp>
         <p:nvSpPr>
-          <p:cNvPr id="28" name="Shape 26"/>
-          <p:cNvSpPr/>
-          <p:nvPr/>
-        </p:nvSpPr>
-        <p:spPr>
-          <a:xfrm>
-            <a:off x="5742432" y="3364992"/>
+          <p:cNvPr id="31" name="Shape 29"/>
+          <p:cNvSpPr/>
+          <p:nvPr/>
+        </p:nvSpPr>
+        <p:spPr>
+          <a:xfrm>
+            <a:off x="4370832" y="3364992"/>
             <a:ext cx="1645920" cy="475488"/>
           </a:xfrm>
           <a:prstGeom prst="rect">
@@ -15080,13 +15521,13 @@
       </p:sp>
       <p:sp>
         <p:nvSpPr>
-          <p:cNvPr id="29" name="Text 27"/>
-          <p:cNvSpPr/>
-          <p:nvPr/>
-        </p:nvSpPr>
-        <p:spPr>
-          <a:xfrm>
-            <a:off x="5742432" y="3364992"/>
+          <p:cNvPr id="32" name="Text 30"/>
+          <p:cNvSpPr/>
+          <p:nvPr/>
+        </p:nvSpPr>
+        <p:spPr>
+          <a:xfrm>
+            <a:off x="4370832" y="3364992"/>
             <a:ext cx="1645920" cy="475488"/>
           </a:xfrm>
           <a:prstGeom prst="rect">
@@ -15111,7 +15552,7 @@
                 <a:ea typeface="Trebuchet MS" pitchFamily="34" charset="-122"/>
                 <a:cs typeface="Trebuchet MS" pitchFamily="34" charset="-120"/>
               </a:rPr>
-              <a:t>dict</a:t>
+              <a:t>ta</a:t>
             </a:r>
             <a:endParaRPr lang="en-US" sz="1400" dirty="0"/>
           </a:p>
@@ -15119,7 +15560,112 @@
       </p:sp>
       <p:sp>
         <p:nvSpPr>
-          <p:cNvPr id="30" name="Shape 28"/>
+          <p:cNvPr id="33" name="Text 31"/>
+          <p:cNvSpPr/>
+          <p:nvPr/>
+        </p:nvSpPr>
+        <p:spPr>
+          <a:xfrm>
+            <a:off x="6016752" y="3364992"/>
+            <a:ext cx="411480" cy="475488"/>
+          </a:xfrm>
+          <a:prstGeom prst="rect">
+            <a:avLst/>
+          </a:prstGeom>
+          <a:noFill/>
+          <a:ln/>
+        </p:spPr>
+        <p:txBody>
+          <a:bodyPr wrap="square" lIns="0" tIns="0" rIns="0" bIns="0" rtlCol="0" anchor="ctr"/>
+          <a:lstStyle/>
+          <a:p>
+            <a:pPr algn="ctr" indent="0" marL="0">
+              <a:buNone/>
+            </a:pPr>
+            <a:r>
+              <a:rPr lang="en-US" sz="1600" b="1" dirty="0">
+                <a:solidFill>
+                  <a:srgbClr val="0D9488"/>
+                </a:solidFill>
+                <a:latin typeface="Trebuchet MS" pitchFamily="34" charset="0"/>
+                <a:ea typeface="Trebuchet MS" pitchFamily="34" charset="-122"/>
+                <a:cs typeface="Trebuchet MS" pitchFamily="34" charset="-120"/>
+              </a:rPr>
+              <a:t>·</a:t>
+            </a:r>
+            <a:endParaRPr lang="en-US" sz="1600" dirty="0"/>
+          </a:p>
+        </p:txBody>
+      </p:sp>
+      <p:sp>
+        <p:nvSpPr>
+          <p:cNvPr id="34" name="Shape 32"/>
+          <p:cNvSpPr/>
+          <p:nvPr/>
+        </p:nvSpPr>
+        <p:spPr>
+          <a:xfrm>
+            <a:off x="6428232" y="3364992"/>
+            <a:ext cx="1645920" cy="475488"/>
+          </a:xfrm>
+          <a:prstGeom prst="rect">
+            <a:avLst>
+              <a:gd name="adj" fmla="val 9615"/>
+            </a:avLst>
+          </a:prstGeom>
+          <a:solidFill>
+            <a:srgbClr val="FFFFFF"/>
+          </a:solidFill>
+          <a:ln w="12700">
+            <a:solidFill>
+              <a:srgbClr val="0D9488"/>
+            </a:solidFill>
+            <a:prstDash val="solid"/>
+          </a:ln>
+        </p:spPr>
+      </p:sp>
+      <p:sp>
+        <p:nvSpPr>
+          <p:cNvPr id="35" name="Text 33"/>
+          <p:cNvSpPr/>
+          <p:nvPr/>
+        </p:nvSpPr>
+        <p:spPr>
+          <a:xfrm>
+            <a:off x="6428232" y="3364992"/>
+            <a:ext cx="1645920" cy="475488"/>
+          </a:xfrm>
+          <a:prstGeom prst="rect">
+            <a:avLst/>
+          </a:prstGeom>
+          <a:noFill/>
+          <a:ln/>
+        </p:spPr>
+        <p:txBody>
+          <a:bodyPr wrap="square" lIns="0" tIns="0" rIns="0" bIns="0" rtlCol="0" anchor="ctr"/>
+          <a:lstStyle/>
+          <a:p>
+            <a:pPr algn="ctr" indent="0" marL="0">
+              <a:buNone/>
+            </a:pPr>
+            <a:r>
+              <a:rPr lang="en-US" sz="1400" b="1" dirty="0">
+                <a:solidFill>
+                  <a:srgbClr val="0D9488"/>
+                </a:solidFill>
+                <a:latin typeface="Trebuchet MS" pitchFamily="34" charset="0"/>
+                <a:ea typeface="Trebuchet MS" pitchFamily="34" charset="-122"/>
+                <a:cs typeface="Trebuchet MS" pitchFamily="34" charset="-120"/>
+              </a:rPr>
+              <a:t>tor</a:t>
+            </a:r>
+            <a:endParaRPr lang="en-US" sz="1400" dirty="0"/>
+          </a:p>
+        </p:txBody>
+      </p:sp>
+      <p:sp>
+        <p:nvSpPr>
+          <p:cNvPr id="36" name="Shape 34"/>
           <p:cNvSpPr/>
           <p:nvPr/>
         </p:nvSpPr>
@@ -15146,7 +15692,7 @@
       </p:sp>
       <p:sp>
         <p:nvSpPr>
-          <p:cNvPr id="31" name="Text 29"/>
+          <p:cNvPr id="37" name="Text 35"/>
           <p:cNvSpPr/>
           <p:nvPr/>
         </p:nvSpPr>
@@ -15185,7 +15731,7 @@
       </p:sp>
       <p:sp>
         <p:nvSpPr>
-          <p:cNvPr id="32" name="Shape 30"/>
+          <p:cNvPr id="38" name="Shape 36"/>
           <p:cNvSpPr/>
           <p:nvPr/>
         </p:nvSpPr>
@@ -15212,13 +15758,13 @@
       </p:sp>
       <p:sp>
         <p:nvSpPr>
-          <p:cNvPr id="33" name="Shape 31"/>
-          <p:cNvSpPr/>
-          <p:nvPr/>
-        </p:nvSpPr>
-        <p:spPr>
-          <a:xfrm>
-            <a:off x="2254649" y="4169664"/>
+          <p:cNvPr id="39" name="Shape 37"/>
+          <p:cNvSpPr/>
+          <p:nvPr/>
+        </p:nvSpPr>
+        <p:spPr>
+          <a:xfrm>
+            <a:off x="2124837" y="4169664"/>
             <a:ext cx="685800" cy="384048"/>
           </a:xfrm>
           <a:prstGeom prst="rect">
@@ -15239,13 +15785,13 @@
       </p:sp>
       <p:sp>
         <p:nvSpPr>
-          <p:cNvPr id="34" name="Text 32"/>
-          <p:cNvSpPr/>
-          <p:nvPr/>
-        </p:nvSpPr>
-        <p:spPr>
-          <a:xfrm>
-            <a:off x="2254649" y="4169664"/>
+          <p:cNvPr id="40" name="Text 38"/>
+          <p:cNvSpPr/>
+          <p:nvPr/>
+        </p:nvSpPr>
+        <p:spPr>
+          <a:xfrm>
+            <a:off x="2124837" y="4169664"/>
             <a:ext cx="685800" cy="384048"/>
           </a:xfrm>
           <a:prstGeom prst="rect">
@@ -15270,7 +15816,7 @@
                 <a:ea typeface="Trebuchet MS" pitchFamily="34" charset="-122"/>
                 <a:cs typeface="Trebuchet MS" pitchFamily="34" charset="-120"/>
               </a:rPr>
-              <a:t>v</a:t>
+              <a:t>d</a:t>
             </a:r>
             <a:endParaRPr lang="en-US" sz="900" dirty="0"/>
           </a:p>
@@ -15278,13 +15824,13 @@
       </p:sp>
       <p:sp>
         <p:nvSpPr>
-          <p:cNvPr id="35" name="Shape 33"/>
-          <p:cNvSpPr/>
-          <p:nvPr/>
-        </p:nvSpPr>
-        <p:spPr>
-          <a:xfrm>
-            <a:off x="3293146" y="4169664"/>
+          <p:cNvPr id="41" name="Shape 39"/>
+          <p:cNvSpPr/>
+          <p:nvPr/>
+        </p:nvSpPr>
+        <p:spPr>
+          <a:xfrm>
+            <a:off x="3033522" y="4169664"/>
             <a:ext cx="685800" cy="384048"/>
           </a:xfrm>
           <a:prstGeom prst="rect">
@@ -15305,13 +15851,13 @@
       </p:sp>
       <p:sp>
         <p:nvSpPr>
-          <p:cNvPr id="36" name="Text 34"/>
-          <p:cNvSpPr/>
-          <p:nvPr/>
-        </p:nvSpPr>
-        <p:spPr>
-          <a:xfrm>
-            <a:off x="3293146" y="4169664"/>
+          <p:cNvPr id="42" name="Text 40"/>
+          <p:cNvSpPr/>
+          <p:nvPr/>
+        </p:nvSpPr>
+        <p:spPr>
+          <a:xfrm>
+            <a:off x="3033522" y="4169664"/>
             <a:ext cx="685800" cy="384048"/>
           </a:xfrm>
           <a:prstGeom prst="rect">
@@ -15336,7 +15882,7 @@
                 <a:ea typeface="Trebuchet MS" pitchFamily="34" charset="-122"/>
                 <a:cs typeface="Trebuchet MS" pitchFamily="34" charset="-120"/>
               </a:rPr>
-              <a:t>er</a:t>
+              <a:t>i</a:t>
             </a:r>
             <a:endParaRPr lang="en-US" sz="900" dirty="0"/>
           </a:p>
@@ -15344,13 +15890,13 @@
       </p:sp>
       <p:sp>
         <p:nvSpPr>
-          <p:cNvPr id="37" name="Shape 35"/>
-          <p:cNvSpPr/>
-          <p:nvPr/>
-        </p:nvSpPr>
-        <p:spPr>
-          <a:xfrm>
-            <a:off x="4331643" y="4169664"/>
+          <p:cNvPr id="43" name="Shape 41"/>
+          <p:cNvSpPr/>
+          <p:nvPr/>
+        </p:nvSpPr>
+        <p:spPr>
+          <a:xfrm>
+            <a:off x="3942207" y="4169664"/>
             <a:ext cx="685800" cy="384048"/>
           </a:xfrm>
           <a:prstGeom prst="rect">
@@ -15371,13 +15917,13 @@
       </p:sp>
       <p:sp>
         <p:nvSpPr>
-          <p:cNvPr id="38" name="Text 36"/>
-          <p:cNvSpPr/>
-          <p:nvPr/>
-        </p:nvSpPr>
-        <p:spPr>
-          <a:xfrm>
-            <a:off x="4331643" y="4169664"/>
+          <p:cNvPr id="44" name="Text 42"/>
+          <p:cNvSpPr/>
+          <p:nvPr/>
+        </p:nvSpPr>
+        <p:spPr>
+          <a:xfrm>
+            <a:off x="3942207" y="4169664"/>
             <a:ext cx="685800" cy="384048"/>
           </a:xfrm>
           <a:prstGeom prst="rect">
@@ -15402,7 +15948,7 @@
                 <a:ea typeface="Trebuchet MS" pitchFamily="34" charset="-122"/>
                 <a:cs typeface="Trebuchet MS" pitchFamily="34" charset="-120"/>
               </a:rPr>
-              <a:t>d</a:t>
+              <a:t>c</a:t>
             </a:r>
             <a:endParaRPr lang="en-US" sz="900" dirty="0"/>
           </a:p>
@@ -15410,13 +15956,52 @@
       </p:sp>
       <p:sp>
         <p:nvSpPr>
-          <p:cNvPr id="39" name="Shape 37"/>
-          <p:cNvSpPr/>
-          <p:nvPr/>
-        </p:nvSpPr>
-        <p:spPr>
-          <a:xfrm>
-            <a:off x="5370141" y="4169664"/>
+          <p:cNvPr id="45" name="Text 43"/>
+          <p:cNvSpPr/>
+          <p:nvPr/>
+        </p:nvSpPr>
+        <p:spPr>
+          <a:xfrm>
+            <a:off x="3942207" y="4572000"/>
+            <a:ext cx="685800" cy="219456"/>
+          </a:xfrm>
+          <a:prstGeom prst="rect">
+            <a:avLst/>
+          </a:prstGeom>
+          <a:noFill/>
+          <a:ln/>
+        </p:spPr>
+        <p:txBody>
+          <a:bodyPr wrap="square" lIns="0" tIns="0" rIns="0" bIns="0" rtlCol="0" anchor="t"/>
+          <a:lstStyle/>
+          <a:p>
+            <a:pPr algn="ctr" indent="0" marL="0">
+              <a:buNone/>
+            </a:pPr>
+            <a:r>
+              <a:rPr lang="en-US" sz="750" i="1" dirty="0">
+                <a:solidFill>
+                  <a:srgbClr val="94A3B8"/>
+                </a:solidFill>
+                <a:latin typeface="Calibri" pitchFamily="34" charset="0"/>
+                <a:ea typeface="Calibri" pitchFamily="34" charset="-122"/>
+                <a:cs typeface="Calibri" pitchFamily="34" charset="-120"/>
+              </a:rPr>
+              <a:t>/k/</a:t>
+            </a:r>
+            <a:endParaRPr lang="en-US" sz="750" dirty="0"/>
+          </a:p>
+        </p:txBody>
+      </p:sp>
+      <p:sp>
+        <p:nvSpPr>
+          <p:cNvPr id="46" name="Shape 44"/>
+          <p:cNvSpPr/>
+          <p:nvPr/>
+        </p:nvSpPr>
+        <p:spPr>
+          <a:xfrm>
+            <a:off x="4850892" y="4169664"/>
             <a:ext cx="685800" cy="384048"/>
           </a:xfrm>
           <a:prstGeom prst="rect">
@@ -15437,13 +16022,13 @@
       </p:sp>
       <p:sp>
         <p:nvSpPr>
-          <p:cNvPr id="40" name="Text 38"/>
-          <p:cNvSpPr/>
-          <p:nvPr/>
-        </p:nvSpPr>
-        <p:spPr>
-          <a:xfrm>
-            <a:off x="5370141" y="4169664"/>
+          <p:cNvPr id="47" name="Text 45"/>
+          <p:cNvSpPr/>
+          <p:nvPr/>
+        </p:nvSpPr>
+        <p:spPr>
+          <a:xfrm>
+            <a:off x="4850892" y="4169664"/>
             <a:ext cx="685800" cy="384048"/>
           </a:xfrm>
           <a:prstGeom prst="rect">
@@ -15468,7 +16053,7 @@
                 <a:ea typeface="Trebuchet MS" pitchFamily="34" charset="-122"/>
                 <a:cs typeface="Trebuchet MS" pitchFamily="34" charset="-120"/>
               </a:rPr>
-              <a:t>i</a:t>
+              <a:t>t</a:t>
             </a:r>
             <a:endParaRPr lang="en-US" sz="900" dirty="0"/>
           </a:p>
@@ -15476,13 +16061,13 @@
       </p:sp>
       <p:sp>
         <p:nvSpPr>
-          <p:cNvPr id="41" name="Shape 39"/>
-          <p:cNvSpPr/>
-          <p:nvPr/>
-        </p:nvSpPr>
-        <p:spPr>
-          <a:xfrm>
-            <a:off x="6408638" y="4169664"/>
+          <p:cNvPr id="48" name="Shape 46"/>
+          <p:cNvSpPr/>
+          <p:nvPr/>
+        </p:nvSpPr>
+        <p:spPr>
+          <a:xfrm>
+            <a:off x="5759577" y="4169664"/>
             <a:ext cx="685800" cy="384048"/>
           </a:xfrm>
           <a:prstGeom prst="rect">
@@ -15503,13 +16088,13 @@
       </p:sp>
       <p:sp>
         <p:nvSpPr>
-          <p:cNvPr id="42" name="Text 40"/>
-          <p:cNvSpPr/>
-          <p:nvPr/>
-        </p:nvSpPr>
-        <p:spPr>
-          <a:xfrm>
-            <a:off x="6408638" y="4169664"/>
+          <p:cNvPr id="49" name="Text 47"/>
+          <p:cNvSpPr/>
+          <p:nvPr/>
+        </p:nvSpPr>
+        <p:spPr>
+          <a:xfrm>
+            <a:off x="5759577" y="4169664"/>
             <a:ext cx="685800" cy="384048"/>
           </a:xfrm>
           <a:prstGeom prst="rect">
@@ -15534,7 +16119,7 @@
                 <a:ea typeface="Trebuchet MS" pitchFamily="34" charset="-122"/>
                 <a:cs typeface="Trebuchet MS" pitchFamily="34" charset="-120"/>
               </a:rPr>
-              <a:t>c</a:t>
+              <a:t>a</a:t>
             </a:r>
             <a:endParaRPr lang="en-US" sz="900" dirty="0"/>
           </a:p>
@@ -15542,52 +16127,13 @@
       </p:sp>
       <p:sp>
         <p:nvSpPr>
-          <p:cNvPr id="43" name="Text 41"/>
-          <p:cNvSpPr/>
-          <p:nvPr/>
-        </p:nvSpPr>
-        <p:spPr>
-          <a:xfrm>
-            <a:off x="6408638" y="4572000"/>
-            <a:ext cx="685800" cy="219456"/>
-          </a:xfrm>
-          <a:prstGeom prst="rect">
-            <a:avLst/>
-          </a:prstGeom>
-          <a:noFill/>
-          <a:ln/>
-        </p:spPr>
-        <p:txBody>
-          <a:bodyPr wrap="square" lIns="0" tIns="0" rIns="0" bIns="0" rtlCol="0" anchor="t"/>
-          <a:lstStyle/>
-          <a:p>
-            <a:pPr algn="ctr" indent="0" marL="0">
-              <a:buNone/>
-            </a:pPr>
-            <a:r>
-              <a:rPr lang="en-US" sz="750" i="1" dirty="0">
-                <a:solidFill>
-                  <a:srgbClr val="94A3B8"/>
-                </a:solidFill>
-                <a:latin typeface="Calibri" pitchFamily="34" charset="0"/>
-                <a:ea typeface="Calibri" pitchFamily="34" charset="-122"/>
-                <a:cs typeface="Calibri" pitchFamily="34" charset="-120"/>
-              </a:rPr>
-              <a:t>/k/</a:t>
-            </a:r>
-            <a:endParaRPr lang="en-US" sz="750" dirty="0"/>
-          </a:p>
-        </p:txBody>
-      </p:sp>
-      <p:sp>
-        <p:nvSpPr>
-          <p:cNvPr id="44" name="Shape 42"/>
-          <p:cNvSpPr/>
-          <p:nvPr/>
-        </p:nvSpPr>
-        <p:spPr>
-          <a:xfrm>
-            <a:off x="7447135" y="4169664"/>
+          <p:cNvPr id="50" name="Shape 48"/>
+          <p:cNvSpPr/>
+          <p:nvPr/>
+        </p:nvSpPr>
+        <p:spPr>
+          <a:xfrm>
+            <a:off x="6668262" y="4169664"/>
             <a:ext cx="685800" cy="384048"/>
           </a:xfrm>
           <a:prstGeom prst="rect">
@@ -15608,13 +16154,13 @@
       </p:sp>
       <p:sp>
         <p:nvSpPr>
-          <p:cNvPr id="45" name="Text 43"/>
-          <p:cNvSpPr/>
-          <p:nvPr/>
-        </p:nvSpPr>
-        <p:spPr>
-          <a:xfrm>
-            <a:off x="7447135" y="4169664"/>
+          <p:cNvPr id="51" name="Text 49"/>
+          <p:cNvSpPr/>
+          <p:nvPr/>
+        </p:nvSpPr>
+        <p:spPr>
+          <a:xfrm>
+            <a:off x="6668262" y="4169664"/>
             <a:ext cx="685800" cy="384048"/>
           </a:xfrm>
           <a:prstGeom prst="rect">
@@ -15640,6 +16186,72 @@
                 <a:cs typeface="Trebuchet MS" pitchFamily="34" charset="-120"/>
               </a:rPr>
               <a:t>t</a:t>
+            </a:r>
+            <a:endParaRPr lang="en-US" sz="900" dirty="0"/>
+          </a:p>
+        </p:txBody>
+      </p:sp>
+      <p:sp>
+        <p:nvSpPr>
+          <p:cNvPr id="52" name="Shape 50"/>
+          <p:cNvSpPr/>
+          <p:nvPr/>
+        </p:nvSpPr>
+        <p:spPr>
+          <a:xfrm>
+            <a:off x="7576947" y="4169664"/>
+            <a:ext cx="685800" cy="384048"/>
+          </a:xfrm>
+          <a:prstGeom prst="rect">
+            <a:avLst>
+              <a:gd name="adj" fmla="val 9524"/>
+            </a:avLst>
+          </a:prstGeom>
+          <a:solidFill>
+            <a:srgbClr val="FFFFFF"/>
+          </a:solidFill>
+          <a:ln w="12700">
+            <a:solidFill>
+              <a:srgbClr val="DB2777"/>
+            </a:solidFill>
+            <a:prstDash val="solid"/>
+          </a:ln>
+        </p:spPr>
+      </p:sp>
+      <p:sp>
+        <p:nvSpPr>
+          <p:cNvPr id="53" name="Text 51"/>
+          <p:cNvSpPr/>
+          <p:nvPr/>
+        </p:nvSpPr>
+        <p:spPr>
+          <a:xfrm>
+            <a:off x="7576947" y="4169664"/>
+            <a:ext cx="685800" cy="384048"/>
+          </a:xfrm>
+          <a:prstGeom prst="rect">
+            <a:avLst/>
+          </a:prstGeom>
+          <a:noFill/>
+          <a:ln/>
+        </p:spPr>
+        <p:txBody>
+          <a:bodyPr wrap="square" lIns="0" tIns="0" rIns="0" bIns="0" rtlCol="0" anchor="ctr"/>
+          <a:lstStyle/>
+          <a:p>
+            <a:pPr algn="ctr" indent="0" marL="0">
+              <a:buNone/>
+            </a:pPr>
+            <a:r>
+              <a:rPr lang="en-US" sz="900" b="1" dirty="0">
+                <a:solidFill>
+                  <a:srgbClr val="9D174D"/>
+                </a:solidFill>
+                <a:latin typeface="Trebuchet MS" pitchFamily="34" charset="0"/>
+                <a:ea typeface="Trebuchet MS" pitchFamily="34" charset="-122"/>
+                <a:cs typeface="Trebuchet MS" pitchFamily="34" charset="-120"/>
+              </a:rPr>
+              <a:t>or</a:t>
             </a:r>
             <a:endParaRPr lang="en-US" sz="900" dirty="0"/>
           </a:p>
@@ -16965,7 +17577,7 @@
                 <a:ea typeface="Calibri" pitchFamily="34" charset="-122"/>
                 <a:cs typeface="Calibri" pitchFamily="34" charset="-120"/>
               </a:rPr>
-              <a:t>The </a:t>
+              <a:t>The jury's </a:t>
             </a:r>
             <a:pPr algn="l" indent="0" marL="0">
               <a:buNone/>
@@ -16982,7 +17594,7 @@
                 <a:ea typeface="Calibri" pitchFamily="34" charset="-122"/>
                 <a:cs typeface="Calibri" pitchFamily="34" charset="-120"/>
               </a:rPr>
-              <a:t>dictator</a:t>
+              <a:t>verdict</a:t>
             </a:r>
             <a:pPr algn="l" indent="0" marL="0">
               <a:buNone/>
@@ -16996,7 +17608,7 @@
                 <a:ea typeface="Calibri" pitchFamily="34" charset="-122"/>
                 <a:cs typeface="Calibri" pitchFamily="34" charset="-120"/>
               </a:rPr>
-              <a:t> tried to </a:t>
+              <a:t> was a </a:t>
             </a:r>
             <a:pPr algn="l" indent="0" marL="0">
               <a:buNone/>
@@ -17013,7 +17625,7 @@
                 <a:ea typeface="Calibri" pitchFamily="34" charset="-122"/>
                 <a:cs typeface="Calibri" pitchFamily="34" charset="-120"/>
               </a:rPr>
-              <a:t>contradict</a:t>
+              <a:t>contradiction</a:t>
             </a:r>
             <a:pPr algn="l" indent="0" marL="0">
               <a:buNone/>
@@ -17027,7 +17639,7 @@
                 <a:ea typeface="Calibri" pitchFamily="34" charset="-122"/>
                 <a:cs typeface="Calibri" pitchFamily="34" charset="-120"/>
               </a:rPr>
-              <a:t> the </a:t>
+              <a:t> of everything the </a:t>
             </a:r>
             <a:pPr algn="l" indent="0" marL="0">
               <a:buNone/>
@@ -17044,7 +17656,7 @@
                 <a:ea typeface="Calibri" pitchFamily="34" charset="-122"/>
                 <a:cs typeface="Calibri" pitchFamily="34" charset="-120"/>
               </a:rPr>
-              <a:t>edict</a:t>
+              <a:t>dictation</a:t>
             </a:r>
             <a:pPr algn="l" indent="0" marL="0">
               <a:buNone/>
@@ -17058,7 +17670,7 @@
                 <a:ea typeface="Calibri" pitchFamily="34" charset="-122"/>
                 <a:cs typeface="Calibri" pitchFamily="34" charset="-120"/>
               </a:rPr>
-              <a:t>, but the people would not accept his words.</a:t>
+              <a:t> had recorded.</a:t>
             </a:r>
             <a:endParaRPr lang="en-US" sz="1800" dirty="0"/>
           </a:p>
@@ -17213,7 +17825,7 @@
                 <a:ea typeface="Trebuchet MS" pitchFamily="34" charset="-122"/>
                 <a:cs typeface="Trebuchet MS" pitchFamily="34" charset="-120"/>
               </a:rPr>
-              <a:t>dictator</a:t>
+              <a:t>verdict</a:t>
             </a:r>
             <a:endParaRPr lang="en-US" sz="1400" dirty="0"/>
           </a:p>
@@ -17341,7 +17953,7 @@
                 <a:ea typeface="Trebuchet MS" pitchFamily="34" charset="-122"/>
                 <a:cs typeface="Trebuchet MS" pitchFamily="34" charset="-120"/>
               </a:rPr>
-              <a:t>contradict</a:t>
+              <a:t>contradiction</a:t>
             </a:r>
             <a:endParaRPr lang="en-US" sz="1400" dirty="0"/>
           </a:p>
@@ -17469,7 +18081,7 @@
                 <a:ea typeface="Trebuchet MS" pitchFamily="34" charset="-122"/>
                 <a:cs typeface="Trebuchet MS" pitchFamily="34" charset="-120"/>
               </a:rPr>
-              <a:t>edict</a:t>
+              <a:t>dictation</a:t>
             </a:r>
             <a:endParaRPr lang="en-US" sz="1400" dirty="0"/>
           </a:p>
@@ -17939,7 +18551,7 @@
                 <a:ea typeface="Trebuchet MS" pitchFamily="34" charset="-122"/>
                 <a:cs typeface="Trebuchet MS" pitchFamily="34" charset="-120"/>
               </a:rPr>
-              <a:t>dictator</a:t>
+              <a:t>verdict</a:t>
             </a:r>
             <a:endParaRPr lang="en-US" sz="2800" dirty="0"/>
           </a:p>
@@ -18766,7 +19378,7 @@
                 <a:ea typeface="Trebuchet MS" pitchFamily="34" charset="-122"/>
                 <a:cs typeface="Trebuchet MS" pitchFamily="34" charset="-120"/>
               </a:rPr>
-              <a:t>dictator</a:t>
+              <a:t>verdict</a:t>
             </a:r>
             <a:endParaRPr lang="en-US" sz="2800" dirty="0"/>
           </a:p>
@@ -18846,7 +19458,7 @@
         </p:nvSpPr>
         <p:spPr>
           <a:xfrm>
-            <a:off x="2221992" y="2258568"/>
+            <a:off x="2938272" y="2258568"/>
             <a:ext cx="1828800" cy="292608"/>
           </a:xfrm>
           <a:prstGeom prst="rect">
@@ -18855,11 +19467,11 @@
             </a:avLst>
           </a:prstGeom>
           <a:solidFill>
-            <a:srgbClr val="CCFBF1"/>
+            <a:srgbClr val="DDD6FE"/>
           </a:solidFill>
           <a:ln w="19050">
             <a:solidFill>
-              <a:srgbClr val="0D9488"/>
+              <a:srgbClr val="7C3AED"/>
             </a:solidFill>
             <a:prstDash val="solid"/>
           </a:ln>
@@ -18880,7 +19492,7 @@
         </p:nvSpPr>
         <p:spPr>
           <a:xfrm>
-            <a:off x="2221992" y="2258568"/>
+            <a:off x="2938272" y="2258568"/>
             <a:ext cx="1828800" cy="292608"/>
           </a:xfrm>
           <a:prstGeom prst="rect">
@@ -18899,13 +19511,13 @@
             <a:r>
               <a:rPr lang="en-US" sz="1300" b="1" dirty="0">
                 <a:solidFill>
-                  <a:srgbClr val="0F766E"/>
+                  <a:srgbClr val="4C1D95"/>
                 </a:solidFill>
                 <a:latin typeface="Trebuchet MS" pitchFamily="34" charset="0"/>
                 <a:ea typeface="Trebuchet MS" pitchFamily="34" charset="-122"/>
                 <a:cs typeface="Trebuchet MS" pitchFamily="34" charset="-120"/>
               </a:rPr>
-              <a:t>dict</a:t>
+              <a:t>ver</a:t>
             </a:r>
             <a:endParaRPr lang="en-US" sz="1300" dirty="0"/>
           </a:p>
@@ -18919,7 +19531,7 @@
         </p:nvSpPr>
         <p:spPr>
           <a:xfrm>
-            <a:off x="2221992" y="2569464"/>
+            <a:off x="2938272" y="2569464"/>
             <a:ext cx="1828800" cy="201168"/>
           </a:xfrm>
           <a:prstGeom prst="rect">
@@ -18944,7 +19556,7 @@
                 <a:ea typeface="Calibri" pitchFamily="34" charset="-122"/>
                 <a:cs typeface="Calibri" pitchFamily="34" charset="-120"/>
               </a:rPr>
-              <a:t>say, speak</a:t>
+              <a:t>truly, word</a:t>
             </a:r>
             <a:endParaRPr lang="en-US" sz="850" dirty="0"/>
           </a:p>
@@ -18958,7 +19570,7 @@
         </p:nvSpPr>
         <p:spPr>
           <a:xfrm>
-            <a:off x="4370832" y="2258568"/>
+            <a:off x="5803392" y="2258568"/>
             <a:ext cx="1828800" cy="292608"/>
           </a:xfrm>
           <a:prstGeom prst="rect">
@@ -18967,11 +19579,11 @@
             </a:avLst>
           </a:prstGeom>
           <a:solidFill>
-            <a:srgbClr val="FCE7F3"/>
+            <a:srgbClr val="CCFBF1"/>
           </a:solidFill>
           <a:ln w="19050">
             <a:solidFill>
-              <a:srgbClr val="DB2777"/>
+              <a:srgbClr val="0D9488"/>
             </a:solidFill>
             <a:prstDash val="solid"/>
           </a:ln>
@@ -18992,7 +19604,7 @@
         </p:nvSpPr>
         <p:spPr>
           <a:xfrm>
-            <a:off x="4370832" y="2258568"/>
+            <a:off x="5803392" y="2258568"/>
             <a:ext cx="1828800" cy="292608"/>
           </a:xfrm>
           <a:prstGeom prst="rect">
@@ -19011,13 +19623,13 @@
             <a:r>
               <a:rPr lang="en-US" sz="1300" b="1" dirty="0">
                 <a:solidFill>
-                  <a:srgbClr val="9D174D"/>
+                  <a:srgbClr val="0F766E"/>
                 </a:solidFill>
                 <a:latin typeface="Trebuchet MS" pitchFamily="34" charset="0"/>
                 <a:ea typeface="Trebuchet MS" pitchFamily="34" charset="-122"/>
                 <a:cs typeface="Trebuchet MS" pitchFamily="34" charset="-120"/>
               </a:rPr>
-              <a:t>ate</a:t>
+              <a:t>dict</a:t>
             </a:r>
             <a:endParaRPr lang="en-US" sz="1300" dirty="0"/>
           </a:p>
@@ -19031,7 +19643,7 @@
         </p:nvSpPr>
         <p:spPr>
           <a:xfrm>
-            <a:off x="4370832" y="2569464"/>
+            <a:off x="5803392" y="2569464"/>
             <a:ext cx="1828800" cy="201168"/>
           </a:xfrm>
           <a:prstGeom prst="rect">
@@ -19056,7 +19668,7 @@
                 <a:ea typeface="Calibri" pitchFamily="34" charset="-122"/>
                 <a:cs typeface="Calibri" pitchFamily="34" charset="-120"/>
               </a:rPr>
-              <a:t>to do or act</a:t>
+              <a:t>say, speak</a:t>
             </a:r>
             <a:endParaRPr lang="en-US" sz="850" dirty="0"/>
           </a:p>
@@ -19070,30 +19682,23 @@
         </p:nvSpPr>
         <p:spPr>
           <a:xfrm>
-            <a:off x="6519672" y="2258568"/>
-            <a:ext cx="1828800" cy="292608"/>
+            <a:off x="365760" y="3273552"/>
+            <a:ext cx="1371600" cy="658368"/>
           </a:xfrm>
           <a:prstGeom prst="rect">
             <a:avLst>
-              <a:gd name="adj" fmla="val 25000"/>
+              <a:gd name="adj" fmla="val 8333"/>
             </a:avLst>
           </a:prstGeom>
           <a:solidFill>
-            <a:srgbClr val="FCE7F3"/>
-          </a:solidFill>
-          <a:ln w="19050">
-            <a:solidFill>
-              <a:srgbClr val="DB2777"/>
-            </a:solidFill>
-            <a:prstDash val="solid"/>
-          </a:ln>
-          <a:effectLst>
-            <a:outerShdw sx="100000" sy="100000" kx="0" ky="0" algn="bl" rotWithShape="0" blurRad="101600" dist="38100" dir="8100000">
-              <a:srgbClr val="000000">
-                <a:alpha val="12000"/>
-              </a:srgbClr>
-            </a:outerShdw>
-          </a:effectLst>
+            <a:srgbClr val="E2E8F0"/>
+          </a:solidFill>
+          <a:ln w="12700">
+            <a:solidFill>
+              <a:srgbClr val="E2E8F0"/>
+            </a:solidFill>
+            <a:prstDash val="solid"/>
+          </a:ln>
         </p:spPr>
       </p:sp>
       <p:sp>
@@ -19104,90 +19709,117 @@
         </p:nvSpPr>
         <p:spPr>
           <a:xfrm>
-            <a:off x="6519672" y="2258568"/>
-            <a:ext cx="1828800" cy="292608"/>
-          </a:xfrm>
-          <a:prstGeom prst="rect">
-            <a:avLst/>
-          </a:prstGeom>
-          <a:noFill/>
-          <a:ln/>
-        </p:spPr>
-        <p:txBody>
-          <a:bodyPr wrap="square" lIns="0" tIns="0" rIns="0" bIns="0" rtlCol="0" anchor="ctr"/>
-          <a:lstStyle/>
-          <a:p>
-            <a:pPr algn="ctr" indent="0" marL="0">
-              <a:buNone/>
-            </a:pPr>
-            <a:r>
-              <a:rPr lang="en-US" sz="1300" b="1" dirty="0">
-                <a:solidFill>
-                  <a:srgbClr val="9D174D"/>
+            <a:off x="365760" y="3273552"/>
+            <a:ext cx="1371600" cy="658368"/>
+          </a:xfrm>
+          <a:prstGeom prst="rect">
+            <a:avLst/>
+          </a:prstGeom>
+          <a:noFill/>
+          <a:ln/>
+        </p:spPr>
+        <p:txBody>
+          <a:bodyPr wrap="square" lIns="0" tIns="0" rIns="0" bIns="0" rtlCol="0" anchor="ctr"/>
+          <a:lstStyle/>
+          <a:p>
+            <a:pPr algn="ctr" indent="0" marL="0">
+              <a:buNone/>
+            </a:pPr>
+            <a:r>
+              <a:rPr lang="en-US" sz="1100" b="1" dirty="0">
+                <a:solidFill>
+                  <a:srgbClr val="475569"/>
                 </a:solidFill>
                 <a:latin typeface="Trebuchet MS" pitchFamily="34" charset="0"/>
                 <a:ea typeface="Trebuchet MS" pitchFamily="34" charset="-122"/>
                 <a:cs typeface="Trebuchet MS" pitchFamily="34" charset="-120"/>
               </a:rPr>
-              <a:t>or</a:t>
-            </a:r>
-            <a:endParaRPr lang="en-US" sz="1300" dirty="0"/>
-          </a:p>
-        </p:txBody>
-      </p:sp>
-      <p:sp>
-        <p:nvSpPr>
-          <p:cNvPr id="24" name="Text 22"/>
-          <p:cNvSpPr/>
-          <p:nvPr/>
-        </p:nvSpPr>
-        <p:spPr>
-          <a:xfrm>
-            <a:off x="6519672" y="2569464"/>
-            <a:ext cx="1828800" cy="201168"/>
-          </a:xfrm>
-          <a:prstGeom prst="rect">
-            <a:avLst/>
-          </a:prstGeom>
-          <a:noFill/>
-          <a:ln/>
-        </p:spPr>
-        <p:txBody>
-          <a:bodyPr wrap="square" lIns="0" tIns="0" rIns="0" bIns="0" rtlCol="0" anchor="t"/>
-          <a:lstStyle/>
-          <a:p>
-            <a:pPr algn="ctr" indent="0" marL="0">
-              <a:buNone/>
-            </a:pPr>
-            <a:r>
-              <a:rPr lang="en-US" sz="850" dirty="0">
-                <a:solidFill>
-                  <a:srgbClr val="475569"/>
+              <a:t>Syllables</a:t>
+            </a:r>
+            <a:endParaRPr lang="en-US" sz="1100" dirty="0"/>
+          </a:p>
+        </p:txBody>
+      </p:sp>
+      <p:sp>
+        <p:nvSpPr>
+          <p:cNvPr id="24" name="Shape 22"/>
+          <p:cNvSpPr/>
+          <p:nvPr/>
+        </p:nvSpPr>
+        <p:spPr>
+          <a:xfrm>
+            <a:off x="1874520" y="3273552"/>
+            <a:ext cx="6903720" cy="658368"/>
+          </a:xfrm>
+          <a:prstGeom prst="rect">
+            <a:avLst>
+              <a:gd name="adj" fmla="val 8333"/>
+            </a:avLst>
+          </a:prstGeom>
+          <a:solidFill>
+            <a:srgbClr val="F8FAFC"/>
+          </a:solidFill>
+          <a:ln w="12700">
+            <a:solidFill>
+              <a:srgbClr val="E2E8F0"/>
+            </a:solidFill>
+            <a:prstDash val="dash"/>
+          </a:ln>
+        </p:spPr>
+      </p:sp>
+      <p:sp>
+        <p:nvSpPr>
+          <p:cNvPr id="25" name="Text 23"/>
+          <p:cNvSpPr/>
+          <p:nvPr/>
+        </p:nvSpPr>
+        <p:spPr>
+          <a:xfrm>
+            <a:off x="1874520" y="3273552"/>
+            <a:ext cx="6903720" cy="658368"/>
+          </a:xfrm>
+          <a:prstGeom prst="rect">
+            <a:avLst/>
+          </a:prstGeom>
+          <a:noFill/>
+          <a:ln/>
+        </p:spPr>
+        <p:txBody>
+          <a:bodyPr wrap="square" rtlCol="0" anchor="ctr"/>
+          <a:lstStyle/>
+          <a:p>
+            <a:pPr algn="ctr" indent="0" marL="0">
+              <a:buNone/>
+            </a:pPr>
+            <a:r>
+              <a:rPr lang="en-US" sz="1100" i="1" dirty="0">
+                <a:solidFill>
+                  <a:srgbClr val="CBD5E1"/>
                 </a:solidFill>
                 <a:latin typeface="Calibri" pitchFamily="34" charset="0"/>
                 <a:ea typeface="Calibri" pitchFamily="34" charset="-122"/>
                 <a:cs typeface="Calibri" pitchFamily="34" charset="-120"/>
               </a:rPr>
-              <a:t>person who does something</a:t>
-            </a:r>
-            <a:endParaRPr lang="en-US" sz="850" dirty="0"/>
-          </a:p>
-        </p:txBody>
-      </p:sp>
-      <p:sp>
-        <p:nvSpPr>
-          <p:cNvPr id="25" name="Shape 23"/>
-          <p:cNvSpPr/>
-          <p:nvPr/>
-        </p:nvSpPr>
-        <p:spPr>
-          <a:xfrm>
-            <a:off x="365760" y="3273552"/>
-            <a:ext cx="1371600" cy="658368"/>
+              <a:t>Write here...</a:t>
+            </a:r>
+            <a:endParaRPr lang="en-US" sz="1100" dirty="0"/>
+          </a:p>
+        </p:txBody>
+      </p:sp>
+      <p:sp>
+        <p:nvSpPr>
+          <p:cNvPr id="26" name="Shape 24"/>
+          <p:cNvSpPr/>
+          <p:nvPr/>
+        </p:nvSpPr>
+        <p:spPr>
+          <a:xfrm>
+            <a:off x="365760" y="4096512"/>
+            <a:ext cx="1371600" cy="804672"/>
           </a:xfrm>
           <a:prstGeom prst="rect">
             <a:avLst>
-              <a:gd name="adj" fmla="val 8333"/>
+              <a:gd name="adj" fmla="val 6818"/>
             </a:avLst>
           </a:prstGeom>
           <a:solidFill>
@@ -19203,14 +19835,14 @@
       </p:sp>
       <p:sp>
         <p:nvSpPr>
-          <p:cNvPr id="26" name="Text 24"/>
-          <p:cNvSpPr/>
-          <p:nvPr/>
-        </p:nvSpPr>
-        <p:spPr>
-          <a:xfrm>
-            <a:off x="365760" y="3273552"/>
-            <a:ext cx="1371600" cy="658368"/>
+          <p:cNvPr id="27" name="Text 25"/>
+          <p:cNvSpPr/>
+          <p:nvPr/>
+        </p:nvSpPr>
+        <p:spPr>
+          <a:xfrm>
+            <a:off x="365760" y="4096512"/>
+            <a:ext cx="1371600" cy="804672"/>
           </a:xfrm>
           <a:prstGeom prst="rect">
             <a:avLst/>
@@ -19234,7 +19866,7 @@
                 <a:ea typeface="Trebuchet MS" pitchFamily="34" charset="-122"/>
                 <a:cs typeface="Trebuchet MS" pitchFamily="34" charset="-120"/>
               </a:rPr>
-              <a:t>Syllables</a:t>
+              <a:t>Phonemes</a:t>
             </a:r>
             <a:endParaRPr lang="en-US" sz="1100" dirty="0"/>
           </a:p>
@@ -19242,80 +19874,14 @@
       </p:sp>
       <p:sp>
         <p:nvSpPr>
-          <p:cNvPr id="27" name="Shape 25"/>
-          <p:cNvSpPr/>
-          <p:nvPr/>
-        </p:nvSpPr>
-        <p:spPr>
-          <a:xfrm>
-            <a:off x="1874520" y="3273552"/>
-            <a:ext cx="6903720" cy="658368"/>
-          </a:xfrm>
-          <a:prstGeom prst="rect">
-            <a:avLst>
-              <a:gd name="adj" fmla="val 8333"/>
-            </a:avLst>
-          </a:prstGeom>
-          <a:solidFill>
-            <a:srgbClr val="F8FAFC"/>
-          </a:solidFill>
-          <a:ln w="12700">
-            <a:solidFill>
-              <a:srgbClr val="E2E8F0"/>
-            </a:solidFill>
-            <a:prstDash val="dash"/>
-          </a:ln>
-        </p:spPr>
-      </p:sp>
-      <p:sp>
-        <p:nvSpPr>
-          <p:cNvPr id="28" name="Text 26"/>
-          <p:cNvSpPr/>
-          <p:nvPr/>
-        </p:nvSpPr>
-        <p:spPr>
-          <a:xfrm>
-            <a:off x="1874520" y="3273552"/>
-            <a:ext cx="6903720" cy="658368"/>
-          </a:xfrm>
-          <a:prstGeom prst="rect">
-            <a:avLst/>
-          </a:prstGeom>
-          <a:noFill/>
-          <a:ln/>
-        </p:spPr>
-        <p:txBody>
-          <a:bodyPr wrap="square" rtlCol="0" anchor="ctr"/>
-          <a:lstStyle/>
-          <a:p>
-            <a:pPr algn="ctr" indent="0" marL="0">
-              <a:buNone/>
-            </a:pPr>
-            <a:r>
-              <a:rPr lang="en-US" sz="1100" i="1" dirty="0">
-                <a:solidFill>
-                  <a:srgbClr val="CBD5E1"/>
-                </a:solidFill>
-                <a:latin typeface="Calibri" pitchFamily="34" charset="0"/>
-                <a:ea typeface="Calibri" pitchFamily="34" charset="-122"/>
-                <a:cs typeface="Calibri" pitchFamily="34" charset="-120"/>
-              </a:rPr>
-              <a:t>Write here...</a:t>
-            </a:r>
-            <a:endParaRPr lang="en-US" sz="1100" dirty="0"/>
-          </a:p>
-        </p:txBody>
-      </p:sp>
-      <p:sp>
-        <p:nvSpPr>
-          <p:cNvPr id="29" name="Shape 27"/>
-          <p:cNvSpPr/>
-          <p:nvPr/>
-        </p:nvSpPr>
-        <p:spPr>
-          <a:xfrm>
-            <a:off x="365760" y="4096512"/>
-            <a:ext cx="1371600" cy="804672"/>
+          <p:cNvPr id="28" name="Shape 26"/>
+          <p:cNvSpPr/>
+          <p:nvPr/>
+        </p:nvSpPr>
+        <p:spPr>
+          <a:xfrm>
+            <a:off x="1874520" y="4096512"/>
+            <a:ext cx="6903720" cy="804672"/>
           </a:xfrm>
           <a:prstGeom prst="rect">
             <a:avLst>
@@ -19323,85 +19889,19 @@
             </a:avLst>
           </a:prstGeom>
           <a:solidFill>
-            <a:srgbClr val="E2E8F0"/>
+            <a:srgbClr val="F8FAFC"/>
           </a:solidFill>
           <a:ln w="12700">
             <a:solidFill>
               <a:srgbClr val="E2E8F0"/>
             </a:solidFill>
-            <a:prstDash val="solid"/>
-          </a:ln>
-        </p:spPr>
-      </p:sp>
-      <p:sp>
-        <p:nvSpPr>
-          <p:cNvPr id="30" name="Text 28"/>
-          <p:cNvSpPr/>
-          <p:nvPr/>
-        </p:nvSpPr>
-        <p:spPr>
-          <a:xfrm>
-            <a:off x="365760" y="4096512"/>
-            <a:ext cx="1371600" cy="804672"/>
-          </a:xfrm>
-          <a:prstGeom prst="rect">
-            <a:avLst/>
-          </a:prstGeom>
-          <a:noFill/>
-          <a:ln/>
-        </p:spPr>
-        <p:txBody>
-          <a:bodyPr wrap="square" lIns="0" tIns="0" rIns="0" bIns="0" rtlCol="0" anchor="ctr"/>
-          <a:lstStyle/>
-          <a:p>
-            <a:pPr algn="ctr" indent="0" marL="0">
-              <a:buNone/>
-            </a:pPr>
-            <a:r>
-              <a:rPr lang="en-US" sz="1100" b="1" dirty="0">
-                <a:solidFill>
-                  <a:srgbClr val="475569"/>
-                </a:solidFill>
-                <a:latin typeface="Trebuchet MS" pitchFamily="34" charset="0"/>
-                <a:ea typeface="Trebuchet MS" pitchFamily="34" charset="-122"/>
-                <a:cs typeface="Trebuchet MS" pitchFamily="34" charset="-120"/>
-              </a:rPr>
-              <a:t>Phonemes</a:t>
-            </a:r>
-            <a:endParaRPr lang="en-US" sz="1100" dirty="0"/>
-          </a:p>
-        </p:txBody>
-      </p:sp>
-      <p:sp>
-        <p:nvSpPr>
-          <p:cNvPr id="31" name="Shape 29"/>
-          <p:cNvSpPr/>
-          <p:nvPr/>
-        </p:nvSpPr>
-        <p:spPr>
-          <a:xfrm>
-            <a:off x="1874520" y="4096512"/>
-            <a:ext cx="6903720" cy="804672"/>
-          </a:xfrm>
-          <a:prstGeom prst="rect">
-            <a:avLst>
-              <a:gd name="adj" fmla="val 6818"/>
-            </a:avLst>
-          </a:prstGeom>
-          <a:solidFill>
-            <a:srgbClr val="F8FAFC"/>
-          </a:solidFill>
-          <a:ln w="12700">
-            <a:solidFill>
-              <a:srgbClr val="E2E8F0"/>
-            </a:solidFill>
             <a:prstDash val="dash"/>
           </a:ln>
         </p:spPr>
       </p:sp>
       <p:sp>
         <p:nvSpPr>
-          <p:cNvPr id="32" name="Text 30"/>
+          <p:cNvPr id="29" name="Text 27"/>
           <p:cNvSpPr/>
           <p:nvPr/>
         </p:nvSpPr>
@@ -19863,7 +20363,7 @@
                 <a:ea typeface="Trebuchet MS" pitchFamily="34" charset="-122"/>
                 <a:cs typeface="Trebuchet MS" pitchFamily="34" charset="-120"/>
               </a:rPr>
-              <a:t>dictator</a:t>
+              <a:t>verdict</a:t>
             </a:r>
             <a:endParaRPr lang="en-US" sz="2800" dirty="0"/>
           </a:p>
@@ -19943,7 +20443,7 @@
         </p:nvSpPr>
         <p:spPr>
           <a:xfrm>
-            <a:off x="2221992" y="2258568"/>
+            <a:off x="2938272" y="2258568"/>
             <a:ext cx="1828800" cy="292608"/>
           </a:xfrm>
           <a:prstGeom prst="rect">
@@ -19952,11 +20452,11 @@
             </a:avLst>
           </a:prstGeom>
           <a:solidFill>
-            <a:srgbClr val="CCFBF1"/>
+            <a:srgbClr val="DDD6FE"/>
           </a:solidFill>
           <a:ln w="19050">
             <a:solidFill>
-              <a:srgbClr val="0D9488"/>
+              <a:srgbClr val="7C3AED"/>
             </a:solidFill>
             <a:prstDash val="solid"/>
           </a:ln>
@@ -19977,7 +20477,7 @@
         </p:nvSpPr>
         <p:spPr>
           <a:xfrm>
-            <a:off x="2221992" y="2258568"/>
+            <a:off x="2938272" y="2258568"/>
             <a:ext cx="1828800" cy="292608"/>
           </a:xfrm>
           <a:prstGeom prst="rect">
@@ -19996,13 +20496,13 @@
             <a:r>
               <a:rPr lang="en-US" sz="1300" b="1" dirty="0">
                 <a:solidFill>
-                  <a:srgbClr val="0F766E"/>
+                  <a:srgbClr val="4C1D95"/>
                 </a:solidFill>
                 <a:latin typeface="Trebuchet MS" pitchFamily="34" charset="0"/>
                 <a:ea typeface="Trebuchet MS" pitchFamily="34" charset="-122"/>
                 <a:cs typeface="Trebuchet MS" pitchFamily="34" charset="-120"/>
               </a:rPr>
-              <a:t>dict</a:t>
+              <a:t>ver</a:t>
             </a:r>
             <a:endParaRPr lang="en-US" sz="1300" dirty="0"/>
           </a:p>
@@ -20016,7 +20516,7 @@
         </p:nvSpPr>
         <p:spPr>
           <a:xfrm>
-            <a:off x="2221992" y="2569464"/>
+            <a:off x="2938272" y="2569464"/>
             <a:ext cx="1828800" cy="201168"/>
           </a:xfrm>
           <a:prstGeom prst="rect">
@@ -20041,7 +20541,7 @@
                 <a:ea typeface="Calibri" pitchFamily="34" charset="-122"/>
                 <a:cs typeface="Calibri" pitchFamily="34" charset="-120"/>
               </a:rPr>
-              <a:t>say, speak</a:t>
+              <a:t>truly, word</a:t>
             </a:r>
             <a:endParaRPr lang="en-US" sz="850" dirty="0"/>
           </a:p>
@@ -20055,7 +20555,7 @@
         </p:nvSpPr>
         <p:spPr>
           <a:xfrm>
-            <a:off x="4370832" y="2258568"/>
+            <a:off x="5803392" y="2258568"/>
             <a:ext cx="1828800" cy="292608"/>
           </a:xfrm>
           <a:prstGeom prst="rect">
@@ -20064,11 +20564,11 @@
             </a:avLst>
           </a:prstGeom>
           <a:solidFill>
-            <a:srgbClr val="FCE7F3"/>
+            <a:srgbClr val="CCFBF1"/>
           </a:solidFill>
           <a:ln w="19050">
             <a:solidFill>
-              <a:srgbClr val="DB2777"/>
+              <a:srgbClr val="0D9488"/>
             </a:solidFill>
             <a:prstDash val="solid"/>
           </a:ln>
@@ -20089,7 +20589,7 @@
         </p:nvSpPr>
         <p:spPr>
           <a:xfrm>
-            <a:off x="4370832" y="2258568"/>
+            <a:off x="5803392" y="2258568"/>
             <a:ext cx="1828800" cy="292608"/>
           </a:xfrm>
           <a:prstGeom prst="rect">
@@ -20108,13 +20608,13 @@
             <a:r>
               <a:rPr lang="en-US" sz="1300" b="1" dirty="0">
                 <a:solidFill>
-                  <a:srgbClr val="9D174D"/>
+                  <a:srgbClr val="0F766E"/>
                 </a:solidFill>
                 <a:latin typeface="Trebuchet MS" pitchFamily="34" charset="0"/>
                 <a:ea typeface="Trebuchet MS" pitchFamily="34" charset="-122"/>
                 <a:cs typeface="Trebuchet MS" pitchFamily="34" charset="-120"/>
               </a:rPr>
-              <a:t>ate</a:t>
+              <a:t>dict</a:t>
             </a:r>
             <a:endParaRPr lang="en-US" sz="1300" dirty="0"/>
           </a:p>
@@ -20128,7 +20628,7 @@
         </p:nvSpPr>
         <p:spPr>
           <a:xfrm>
-            <a:off x="4370832" y="2569464"/>
+            <a:off x="5803392" y="2569464"/>
             <a:ext cx="1828800" cy="201168"/>
           </a:xfrm>
           <a:prstGeom prst="rect">
@@ -20153,7 +20653,7 @@
                 <a:ea typeface="Calibri" pitchFamily="34" charset="-122"/>
                 <a:cs typeface="Calibri" pitchFamily="34" charset="-120"/>
               </a:rPr>
-              <a:t>to do or act</a:t>
+              <a:t>say, speak</a:t>
             </a:r>
             <a:endParaRPr lang="en-US" sz="850" dirty="0"/>
           </a:p>
@@ -20167,30 +20667,23 @@
         </p:nvSpPr>
         <p:spPr>
           <a:xfrm>
-            <a:off x="6519672" y="2258568"/>
-            <a:ext cx="1828800" cy="292608"/>
+            <a:off x="365760" y="3273552"/>
+            <a:ext cx="1371600" cy="658368"/>
           </a:xfrm>
           <a:prstGeom prst="rect">
             <a:avLst>
-              <a:gd name="adj" fmla="val 25000"/>
+              <a:gd name="adj" fmla="val 8333"/>
             </a:avLst>
           </a:prstGeom>
           <a:solidFill>
-            <a:srgbClr val="FCE7F3"/>
-          </a:solidFill>
-          <a:ln w="19050">
-            <a:solidFill>
-              <a:srgbClr val="DB2777"/>
-            </a:solidFill>
-            <a:prstDash val="solid"/>
-          </a:ln>
-          <a:effectLst>
-            <a:outerShdw sx="100000" sy="100000" kx="0" ky="0" algn="bl" rotWithShape="0" blurRad="101600" dist="38100" dir="8100000">
-              <a:srgbClr val="000000">
-                <a:alpha val="12000"/>
-              </a:srgbClr>
-            </a:outerShdw>
-          </a:effectLst>
+            <a:srgbClr val="E2E8F0"/>
+          </a:solidFill>
+          <a:ln w="12700">
+            <a:solidFill>
+              <a:srgbClr val="E2E8F0"/>
+            </a:solidFill>
+            <a:prstDash val="solid"/>
+          </a:ln>
         </p:spPr>
       </p:sp>
       <p:sp>
@@ -20201,86 +20694,47 @@
         </p:nvSpPr>
         <p:spPr>
           <a:xfrm>
-            <a:off x="6519672" y="2258568"/>
-            <a:ext cx="1828800" cy="292608"/>
-          </a:xfrm>
-          <a:prstGeom prst="rect">
-            <a:avLst/>
-          </a:prstGeom>
-          <a:noFill/>
-          <a:ln/>
-        </p:spPr>
-        <p:txBody>
-          <a:bodyPr wrap="square" lIns="0" tIns="0" rIns="0" bIns="0" rtlCol="0" anchor="ctr"/>
-          <a:lstStyle/>
-          <a:p>
-            <a:pPr algn="ctr" indent="0" marL="0">
-              <a:buNone/>
-            </a:pPr>
-            <a:r>
-              <a:rPr lang="en-US" sz="1300" b="1" dirty="0">
-                <a:solidFill>
-                  <a:srgbClr val="9D174D"/>
+            <a:off x="365760" y="3273552"/>
+            <a:ext cx="1371600" cy="658368"/>
+          </a:xfrm>
+          <a:prstGeom prst="rect">
+            <a:avLst/>
+          </a:prstGeom>
+          <a:noFill/>
+          <a:ln/>
+        </p:spPr>
+        <p:txBody>
+          <a:bodyPr wrap="square" lIns="0" tIns="0" rIns="0" bIns="0" rtlCol="0" anchor="ctr"/>
+          <a:lstStyle/>
+          <a:p>
+            <a:pPr algn="ctr" indent="0" marL="0">
+              <a:buNone/>
+            </a:pPr>
+            <a:r>
+              <a:rPr lang="en-US" sz="1100" b="1" dirty="0">
+                <a:solidFill>
+                  <a:srgbClr val="475569"/>
                 </a:solidFill>
                 <a:latin typeface="Trebuchet MS" pitchFamily="34" charset="0"/>
                 <a:ea typeface="Trebuchet MS" pitchFamily="34" charset="-122"/>
                 <a:cs typeface="Trebuchet MS" pitchFamily="34" charset="-120"/>
               </a:rPr>
-              <a:t>or</a:t>
-            </a:r>
-            <a:endParaRPr lang="en-US" sz="1300" dirty="0"/>
-          </a:p>
-        </p:txBody>
-      </p:sp>
-      <p:sp>
-        <p:nvSpPr>
-          <p:cNvPr id="24" name="Text 22"/>
-          <p:cNvSpPr/>
-          <p:nvPr/>
-        </p:nvSpPr>
-        <p:spPr>
-          <a:xfrm>
-            <a:off x="6519672" y="2569464"/>
-            <a:ext cx="1828800" cy="201168"/>
-          </a:xfrm>
-          <a:prstGeom prst="rect">
-            <a:avLst/>
-          </a:prstGeom>
-          <a:noFill/>
-          <a:ln/>
-        </p:spPr>
-        <p:txBody>
-          <a:bodyPr wrap="square" lIns="0" tIns="0" rIns="0" bIns="0" rtlCol="0" anchor="t"/>
-          <a:lstStyle/>
-          <a:p>
-            <a:pPr algn="ctr" indent="0" marL="0">
-              <a:buNone/>
-            </a:pPr>
-            <a:r>
-              <a:rPr lang="en-US" sz="850" dirty="0">
-                <a:solidFill>
-                  <a:srgbClr val="475569"/>
-                </a:solidFill>
-                <a:latin typeface="Calibri" pitchFamily="34" charset="0"/>
-                <a:ea typeface="Calibri" pitchFamily="34" charset="-122"/>
-                <a:cs typeface="Calibri" pitchFamily="34" charset="-120"/>
-              </a:rPr>
-              <a:t>person who does something</a:t>
-            </a:r>
-            <a:endParaRPr lang="en-US" sz="850" dirty="0"/>
-          </a:p>
-        </p:txBody>
-      </p:sp>
-      <p:sp>
-        <p:nvSpPr>
-          <p:cNvPr id="25" name="Shape 23"/>
-          <p:cNvSpPr/>
-          <p:nvPr/>
-        </p:nvSpPr>
-        <p:spPr>
-          <a:xfrm>
-            <a:off x="365760" y="3273552"/>
-            <a:ext cx="1371600" cy="658368"/>
+              <a:t>Syllables</a:t>
+            </a:r>
+            <a:endParaRPr lang="en-US" sz="1100" dirty="0"/>
+          </a:p>
+        </p:txBody>
+      </p:sp>
+      <p:sp>
+        <p:nvSpPr>
+          <p:cNvPr id="24" name="Shape 22"/>
+          <p:cNvSpPr/>
+          <p:nvPr/>
+        </p:nvSpPr>
+        <p:spPr>
+          <a:xfrm>
+            <a:off x="1874520" y="3273552"/>
+            <a:ext cx="6903720" cy="658368"/>
           </a:xfrm>
           <a:prstGeom prst="rect">
             <a:avLst>
@@ -20288,11 +20742,38 @@
             </a:avLst>
           </a:prstGeom>
           <a:solidFill>
-            <a:srgbClr val="E2E8F0"/>
-          </a:solidFill>
-          <a:ln w="12700">
-            <a:solidFill>
-              <a:srgbClr val="E2E8F0"/>
+            <a:srgbClr val="CCFBF1"/>
+          </a:solidFill>
+          <a:ln w="12700">
+            <a:solidFill>
+              <a:srgbClr val="0D9488"/>
+            </a:solidFill>
+            <a:prstDash val="solid"/>
+          </a:ln>
+        </p:spPr>
+      </p:sp>
+      <p:sp>
+        <p:nvSpPr>
+          <p:cNvPr id="25" name="Shape 23"/>
+          <p:cNvSpPr/>
+          <p:nvPr/>
+        </p:nvSpPr>
+        <p:spPr>
+          <a:xfrm>
+            <a:off x="2999232" y="3364992"/>
+            <a:ext cx="1645920" cy="475488"/>
+          </a:xfrm>
+          <a:prstGeom prst="rect">
+            <a:avLst>
+              <a:gd name="adj" fmla="val 9615"/>
+            </a:avLst>
+          </a:prstGeom>
+          <a:solidFill>
+            <a:srgbClr val="FFFFFF"/>
+          </a:solidFill>
+          <a:ln w="12700">
+            <a:solidFill>
+              <a:srgbClr val="0D9488"/>
             </a:solidFill>
             <a:prstDash val="solid"/>
           </a:ln>
@@ -20306,63 +20787,75 @@
         </p:nvSpPr>
         <p:spPr>
           <a:xfrm>
-            <a:off x="365760" y="3273552"/>
-            <a:ext cx="1371600" cy="658368"/>
-          </a:xfrm>
-          <a:prstGeom prst="rect">
-            <a:avLst/>
-          </a:prstGeom>
-          <a:noFill/>
-          <a:ln/>
-        </p:spPr>
-        <p:txBody>
-          <a:bodyPr wrap="square" lIns="0" tIns="0" rIns="0" bIns="0" rtlCol="0" anchor="ctr"/>
-          <a:lstStyle/>
-          <a:p>
-            <a:pPr algn="ctr" indent="0" marL="0">
-              <a:buNone/>
-            </a:pPr>
-            <a:r>
-              <a:rPr lang="en-US" sz="1100" b="1" dirty="0">
-                <a:solidFill>
-                  <a:srgbClr val="475569"/>
+            <a:off x="2999232" y="3364992"/>
+            <a:ext cx="1645920" cy="475488"/>
+          </a:xfrm>
+          <a:prstGeom prst="rect">
+            <a:avLst/>
+          </a:prstGeom>
+          <a:noFill/>
+          <a:ln/>
+        </p:spPr>
+        <p:txBody>
+          <a:bodyPr wrap="square" lIns="0" tIns="0" rIns="0" bIns="0" rtlCol="0" anchor="ctr"/>
+          <a:lstStyle/>
+          <a:p>
+            <a:pPr algn="ctr" indent="0" marL="0">
+              <a:buNone/>
+            </a:pPr>
+            <a:r>
+              <a:rPr lang="en-US" sz="1400" b="1" dirty="0">
+                <a:solidFill>
+                  <a:srgbClr val="0D9488"/>
                 </a:solidFill>
                 <a:latin typeface="Trebuchet MS" pitchFamily="34" charset="0"/>
                 <a:ea typeface="Trebuchet MS" pitchFamily="34" charset="-122"/>
                 <a:cs typeface="Trebuchet MS" pitchFamily="34" charset="-120"/>
               </a:rPr>
-              <a:t>Syllables</a:t>
-            </a:r>
-            <a:endParaRPr lang="en-US" sz="1100" dirty="0"/>
-          </a:p>
-        </p:txBody>
-      </p:sp>
-      <p:sp>
-        <p:nvSpPr>
-          <p:cNvPr id="27" name="Shape 25"/>
-          <p:cNvSpPr/>
-          <p:nvPr/>
-        </p:nvSpPr>
-        <p:spPr>
-          <a:xfrm>
-            <a:off x="1874520" y="3273552"/>
-            <a:ext cx="6903720" cy="658368"/>
-          </a:xfrm>
-          <a:prstGeom prst="rect">
-            <a:avLst>
-              <a:gd name="adj" fmla="val 8333"/>
-            </a:avLst>
-          </a:prstGeom>
-          <a:solidFill>
-            <a:srgbClr val="CCFBF1"/>
-          </a:solidFill>
-          <a:ln w="12700">
-            <a:solidFill>
-              <a:srgbClr val="0D9488"/>
-            </a:solidFill>
-            <a:prstDash val="solid"/>
-          </a:ln>
-        </p:spPr>
+              <a:t>ver</a:t>
+            </a:r>
+            <a:endParaRPr lang="en-US" sz="1400" dirty="0"/>
+          </a:p>
+        </p:txBody>
+      </p:sp>
+      <p:sp>
+        <p:nvSpPr>
+          <p:cNvPr id="27" name="Text 25"/>
+          <p:cNvSpPr/>
+          <p:nvPr/>
+        </p:nvSpPr>
+        <p:spPr>
+          <a:xfrm>
+            <a:off x="4645152" y="3364992"/>
+            <a:ext cx="1097280" cy="475488"/>
+          </a:xfrm>
+          <a:prstGeom prst="rect">
+            <a:avLst/>
+          </a:prstGeom>
+          <a:noFill/>
+          <a:ln/>
+        </p:spPr>
+        <p:txBody>
+          <a:bodyPr wrap="square" lIns="0" tIns="0" rIns="0" bIns="0" rtlCol="0" anchor="ctr"/>
+          <a:lstStyle/>
+          <a:p>
+            <a:pPr algn="ctr" indent="0" marL="0">
+              <a:buNone/>
+            </a:pPr>
+            <a:r>
+              <a:rPr lang="en-US" sz="1600" b="1" dirty="0">
+                <a:solidFill>
+                  <a:srgbClr val="0D9488"/>
+                </a:solidFill>
+                <a:latin typeface="Trebuchet MS" pitchFamily="34" charset="0"/>
+                <a:ea typeface="Trebuchet MS" pitchFamily="34" charset="-122"/>
+                <a:cs typeface="Trebuchet MS" pitchFamily="34" charset="-120"/>
+              </a:rPr>
+              <a:t>·</a:t>
+            </a:r>
+            <a:endParaRPr lang="en-US" sz="1600" dirty="0"/>
+          </a:p>
+        </p:txBody>
       </p:sp>
       <p:sp>
         <p:nvSpPr>
@@ -20372,7 +20865,7 @@
         </p:nvSpPr>
         <p:spPr>
           <a:xfrm>
-            <a:off x="2313432" y="3364992"/>
+            <a:off x="5742432" y="3364992"/>
             <a:ext cx="1645920" cy="475488"/>
           </a:xfrm>
           <a:prstGeom prst="rect">
@@ -20399,7 +20892,7 @@
         </p:nvSpPr>
         <p:spPr>
           <a:xfrm>
-            <a:off x="2313432" y="3364992"/>
+            <a:off x="5742432" y="3364992"/>
             <a:ext cx="1645920" cy="475488"/>
           </a:xfrm>
           <a:prstGeom prst="rect">
@@ -20424,7 +20917,7 @@
                 <a:ea typeface="Trebuchet MS" pitchFamily="34" charset="-122"/>
                 <a:cs typeface="Trebuchet MS" pitchFamily="34" charset="-120"/>
               </a:rPr>
-              <a:t>dic</a:t>
+              <a:t>dict</a:t>
             </a:r>
             <a:endParaRPr lang="en-US" sz="1400" dirty="0"/>
           </a:p>
@@ -20432,224 +20925,80 @@
       </p:sp>
       <p:sp>
         <p:nvSpPr>
-          <p:cNvPr id="30" name="Text 28"/>
-          <p:cNvSpPr/>
-          <p:nvPr/>
-        </p:nvSpPr>
-        <p:spPr>
-          <a:xfrm>
-            <a:off x="3959352" y="3364992"/>
-            <a:ext cx="411480" cy="475488"/>
-          </a:xfrm>
-          <a:prstGeom prst="rect">
-            <a:avLst/>
-          </a:prstGeom>
-          <a:noFill/>
-          <a:ln/>
-        </p:spPr>
-        <p:txBody>
-          <a:bodyPr wrap="square" lIns="0" tIns="0" rIns="0" bIns="0" rtlCol="0" anchor="ctr"/>
-          <a:lstStyle/>
-          <a:p>
-            <a:pPr algn="ctr" indent="0" marL="0">
-              <a:buNone/>
-            </a:pPr>
-            <a:r>
-              <a:rPr lang="en-US" sz="1600" b="1" dirty="0">
-                <a:solidFill>
-                  <a:srgbClr val="0D9488"/>
+          <p:cNvPr id="30" name="Shape 28"/>
+          <p:cNvSpPr/>
+          <p:nvPr/>
+        </p:nvSpPr>
+        <p:spPr>
+          <a:xfrm>
+            <a:off x="365760" y="4096512"/>
+            <a:ext cx="1371600" cy="804672"/>
+          </a:xfrm>
+          <a:prstGeom prst="rect">
+            <a:avLst>
+              <a:gd name="adj" fmla="val 6818"/>
+            </a:avLst>
+          </a:prstGeom>
+          <a:solidFill>
+            <a:srgbClr val="E2E8F0"/>
+          </a:solidFill>
+          <a:ln w="12700">
+            <a:solidFill>
+              <a:srgbClr val="E2E8F0"/>
+            </a:solidFill>
+            <a:prstDash val="solid"/>
+          </a:ln>
+        </p:spPr>
+      </p:sp>
+      <p:sp>
+        <p:nvSpPr>
+          <p:cNvPr id="31" name="Text 29"/>
+          <p:cNvSpPr/>
+          <p:nvPr/>
+        </p:nvSpPr>
+        <p:spPr>
+          <a:xfrm>
+            <a:off x="365760" y="4096512"/>
+            <a:ext cx="1371600" cy="804672"/>
+          </a:xfrm>
+          <a:prstGeom prst="rect">
+            <a:avLst/>
+          </a:prstGeom>
+          <a:noFill/>
+          <a:ln/>
+        </p:spPr>
+        <p:txBody>
+          <a:bodyPr wrap="square" lIns="0" tIns="0" rIns="0" bIns="0" rtlCol="0" anchor="ctr"/>
+          <a:lstStyle/>
+          <a:p>
+            <a:pPr algn="ctr" indent="0" marL="0">
+              <a:buNone/>
+            </a:pPr>
+            <a:r>
+              <a:rPr lang="en-US" sz="1100" b="1" dirty="0">
+                <a:solidFill>
+                  <a:srgbClr val="475569"/>
                 </a:solidFill>
                 <a:latin typeface="Trebuchet MS" pitchFamily="34" charset="0"/>
                 <a:ea typeface="Trebuchet MS" pitchFamily="34" charset="-122"/>
                 <a:cs typeface="Trebuchet MS" pitchFamily="34" charset="-120"/>
               </a:rPr>
-              <a:t>·</a:t>
-            </a:r>
-            <a:endParaRPr lang="en-US" sz="1600" dirty="0"/>
-          </a:p>
-        </p:txBody>
-      </p:sp>
-      <p:sp>
-        <p:nvSpPr>
-          <p:cNvPr id="31" name="Shape 29"/>
-          <p:cNvSpPr/>
-          <p:nvPr/>
-        </p:nvSpPr>
-        <p:spPr>
-          <a:xfrm>
-            <a:off x="4370832" y="3364992"/>
-            <a:ext cx="1645920" cy="475488"/>
-          </a:xfrm>
-          <a:prstGeom prst="rect">
-            <a:avLst>
-              <a:gd name="adj" fmla="val 9615"/>
-            </a:avLst>
-          </a:prstGeom>
-          <a:solidFill>
-            <a:srgbClr val="FFFFFF"/>
-          </a:solidFill>
-          <a:ln w="12700">
-            <a:solidFill>
-              <a:srgbClr val="0D9488"/>
-            </a:solidFill>
-            <a:prstDash val="solid"/>
-          </a:ln>
-        </p:spPr>
-      </p:sp>
-      <p:sp>
-        <p:nvSpPr>
-          <p:cNvPr id="32" name="Text 30"/>
-          <p:cNvSpPr/>
-          <p:nvPr/>
-        </p:nvSpPr>
-        <p:spPr>
-          <a:xfrm>
-            <a:off x="4370832" y="3364992"/>
-            <a:ext cx="1645920" cy="475488"/>
-          </a:xfrm>
-          <a:prstGeom prst="rect">
-            <a:avLst/>
-          </a:prstGeom>
-          <a:noFill/>
-          <a:ln/>
-        </p:spPr>
-        <p:txBody>
-          <a:bodyPr wrap="square" lIns="0" tIns="0" rIns="0" bIns="0" rtlCol="0" anchor="ctr"/>
-          <a:lstStyle/>
-          <a:p>
-            <a:pPr algn="ctr" indent="0" marL="0">
-              <a:buNone/>
-            </a:pPr>
-            <a:r>
-              <a:rPr lang="en-US" sz="1400" b="1" dirty="0">
-                <a:solidFill>
-                  <a:srgbClr val="0D9488"/>
-                </a:solidFill>
-                <a:latin typeface="Trebuchet MS" pitchFamily="34" charset="0"/>
-                <a:ea typeface="Trebuchet MS" pitchFamily="34" charset="-122"/>
-                <a:cs typeface="Trebuchet MS" pitchFamily="34" charset="-120"/>
-              </a:rPr>
-              <a:t>ta</a:t>
-            </a:r>
-            <a:endParaRPr lang="en-US" sz="1400" dirty="0"/>
-          </a:p>
-        </p:txBody>
-      </p:sp>
-      <p:sp>
-        <p:nvSpPr>
-          <p:cNvPr id="33" name="Text 31"/>
-          <p:cNvSpPr/>
-          <p:nvPr/>
-        </p:nvSpPr>
-        <p:spPr>
-          <a:xfrm>
-            <a:off x="6016752" y="3364992"/>
-            <a:ext cx="411480" cy="475488"/>
-          </a:xfrm>
-          <a:prstGeom prst="rect">
-            <a:avLst/>
-          </a:prstGeom>
-          <a:noFill/>
-          <a:ln/>
-        </p:spPr>
-        <p:txBody>
-          <a:bodyPr wrap="square" lIns="0" tIns="0" rIns="0" bIns="0" rtlCol="0" anchor="ctr"/>
-          <a:lstStyle/>
-          <a:p>
-            <a:pPr algn="ctr" indent="0" marL="0">
-              <a:buNone/>
-            </a:pPr>
-            <a:r>
-              <a:rPr lang="en-US" sz="1600" b="1" dirty="0">
-                <a:solidFill>
-                  <a:srgbClr val="0D9488"/>
-                </a:solidFill>
-                <a:latin typeface="Trebuchet MS" pitchFamily="34" charset="0"/>
-                <a:ea typeface="Trebuchet MS" pitchFamily="34" charset="-122"/>
-                <a:cs typeface="Trebuchet MS" pitchFamily="34" charset="-120"/>
-              </a:rPr>
-              <a:t>·</a:t>
-            </a:r>
-            <a:endParaRPr lang="en-US" sz="1600" dirty="0"/>
-          </a:p>
-        </p:txBody>
-      </p:sp>
-      <p:sp>
-        <p:nvSpPr>
-          <p:cNvPr id="34" name="Shape 32"/>
-          <p:cNvSpPr/>
-          <p:nvPr/>
-        </p:nvSpPr>
-        <p:spPr>
-          <a:xfrm>
-            <a:off x="6428232" y="3364992"/>
-            <a:ext cx="1645920" cy="475488"/>
-          </a:xfrm>
-          <a:prstGeom prst="rect">
-            <a:avLst>
-              <a:gd name="adj" fmla="val 9615"/>
-            </a:avLst>
-          </a:prstGeom>
-          <a:solidFill>
-            <a:srgbClr val="FFFFFF"/>
-          </a:solidFill>
-          <a:ln w="12700">
-            <a:solidFill>
-              <a:srgbClr val="0D9488"/>
-            </a:solidFill>
-            <a:prstDash val="solid"/>
-          </a:ln>
-        </p:spPr>
-      </p:sp>
-      <p:sp>
-        <p:nvSpPr>
-          <p:cNvPr id="35" name="Text 33"/>
-          <p:cNvSpPr/>
-          <p:nvPr/>
-        </p:nvSpPr>
-        <p:spPr>
-          <a:xfrm>
-            <a:off x="6428232" y="3364992"/>
-            <a:ext cx="1645920" cy="475488"/>
-          </a:xfrm>
-          <a:prstGeom prst="rect">
-            <a:avLst/>
-          </a:prstGeom>
-          <a:noFill/>
-          <a:ln/>
-        </p:spPr>
-        <p:txBody>
-          <a:bodyPr wrap="square" lIns="0" tIns="0" rIns="0" bIns="0" rtlCol="0" anchor="ctr"/>
-          <a:lstStyle/>
-          <a:p>
-            <a:pPr algn="ctr" indent="0" marL="0">
-              <a:buNone/>
-            </a:pPr>
-            <a:r>
-              <a:rPr lang="en-US" sz="1400" b="1" dirty="0">
-                <a:solidFill>
-                  <a:srgbClr val="0D9488"/>
-                </a:solidFill>
-                <a:latin typeface="Trebuchet MS" pitchFamily="34" charset="0"/>
-                <a:ea typeface="Trebuchet MS" pitchFamily="34" charset="-122"/>
-                <a:cs typeface="Trebuchet MS" pitchFamily="34" charset="-120"/>
-              </a:rPr>
-              <a:t>tor</a:t>
-            </a:r>
-            <a:endParaRPr lang="en-US" sz="1400" dirty="0"/>
-          </a:p>
-        </p:txBody>
-      </p:sp>
-      <p:sp>
-        <p:nvSpPr>
-          <p:cNvPr id="36" name="Shape 34"/>
-          <p:cNvSpPr/>
-          <p:nvPr/>
-        </p:nvSpPr>
-        <p:spPr>
-          <a:xfrm>
-            <a:off x="365760" y="4096512"/>
-            <a:ext cx="1371600" cy="804672"/>
+              <a:t>Phonemes</a:t>
+            </a:r>
+            <a:endParaRPr lang="en-US" sz="1100" dirty="0"/>
+          </a:p>
+        </p:txBody>
+      </p:sp>
+      <p:sp>
+        <p:nvSpPr>
+          <p:cNvPr id="32" name="Shape 30"/>
+          <p:cNvSpPr/>
+          <p:nvPr/>
+        </p:nvSpPr>
+        <p:spPr>
+          <a:xfrm>
+            <a:off x="1874520" y="4096512"/>
+            <a:ext cx="6903720" cy="804672"/>
           </a:xfrm>
           <a:prstGeom prst="rect">
             <a:avLst>
@@ -20657,85 +21006,19 @@
             </a:avLst>
           </a:prstGeom>
           <a:solidFill>
-            <a:srgbClr val="E2E8F0"/>
+            <a:srgbClr val="F8FAFC"/>
           </a:solidFill>
           <a:ln w="12700">
             <a:solidFill>
               <a:srgbClr val="E2E8F0"/>
             </a:solidFill>
-            <a:prstDash val="solid"/>
-          </a:ln>
-        </p:spPr>
-      </p:sp>
-      <p:sp>
-        <p:nvSpPr>
-          <p:cNvPr id="37" name="Text 35"/>
-          <p:cNvSpPr/>
-          <p:nvPr/>
-        </p:nvSpPr>
-        <p:spPr>
-          <a:xfrm>
-            <a:off x="365760" y="4096512"/>
-            <a:ext cx="1371600" cy="804672"/>
-          </a:xfrm>
-          <a:prstGeom prst="rect">
-            <a:avLst/>
-          </a:prstGeom>
-          <a:noFill/>
-          <a:ln/>
-        </p:spPr>
-        <p:txBody>
-          <a:bodyPr wrap="square" lIns="0" tIns="0" rIns="0" bIns="0" rtlCol="0" anchor="ctr"/>
-          <a:lstStyle/>
-          <a:p>
-            <a:pPr algn="ctr" indent="0" marL="0">
-              <a:buNone/>
-            </a:pPr>
-            <a:r>
-              <a:rPr lang="en-US" sz="1100" b="1" dirty="0">
-                <a:solidFill>
-                  <a:srgbClr val="475569"/>
-                </a:solidFill>
-                <a:latin typeface="Trebuchet MS" pitchFamily="34" charset="0"/>
-                <a:ea typeface="Trebuchet MS" pitchFamily="34" charset="-122"/>
-                <a:cs typeface="Trebuchet MS" pitchFamily="34" charset="-120"/>
-              </a:rPr>
-              <a:t>Phonemes</a:t>
-            </a:r>
-            <a:endParaRPr lang="en-US" sz="1100" dirty="0"/>
-          </a:p>
-        </p:txBody>
-      </p:sp>
-      <p:sp>
-        <p:nvSpPr>
-          <p:cNvPr id="38" name="Shape 36"/>
-          <p:cNvSpPr/>
-          <p:nvPr/>
-        </p:nvSpPr>
-        <p:spPr>
-          <a:xfrm>
-            <a:off x="1874520" y="4096512"/>
-            <a:ext cx="6903720" cy="804672"/>
-          </a:xfrm>
-          <a:prstGeom prst="rect">
-            <a:avLst>
-              <a:gd name="adj" fmla="val 6818"/>
-            </a:avLst>
-          </a:prstGeom>
-          <a:solidFill>
-            <a:srgbClr val="F8FAFC"/>
-          </a:solidFill>
-          <a:ln w="12700">
-            <a:solidFill>
-              <a:srgbClr val="E2E8F0"/>
-            </a:solidFill>
             <a:prstDash val="dash"/>
           </a:ln>
         </p:spPr>
       </p:sp>
       <p:sp>
         <p:nvSpPr>
-          <p:cNvPr id="39" name="Text 37"/>
+          <p:cNvPr id="33" name="Text 31"/>
           <p:cNvSpPr/>
           <p:nvPr/>
         </p:nvSpPr>
@@ -21197,7 +21480,7 @@
                 <a:ea typeface="Trebuchet MS" pitchFamily="34" charset="-122"/>
                 <a:cs typeface="Trebuchet MS" pitchFamily="34" charset="-120"/>
               </a:rPr>
-              <a:t>dictator</a:t>
+              <a:t>verdict</a:t>
             </a:r>
             <a:endParaRPr lang="en-US" sz="2800" dirty="0"/>
           </a:p>
@@ -21277,7 +21560,7 @@
         </p:nvSpPr>
         <p:spPr>
           <a:xfrm>
-            <a:off x="2221992" y="2258568"/>
+            <a:off x="2938272" y="2258568"/>
             <a:ext cx="1828800" cy="292608"/>
           </a:xfrm>
           <a:prstGeom prst="rect">
@@ -21286,11 +21569,11 @@
             </a:avLst>
           </a:prstGeom>
           <a:solidFill>
-            <a:srgbClr val="CCFBF1"/>
+            <a:srgbClr val="DDD6FE"/>
           </a:solidFill>
           <a:ln w="19050">
             <a:solidFill>
-              <a:srgbClr val="0D9488"/>
+              <a:srgbClr val="7C3AED"/>
             </a:solidFill>
             <a:prstDash val="solid"/>
           </a:ln>
@@ -21311,7 +21594,7 @@
         </p:nvSpPr>
         <p:spPr>
           <a:xfrm>
-            <a:off x="2221992" y="2258568"/>
+            <a:off x="2938272" y="2258568"/>
             <a:ext cx="1828800" cy="292608"/>
           </a:xfrm>
           <a:prstGeom prst="rect">
@@ -21330,13 +21613,13 @@
             <a:r>
               <a:rPr lang="en-US" sz="1300" b="1" dirty="0">
                 <a:solidFill>
-                  <a:srgbClr val="0F766E"/>
+                  <a:srgbClr val="4C1D95"/>
                 </a:solidFill>
                 <a:latin typeface="Trebuchet MS" pitchFamily="34" charset="0"/>
                 <a:ea typeface="Trebuchet MS" pitchFamily="34" charset="-122"/>
                 <a:cs typeface="Trebuchet MS" pitchFamily="34" charset="-120"/>
               </a:rPr>
-              <a:t>dict</a:t>
+              <a:t>ver</a:t>
             </a:r>
             <a:endParaRPr lang="en-US" sz="1300" dirty="0"/>
           </a:p>
@@ -21350,7 +21633,7 @@
         </p:nvSpPr>
         <p:spPr>
           <a:xfrm>
-            <a:off x="2221992" y="2569464"/>
+            <a:off x="2938272" y="2569464"/>
             <a:ext cx="1828800" cy="201168"/>
           </a:xfrm>
           <a:prstGeom prst="rect">
@@ -21375,7 +21658,7 @@
                 <a:ea typeface="Calibri" pitchFamily="34" charset="-122"/>
                 <a:cs typeface="Calibri" pitchFamily="34" charset="-120"/>
               </a:rPr>
-              <a:t>say, speak</a:t>
+              <a:t>truly, word</a:t>
             </a:r>
             <a:endParaRPr lang="en-US" sz="850" dirty="0"/>
           </a:p>
@@ -21389,7 +21672,7 @@
         </p:nvSpPr>
         <p:spPr>
           <a:xfrm>
-            <a:off x="4370832" y="2258568"/>
+            <a:off x="5803392" y="2258568"/>
             <a:ext cx="1828800" cy="292608"/>
           </a:xfrm>
           <a:prstGeom prst="rect">
@@ -21398,11 +21681,11 @@
             </a:avLst>
           </a:prstGeom>
           <a:solidFill>
-            <a:srgbClr val="FCE7F3"/>
+            <a:srgbClr val="CCFBF1"/>
           </a:solidFill>
           <a:ln w="19050">
             <a:solidFill>
-              <a:srgbClr val="DB2777"/>
+              <a:srgbClr val="0D9488"/>
             </a:solidFill>
             <a:prstDash val="solid"/>
           </a:ln>
@@ -21423,7 +21706,7 @@
         </p:nvSpPr>
         <p:spPr>
           <a:xfrm>
-            <a:off x="4370832" y="2258568"/>
+            <a:off x="5803392" y="2258568"/>
             <a:ext cx="1828800" cy="292608"/>
           </a:xfrm>
           <a:prstGeom prst="rect">
@@ -21442,13 +21725,13 @@
             <a:r>
               <a:rPr lang="en-US" sz="1300" b="1" dirty="0">
                 <a:solidFill>
-                  <a:srgbClr val="9D174D"/>
+                  <a:srgbClr val="0F766E"/>
                 </a:solidFill>
                 <a:latin typeface="Trebuchet MS" pitchFamily="34" charset="0"/>
                 <a:ea typeface="Trebuchet MS" pitchFamily="34" charset="-122"/>
                 <a:cs typeface="Trebuchet MS" pitchFamily="34" charset="-120"/>
               </a:rPr>
-              <a:t>ate</a:t>
+              <a:t>dict</a:t>
             </a:r>
             <a:endParaRPr lang="en-US" sz="1300" dirty="0"/>
           </a:p>
@@ -21462,7 +21745,7 @@
         </p:nvSpPr>
         <p:spPr>
           <a:xfrm>
-            <a:off x="4370832" y="2569464"/>
+            <a:off x="5803392" y="2569464"/>
             <a:ext cx="1828800" cy="201168"/>
           </a:xfrm>
           <a:prstGeom prst="rect">
@@ -21487,7 +21770,7 @@
                 <a:ea typeface="Calibri" pitchFamily="34" charset="-122"/>
                 <a:cs typeface="Calibri" pitchFamily="34" charset="-120"/>
               </a:rPr>
-              <a:t>to do or act</a:t>
+              <a:t>say, speak</a:t>
             </a:r>
             <a:endParaRPr lang="en-US" sz="850" dirty="0"/>
           </a:p>
@@ -21501,30 +21784,23 @@
         </p:nvSpPr>
         <p:spPr>
           <a:xfrm>
-            <a:off x="6519672" y="2258568"/>
-            <a:ext cx="1828800" cy="292608"/>
+            <a:off x="365760" y="3273552"/>
+            <a:ext cx="1371600" cy="658368"/>
           </a:xfrm>
           <a:prstGeom prst="rect">
             <a:avLst>
-              <a:gd name="adj" fmla="val 25000"/>
+              <a:gd name="adj" fmla="val 8333"/>
             </a:avLst>
           </a:prstGeom>
           <a:solidFill>
-            <a:srgbClr val="FCE7F3"/>
-          </a:solidFill>
-          <a:ln w="19050">
-            <a:solidFill>
-              <a:srgbClr val="DB2777"/>
-            </a:solidFill>
-            <a:prstDash val="solid"/>
-          </a:ln>
-          <a:effectLst>
-            <a:outerShdw sx="100000" sy="100000" kx="0" ky="0" algn="bl" rotWithShape="0" blurRad="101600" dist="38100" dir="8100000">
-              <a:srgbClr val="000000">
-                <a:alpha val="12000"/>
-              </a:srgbClr>
-            </a:outerShdw>
-          </a:effectLst>
+            <a:srgbClr val="E2E8F0"/>
+          </a:solidFill>
+          <a:ln w="12700">
+            <a:solidFill>
+              <a:srgbClr val="E2E8F0"/>
+            </a:solidFill>
+            <a:prstDash val="solid"/>
+          </a:ln>
         </p:spPr>
       </p:sp>
       <p:sp>
@@ -21535,47 +21811,668 @@
         </p:nvSpPr>
         <p:spPr>
           <a:xfrm>
-            <a:off x="6519672" y="2258568"/>
-            <a:ext cx="1828800" cy="292608"/>
-          </a:xfrm>
-          <a:prstGeom prst="rect">
-            <a:avLst/>
-          </a:prstGeom>
-          <a:noFill/>
-          <a:ln/>
-        </p:spPr>
-        <p:txBody>
-          <a:bodyPr wrap="square" lIns="0" tIns="0" rIns="0" bIns="0" rtlCol="0" anchor="ctr"/>
-          <a:lstStyle/>
-          <a:p>
-            <a:pPr algn="ctr" indent="0" marL="0">
-              <a:buNone/>
-            </a:pPr>
-            <a:r>
-              <a:rPr lang="en-US" sz="1300" b="1" dirty="0">
-                <a:solidFill>
-                  <a:srgbClr val="9D174D"/>
+            <a:off x="365760" y="3273552"/>
+            <a:ext cx="1371600" cy="658368"/>
+          </a:xfrm>
+          <a:prstGeom prst="rect">
+            <a:avLst/>
+          </a:prstGeom>
+          <a:noFill/>
+          <a:ln/>
+        </p:spPr>
+        <p:txBody>
+          <a:bodyPr wrap="square" lIns="0" tIns="0" rIns="0" bIns="0" rtlCol="0" anchor="ctr"/>
+          <a:lstStyle/>
+          <a:p>
+            <a:pPr algn="ctr" indent="0" marL="0">
+              <a:buNone/>
+            </a:pPr>
+            <a:r>
+              <a:rPr lang="en-US" sz="1100" b="1" dirty="0">
+                <a:solidFill>
+                  <a:srgbClr val="475569"/>
                 </a:solidFill>
                 <a:latin typeface="Trebuchet MS" pitchFamily="34" charset="0"/>
                 <a:ea typeface="Trebuchet MS" pitchFamily="34" charset="-122"/>
                 <a:cs typeface="Trebuchet MS" pitchFamily="34" charset="-120"/>
               </a:rPr>
-              <a:t>or</a:t>
-            </a:r>
-            <a:endParaRPr lang="en-US" sz="1300" dirty="0"/>
-          </a:p>
-        </p:txBody>
-      </p:sp>
-      <p:sp>
-        <p:nvSpPr>
-          <p:cNvPr id="24" name="Text 22"/>
-          <p:cNvSpPr/>
-          <p:nvPr/>
-        </p:nvSpPr>
-        <p:spPr>
-          <a:xfrm>
-            <a:off x="6519672" y="2569464"/>
-            <a:ext cx="1828800" cy="201168"/>
+              <a:t>Syllables</a:t>
+            </a:r>
+            <a:endParaRPr lang="en-US" sz="1100" dirty="0"/>
+          </a:p>
+        </p:txBody>
+      </p:sp>
+      <p:sp>
+        <p:nvSpPr>
+          <p:cNvPr id="24" name="Shape 22"/>
+          <p:cNvSpPr/>
+          <p:nvPr/>
+        </p:nvSpPr>
+        <p:spPr>
+          <a:xfrm>
+            <a:off x="1874520" y="3273552"/>
+            <a:ext cx="6903720" cy="658368"/>
+          </a:xfrm>
+          <a:prstGeom prst="rect">
+            <a:avLst>
+              <a:gd name="adj" fmla="val 8333"/>
+            </a:avLst>
+          </a:prstGeom>
+          <a:solidFill>
+            <a:srgbClr val="CCFBF1"/>
+          </a:solidFill>
+          <a:ln w="12700">
+            <a:solidFill>
+              <a:srgbClr val="0D9488"/>
+            </a:solidFill>
+            <a:prstDash val="solid"/>
+          </a:ln>
+        </p:spPr>
+      </p:sp>
+      <p:sp>
+        <p:nvSpPr>
+          <p:cNvPr id="25" name="Shape 23"/>
+          <p:cNvSpPr/>
+          <p:nvPr/>
+        </p:nvSpPr>
+        <p:spPr>
+          <a:xfrm>
+            <a:off x="2999232" y="3364992"/>
+            <a:ext cx="1645920" cy="475488"/>
+          </a:xfrm>
+          <a:prstGeom prst="rect">
+            <a:avLst>
+              <a:gd name="adj" fmla="val 9615"/>
+            </a:avLst>
+          </a:prstGeom>
+          <a:solidFill>
+            <a:srgbClr val="FFFFFF"/>
+          </a:solidFill>
+          <a:ln w="12700">
+            <a:solidFill>
+              <a:srgbClr val="0D9488"/>
+            </a:solidFill>
+            <a:prstDash val="solid"/>
+          </a:ln>
+        </p:spPr>
+      </p:sp>
+      <p:sp>
+        <p:nvSpPr>
+          <p:cNvPr id="26" name="Text 24"/>
+          <p:cNvSpPr/>
+          <p:nvPr/>
+        </p:nvSpPr>
+        <p:spPr>
+          <a:xfrm>
+            <a:off x="2999232" y="3364992"/>
+            <a:ext cx="1645920" cy="475488"/>
+          </a:xfrm>
+          <a:prstGeom prst="rect">
+            <a:avLst/>
+          </a:prstGeom>
+          <a:noFill/>
+          <a:ln/>
+        </p:spPr>
+        <p:txBody>
+          <a:bodyPr wrap="square" lIns="0" tIns="0" rIns="0" bIns="0" rtlCol="0" anchor="ctr"/>
+          <a:lstStyle/>
+          <a:p>
+            <a:pPr algn="ctr" indent="0" marL="0">
+              <a:buNone/>
+            </a:pPr>
+            <a:r>
+              <a:rPr lang="en-US" sz="1400" b="1" dirty="0">
+                <a:solidFill>
+                  <a:srgbClr val="0D9488"/>
+                </a:solidFill>
+                <a:latin typeface="Trebuchet MS" pitchFamily="34" charset="0"/>
+                <a:ea typeface="Trebuchet MS" pitchFamily="34" charset="-122"/>
+                <a:cs typeface="Trebuchet MS" pitchFamily="34" charset="-120"/>
+              </a:rPr>
+              <a:t>ver</a:t>
+            </a:r>
+            <a:endParaRPr lang="en-US" sz="1400" dirty="0"/>
+          </a:p>
+        </p:txBody>
+      </p:sp>
+      <p:sp>
+        <p:nvSpPr>
+          <p:cNvPr id="27" name="Text 25"/>
+          <p:cNvSpPr/>
+          <p:nvPr/>
+        </p:nvSpPr>
+        <p:spPr>
+          <a:xfrm>
+            <a:off x="4645152" y="3364992"/>
+            <a:ext cx="1097280" cy="475488"/>
+          </a:xfrm>
+          <a:prstGeom prst="rect">
+            <a:avLst/>
+          </a:prstGeom>
+          <a:noFill/>
+          <a:ln/>
+        </p:spPr>
+        <p:txBody>
+          <a:bodyPr wrap="square" lIns="0" tIns="0" rIns="0" bIns="0" rtlCol="0" anchor="ctr"/>
+          <a:lstStyle/>
+          <a:p>
+            <a:pPr algn="ctr" indent="0" marL="0">
+              <a:buNone/>
+            </a:pPr>
+            <a:r>
+              <a:rPr lang="en-US" sz="1600" b="1" dirty="0">
+                <a:solidFill>
+                  <a:srgbClr val="0D9488"/>
+                </a:solidFill>
+                <a:latin typeface="Trebuchet MS" pitchFamily="34" charset="0"/>
+                <a:ea typeface="Trebuchet MS" pitchFamily="34" charset="-122"/>
+                <a:cs typeface="Trebuchet MS" pitchFamily="34" charset="-120"/>
+              </a:rPr>
+              <a:t>·</a:t>
+            </a:r>
+            <a:endParaRPr lang="en-US" sz="1600" dirty="0"/>
+          </a:p>
+        </p:txBody>
+      </p:sp>
+      <p:sp>
+        <p:nvSpPr>
+          <p:cNvPr id="28" name="Shape 26"/>
+          <p:cNvSpPr/>
+          <p:nvPr/>
+        </p:nvSpPr>
+        <p:spPr>
+          <a:xfrm>
+            <a:off x="5742432" y="3364992"/>
+            <a:ext cx="1645920" cy="475488"/>
+          </a:xfrm>
+          <a:prstGeom prst="rect">
+            <a:avLst>
+              <a:gd name="adj" fmla="val 9615"/>
+            </a:avLst>
+          </a:prstGeom>
+          <a:solidFill>
+            <a:srgbClr val="FFFFFF"/>
+          </a:solidFill>
+          <a:ln w="12700">
+            <a:solidFill>
+              <a:srgbClr val="0D9488"/>
+            </a:solidFill>
+            <a:prstDash val="solid"/>
+          </a:ln>
+        </p:spPr>
+      </p:sp>
+      <p:sp>
+        <p:nvSpPr>
+          <p:cNvPr id="29" name="Text 27"/>
+          <p:cNvSpPr/>
+          <p:nvPr/>
+        </p:nvSpPr>
+        <p:spPr>
+          <a:xfrm>
+            <a:off x="5742432" y="3364992"/>
+            <a:ext cx="1645920" cy="475488"/>
+          </a:xfrm>
+          <a:prstGeom prst="rect">
+            <a:avLst/>
+          </a:prstGeom>
+          <a:noFill/>
+          <a:ln/>
+        </p:spPr>
+        <p:txBody>
+          <a:bodyPr wrap="square" lIns="0" tIns="0" rIns="0" bIns="0" rtlCol="0" anchor="ctr"/>
+          <a:lstStyle/>
+          <a:p>
+            <a:pPr algn="ctr" indent="0" marL="0">
+              <a:buNone/>
+            </a:pPr>
+            <a:r>
+              <a:rPr lang="en-US" sz="1400" b="1" dirty="0">
+                <a:solidFill>
+                  <a:srgbClr val="0D9488"/>
+                </a:solidFill>
+                <a:latin typeface="Trebuchet MS" pitchFamily="34" charset="0"/>
+                <a:ea typeface="Trebuchet MS" pitchFamily="34" charset="-122"/>
+                <a:cs typeface="Trebuchet MS" pitchFamily="34" charset="-120"/>
+              </a:rPr>
+              <a:t>dict</a:t>
+            </a:r>
+            <a:endParaRPr lang="en-US" sz="1400" dirty="0"/>
+          </a:p>
+        </p:txBody>
+      </p:sp>
+      <p:sp>
+        <p:nvSpPr>
+          <p:cNvPr id="30" name="Shape 28"/>
+          <p:cNvSpPr/>
+          <p:nvPr/>
+        </p:nvSpPr>
+        <p:spPr>
+          <a:xfrm>
+            <a:off x="365760" y="4096512"/>
+            <a:ext cx="1371600" cy="804672"/>
+          </a:xfrm>
+          <a:prstGeom prst="rect">
+            <a:avLst>
+              <a:gd name="adj" fmla="val 6818"/>
+            </a:avLst>
+          </a:prstGeom>
+          <a:solidFill>
+            <a:srgbClr val="E2E8F0"/>
+          </a:solidFill>
+          <a:ln w="12700">
+            <a:solidFill>
+              <a:srgbClr val="E2E8F0"/>
+            </a:solidFill>
+            <a:prstDash val="solid"/>
+          </a:ln>
+        </p:spPr>
+      </p:sp>
+      <p:sp>
+        <p:nvSpPr>
+          <p:cNvPr id="31" name="Text 29"/>
+          <p:cNvSpPr/>
+          <p:nvPr/>
+        </p:nvSpPr>
+        <p:spPr>
+          <a:xfrm>
+            <a:off x="365760" y="4096512"/>
+            <a:ext cx="1371600" cy="804672"/>
+          </a:xfrm>
+          <a:prstGeom prst="rect">
+            <a:avLst/>
+          </a:prstGeom>
+          <a:noFill/>
+          <a:ln/>
+        </p:spPr>
+        <p:txBody>
+          <a:bodyPr wrap="square" lIns="0" tIns="0" rIns="0" bIns="0" rtlCol="0" anchor="ctr"/>
+          <a:lstStyle/>
+          <a:p>
+            <a:pPr algn="ctr" indent="0" marL="0">
+              <a:buNone/>
+            </a:pPr>
+            <a:r>
+              <a:rPr lang="en-US" sz="1100" b="1" dirty="0">
+                <a:solidFill>
+                  <a:srgbClr val="475569"/>
+                </a:solidFill>
+                <a:latin typeface="Trebuchet MS" pitchFamily="34" charset="0"/>
+                <a:ea typeface="Trebuchet MS" pitchFamily="34" charset="-122"/>
+                <a:cs typeface="Trebuchet MS" pitchFamily="34" charset="-120"/>
+              </a:rPr>
+              <a:t>Phonemes</a:t>
+            </a:r>
+            <a:endParaRPr lang="en-US" sz="1100" dirty="0"/>
+          </a:p>
+        </p:txBody>
+      </p:sp>
+      <p:sp>
+        <p:nvSpPr>
+          <p:cNvPr id="32" name="Shape 30"/>
+          <p:cNvSpPr/>
+          <p:nvPr/>
+        </p:nvSpPr>
+        <p:spPr>
+          <a:xfrm>
+            <a:off x="1874520" y="4096512"/>
+            <a:ext cx="6903720" cy="804672"/>
+          </a:xfrm>
+          <a:prstGeom prst="rect">
+            <a:avLst>
+              <a:gd name="adj" fmla="val 6818"/>
+            </a:avLst>
+          </a:prstGeom>
+          <a:solidFill>
+            <a:srgbClr val="FCE7F3"/>
+          </a:solidFill>
+          <a:ln w="12700">
+            <a:solidFill>
+              <a:srgbClr val="DB2777"/>
+            </a:solidFill>
+            <a:prstDash val="solid"/>
+          </a:ln>
+        </p:spPr>
+      </p:sp>
+      <p:sp>
+        <p:nvSpPr>
+          <p:cNvPr id="33" name="Shape 31"/>
+          <p:cNvSpPr/>
+          <p:nvPr/>
+        </p:nvSpPr>
+        <p:spPr>
+          <a:xfrm>
+            <a:off x="2254649" y="4169664"/>
+            <a:ext cx="685800" cy="384048"/>
+          </a:xfrm>
+          <a:prstGeom prst="rect">
+            <a:avLst>
+              <a:gd name="adj" fmla="val 9524"/>
+            </a:avLst>
+          </a:prstGeom>
+          <a:solidFill>
+            <a:srgbClr val="FFFFFF"/>
+          </a:solidFill>
+          <a:ln w="12700">
+            <a:solidFill>
+              <a:srgbClr val="DB2777"/>
+            </a:solidFill>
+            <a:prstDash val="solid"/>
+          </a:ln>
+        </p:spPr>
+      </p:sp>
+      <p:sp>
+        <p:nvSpPr>
+          <p:cNvPr id="34" name="Text 32"/>
+          <p:cNvSpPr/>
+          <p:nvPr/>
+        </p:nvSpPr>
+        <p:spPr>
+          <a:xfrm>
+            <a:off x="2254649" y="4169664"/>
+            <a:ext cx="685800" cy="384048"/>
+          </a:xfrm>
+          <a:prstGeom prst="rect">
+            <a:avLst/>
+          </a:prstGeom>
+          <a:noFill/>
+          <a:ln/>
+        </p:spPr>
+        <p:txBody>
+          <a:bodyPr wrap="square" lIns="0" tIns="0" rIns="0" bIns="0" rtlCol="0" anchor="ctr"/>
+          <a:lstStyle/>
+          <a:p>
+            <a:pPr algn="ctr" indent="0" marL="0">
+              <a:buNone/>
+            </a:pPr>
+            <a:r>
+              <a:rPr lang="en-US" sz="900" b="1" dirty="0">
+                <a:solidFill>
+                  <a:srgbClr val="9D174D"/>
+                </a:solidFill>
+                <a:latin typeface="Trebuchet MS" pitchFamily="34" charset="0"/>
+                <a:ea typeface="Trebuchet MS" pitchFamily="34" charset="-122"/>
+                <a:cs typeface="Trebuchet MS" pitchFamily="34" charset="-120"/>
+              </a:rPr>
+              <a:t>v</a:t>
+            </a:r>
+            <a:endParaRPr lang="en-US" sz="900" dirty="0"/>
+          </a:p>
+        </p:txBody>
+      </p:sp>
+      <p:sp>
+        <p:nvSpPr>
+          <p:cNvPr id="35" name="Shape 33"/>
+          <p:cNvSpPr/>
+          <p:nvPr/>
+        </p:nvSpPr>
+        <p:spPr>
+          <a:xfrm>
+            <a:off x="3293146" y="4169664"/>
+            <a:ext cx="685800" cy="384048"/>
+          </a:xfrm>
+          <a:prstGeom prst="rect">
+            <a:avLst>
+              <a:gd name="adj" fmla="val 9524"/>
+            </a:avLst>
+          </a:prstGeom>
+          <a:solidFill>
+            <a:srgbClr val="FFFFFF"/>
+          </a:solidFill>
+          <a:ln w="12700">
+            <a:solidFill>
+              <a:srgbClr val="DB2777"/>
+            </a:solidFill>
+            <a:prstDash val="solid"/>
+          </a:ln>
+        </p:spPr>
+      </p:sp>
+      <p:sp>
+        <p:nvSpPr>
+          <p:cNvPr id="36" name="Text 34"/>
+          <p:cNvSpPr/>
+          <p:nvPr/>
+        </p:nvSpPr>
+        <p:spPr>
+          <a:xfrm>
+            <a:off x="3293146" y="4169664"/>
+            <a:ext cx="685800" cy="384048"/>
+          </a:xfrm>
+          <a:prstGeom prst="rect">
+            <a:avLst/>
+          </a:prstGeom>
+          <a:noFill/>
+          <a:ln/>
+        </p:spPr>
+        <p:txBody>
+          <a:bodyPr wrap="square" lIns="0" tIns="0" rIns="0" bIns="0" rtlCol="0" anchor="ctr"/>
+          <a:lstStyle/>
+          <a:p>
+            <a:pPr algn="ctr" indent="0" marL="0">
+              <a:buNone/>
+            </a:pPr>
+            <a:r>
+              <a:rPr lang="en-US" sz="900" b="1" dirty="0">
+                <a:solidFill>
+                  <a:srgbClr val="9D174D"/>
+                </a:solidFill>
+                <a:latin typeface="Trebuchet MS" pitchFamily="34" charset="0"/>
+                <a:ea typeface="Trebuchet MS" pitchFamily="34" charset="-122"/>
+                <a:cs typeface="Trebuchet MS" pitchFamily="34" charset="-120"/>
+              </a:rPr>
+              <a:t>er</a:t>
+            </a:r>
+            <a:endParaRPr lang="en-US" sz="900" dirty="0"/>
+          </a:p>
+        </p:txBody>
+      </p:sp>
+      <p:sp>
+        <p:nvSpPr>
+          <p:cNvPr id="37" name="Shape 35"/>
+          <p:cNvSpPr/>
+          <p:nvPr/>
+        </p:nvSpPr>
+        <p:spPr>
+          <a:xfrm>
+            <a:off x="4331643" y="4169664"/>
+            <a:ext cx="685800" cy="384048"/>
+          </a:xfrm>
+          <a:prstGeom prst="rect">
+            <a:avLst>
+              <a:gd name="adj" fmla="val 9524"/>
+            </a:avLst>
+          </a:prstGeom>
+          <a:solidFill>
+            <a:srgbClr val="FFFFFF"/>
+          </a:solidFill>
+          <a:ln w="12700">
+            <a:solidFill>
+              <a:srgbClr val="DB2777"/>
+            </a:solidFill>
+            <a:prstDash val="solid"/>
+          </a:ln>
+        </p:spPr>
+      </p:sp>
+      <p:sp>
+        <p:nvSpPr>
+          <p:cNvPr id="38" name="Text 36"/>
+          <p:cNvSpPr/>
+          <p:nvPr/>
+        </p:nvSpPr>
+        <p:spPr>
+          <a:xfrm>
+            <a:off x="4331643" y="4169664"/>
+            <a:ext cx="685800" cy="384048"/>
+          </a:xfrm>
+          <a:prstGeom prst="rect">
+            <a:avLst/>
+          </a:prstGeom>
+          <a:noFill/>
+          <a:ln/>
+        </p:spPr>
+        <p:txBody>
+          <a:bodyPr wrap="square" lIns="0" tIns="0" rIns="0" bIns="0" rtlCol="0" anchor="ctr"/>
+          <a:lstStyle/>
+          <a:p>
+            <a:pPr algn="ctr" indent="0" marL="0">
+              <a:buNone/>
+            </a:pPr>
+            <a:r>
+              <a:rPr lang="en-US" sz="900" b="1" dirty="0">
+                <a:solidFill>
+                  <a:srgbClr val="9D174D"/>
+                </a:solidFill>
+                <a:latin typeface="Trebuchet MS" pitchFamily="34" charset="0"/>
+                <a:ea typeface="Trebuchet MS" pitchFamily="34" charset="-122"/>
+                <a:cs typeface="Trebuchet MS" pitchFamily="34" charset="-120"/>
+              </a:rPr>
+              <a:t>d</a:t>
+            </a:r>
+            <a:endParaRPr lang="en-US" sz="900" dirty="0"/>
+          </a:p>
+        </p:txBody>
+      </p:sp>
+      <p:sp>
+        <p:nvSpPr>
+          <p:cNvPr id="39" name="Shape 37"/>
+          <p:cNvSpPr/>
+          <p:nvPr/>
+        </p:nvSpPr>
+        <p:spPr>
+          <a:xfrm>
+            <a:off x="5370141" y="4169664"/>
+            <a:ext cx="685800" cy="384048"/>
+          </a:xfrm>
+          <a:prstGeom prst="rect">
+            <a:avLst>
+              <a:gd name="adj" fmla="val 9524"/>
+            </a:avLst>
+          </a:prstGeom>
+          <a:solidFill>
+            <a:srgbClr val="FFFFFF"/>
+          </a:solidFill>
+          <a:ln w="12700">
+            <a:solidFill>
+              <a:srgbClr val="DB2777"/>
+            </a:solidFill>
+            <a:prstDash val="solid"/>
+          </a:ln>
+        </p:spPr>
+      </p:sp>
+      <p:sp>
+        <p:nvSpPr>
+          <p:cNvPr id="40" name="Text 38"/>
+          <p:cNvSpPr/>
+          <p:nvPr/>
+        </p:nvSpPr>
+        <p:spPr>
+          <a:xfrm>
+            <a:off x="5370141" y="4169664"/>
+            <a:ext cx="685800" cy="384048"/>
+          </a:xfrm>
+          <a:prstGeom prst="rect">
+            <a:avLst/>
+          </a:prstGeom>
+          <a:noFill/>
+          <a:ln/>
+        </p:spPr>
+        <p:txBody>
+          <a:bodyPr wrap="square" lIns="0" tIns="0" rIns="0" bIns="0" rtlCol="0" anchor="ctr"/>
+          <a:lstStyle/>
+          <a:p>
+            <a:pPr algn="ctr" indent="0" marL="0">
+              <a:buNone/>
+            </a:pPr>
+            <a:r>
+              <a:rPr lang="en-US" sz="900" b="1" dirty="0">
+                <a:solidFill>
+                  <a:srgbClr val="9D174D"/>
+                </a:solidFill>
+                <a:latin typeface="Trebuchet MS" pitchFamily="34" charset="0"/>
+                <a:ea typeface="Trebuchet MS" pitchFamily="34" charset="-122"/>
+                <a:cs typeface="Trebuchet MS" pitchFamily="34" charset="-120"/>
+              </a:rPr>
+              <a:t>i</a:t>
+            </a:r>
+            <a:endParaRPr lang="en-US" sz="900" dirty="0"/>
+          </a:p>
+        </p:txBody>
+      </p:sp>
+      <p:sp>
+        <p:nvSpPr>
+          <p:cNvPr id="41" name="Shape 39"/>
+          <p:cNvSpPr/>
+          <p:nvPr/>
+        </p:nvSpPr>
+        <p:spPr>
+          <a:xfrm>
+            <a:off x="6408638" y="4169664"/>
+            <a:ext cx="685800" cy="384048"/>
+          </a:xfrm>
+          <a:prstGeom prst="rect">
+            <a:avLst>
+              <a:gd name="adj" fmla="val 9524"/>
+            </a:avLst>
+          </a:prstGeom>
+          <a:solidFill>
+            <a:srgbClr val="FFFFFF"/>
+          </a:solidFill>
+          <a:ln w="12700">
+            <a:solidFill>
+              <a:srgbClr val="DB2777"/>
+            </a:solidFill>
+            <a:prstDash val="solid"/>
+          </a:ln>
+        </p:spPr>
+      </p:sp>
+      <p:sp>
+        <p:nvSpPr>
+          <p:cNvPr id="42" name="Text 40"/>
+          <p:cNvSpPr/>
+          <p:nvPr/>
+        </p:nvSpPr>
+        <p:spPr>
+          <a:xfrm>
+            <a:off x="6408638" y="4169664"/>
+            <a:ext cx="685800" cy="384048"/>
+          </a:xfrm>
+          <a:prstGeom prst="rect">
+            <a:avLst/>
+          </a:prstGeom>
+          <a:noFill/>
+          <a:ln/>
+        </p:spPr>
+        <p:txBody>
+          <a:bodyPr wrap="square" lIns="0" tIns="0" rIns="0" bIns="0" rtlCol="0" anchor="ctr"/>
+          <a:lstStyle/>
+          <a:p>
+            <a:pPr algn="ctr" indent="0" marL="0">
+              <a:buNone/>
+            </a:pPr>
+            <a:r>
+              <a:rPr lang="en-US" sz="900" b="1" dirty="0">
+                <a:solidFill>
+                  <a:srgbClr val="9D174D"/>
+                </a:solidFill>
+                <a:latin typeface="Trebuchet MS" pitchFamily="34" charset="0"/>
+                <a:ea typeface="Trebuchet MS" pitchFamily="34" charset="-122"/>
+                <a:cs typeface="Trebuchet MS" pitchFamily="34" charset="-120"/>
+              </a:rPr>
+              <a:t>c</a:t>
+            </a:r>
+            <a:endParaRPr lang="en-US" sz="900" dirty="0"/>
+          </a:p>
+        </p:txBody>
+      </p:sp>
+      <p:sp>
+        <p:nvSpPr>
+          <p:cNvPr id="43" name="Text 41"/>
+          <p:cNvSpPr/>
+          <p:nvPr/>
+        </p:nvSpPr>
+        <p:spPr>
+          <a:xfrm>
+            <a:off x="6408638" y="4572000"/>
+            <a:ext cx="685800" cy="219456"/>
           </a:xfrm>
           <a:prstGeom prst="rect">
             <a:avLst/>
@@ -21591,978 +22488,81 @@
               <a:buNone/>
             </a:pPr>
             <a:r>
-              <a:rPr lang="en-US" sz="850" dirty="0">
-                <a:solidFill>
-                  <a:srgbClr val="475569"/>
+              <a:rPr lang="en-US" sz="750" i="1" dirty="0">
+                <a:solidFill>
+                  <a:srgbClr val="94A3B8"/>
                 </a:solidFill>
                 <a:latin typeface="Calibri" pitchFamily="34" charset="0"/>
                 <a:ea typeface="Calibri" pitchFamily="34" charset="-122"/>
                 <a:cs typeface="Calibri" pitchFamily="34" charset="-120"/>
               </a:rPr>
-              <a:t>person who does something</a:t>
-            </a:r>
-            <a:endParaRPr lang="en-US" sz="850" dirty="0"/>
-          </a:p>
-        </p:txBody>
-      </p:sp>
-      <p:sp>
-        <p:nvSpPr>
-          <p:cNvPr id="25" name="Shape 23"/>
-          <p:cNvSpPr/>
-          <p:nvPr/>
-        </p:nvSpPr>
-        <p:spPr>
-          <a:xfrm>
-            <a:off x="365760" y="3273552"/>
-            <a:ext cx="1371600" cy="658368"/>
+              <a:t>/k/</a:t>
+            </a:r>
+            <a:endParaRPr lang="en-US" sz="750" dirty="0"/>
+          </a:p>
+        </p:txBody>
+      </p:sp>
+      <p:sp>
+        <p:nvSpPr>
+          <p:cNvPr id="44" name="Shape 42"/>
+          <p:cNvSpPr/>
+          <p:nvPr/>
+        </p:nvSpPr>
+        <p:spPr>
+          <a:xfrm>
+            <a:off x="7447135" y="4169664"/>
+            <a:ext cx="685800" cy="384048"/>
           </a:xfrm>
           <a:prstGeom prst="rect">
             <a:avLst>
-              <a:gd name="adj" fmla="val 8333"/>
+              <a:gd name="adj" fmla="val 9524"/>
             </a:avLst>
           </a:prstGeom>
           <a:solidFill>
-            <a:srgbClr val="E2E8F0"/>
-          </a:solidFill>
-          <a:ln w="12700">
-            <a:solidFill>
-              <a:srgbClr val="E2E8F0"/>
-            </a:solidFill>
-            <a:prstDash val="solid"/>
-          </a:ln>
-        </p:spPr>
-      </p:sp>
-      <p:sp>
-        <p:nvSpPr>
-          <p:cNvPr id="26" name="Text 24"/>
-          <p:cNvSpPr/>
-          <p:nvPr/>
-        </p:nvSpPr>
-        <p:spPr>
-          <a:xfrm>
-            <a:off x="365760" y="3273552"/>
-            <a:ext cx="1371600" cy="658368"/>
-          </a:xfrm>
-          <a:prstGeom prst="rect">
-            <a:avLst/>
-          </a:prstGeom>
-          <a:noFill/>
-          <a:ln/>
-        </p:spPr>
-        <p:txBody>
-          <a:bodyPr wrap="square" lIns="0" tIns="0" rIns="0" bIns="0" rtlCol="0" anchor="ctr"/>
-          <a:lstStyle/>
-          <a:p>
-            <a:pPr algn="ctr" indent="0" marL="0">
-              <a:buNone/>
-            </a:pPr>
-            <a:r>
-              <a:rPr lang="en-US" sz="1100" b="1" dirty="0">
-                <a:solidFill>
-                  <a:srgbClr val="475569"/>
+            <a:srgbClr val="FFFFFF"/>
+          </a:solidFill>
+          <a:ln w="12700">
+            <a:solidFill>
+              <a:srgbClr val="DB2777"/>
+            </a:solidFill>
+            <a:prstDash val="solid"/>
+          </a:ln>
+        </p:spPr>
+      </p:sp>
+      <p:sp>
+        <p:nvSpPr>
+          <p:cNvPr id="45" name="Text 43"/>
+          <p:cNvSpPr/>
+          <p:nvPr/>
+        </p:nvSpPr>
+        <p:spPr>
+          <a:xfrm>
+            <a:off x="7447135" y="4169664"/>
+            <a:ext cx="685800" cy="384048"/>
+          </a:xfrm>
+          <a:prstGeom prst="rect">
+            <a:avLst/>
+          </a:prstGeom>
+          <a:noFill/>
+          <a:ln/>
+        </p:spPr>
+        <p:txBody>
+          <a:bodyPr wrap="square" lIns="0" tIns="0" rIns="0" bIns="0" rtlCol="0" anchor="ctr"/>
+          <a:lstStyle/>
+          <a:p>
+            <a:pPr algn="ctr" indent="0" marL="0">
+              <a:buNone/>
+            </a:pPr>
+            <a:r>
+              <a:rPr lang="en-US" sz="900" b="1" dirty="0">
+                <a:solidFill>
+                  <a:srgbClr val="9D174D"/>
                 </a:solidFill>
                 <a:latin typeface="Trebuchet MS" pitchFamily="34" charset="0"/>
                 <a:ea typeface="Trebuchet MS" pitchFamily="34" charset="-122"/>
                 <a:cs typeface="Trebuchet MS" pitchFamily="34" charset="-120"/>
               </a:rPr>
-              <a:t>Syllables</a:t>
-            </a:r>
-            <a:endParaRPr lang="en-US" sz="1100" dirty="0"/>
-          </a:p>
-        </p:txBody>
-      </p:sp>
-      <p:sp>
-        <p:nvSpPr>
-          <p:cNvPr id="27" name="Shape 25"/>
-          <p:cNvSpPr/>
-          <p:nvPr/>
-        </p:nvSpPr>
-        <p:spPr>
-          <a:xfrm>
-            <a:off x="1874520" y="3273552"/>
-            <a:ext cx="6903720" cy="658368"/>
-          </a:xfrm>
-          <a:prstGeom prst="rect">
-            <a:avLst>
-              <a:gd name="adj" fmla="val 8333"/>
-            </a:avLst>
-          </a:prstGeom>
-          <a:solidFill>
-            <a:srgbClr val="CCFBF1"/>
-          </a:solidFill>
-          <a:ln w="12700">
-            <a:solidFill>
-              <a:srgbClr val="0D9488"/>
-            </a:solidFill>
-            <a:prstDash val="solid"/>
-          </a:ln>
-        </p:spPr>
-      </p:sp>
-      <p:sp>
-        <p:nvSpPr>
-          <p:cNvPr id="28" name="Shape 26"/>
-          <p:cNvSpPr/>
-          <p:nvPr/>
-        </p:nvSpPr>
-        <p:spPr>
-          <a:xfrm>
-            <a:off x="2313432" y="3364992"/>
-            <a:ext cx="1645920" cy="475488"/>
-          </a:xfrm>
-          <a:prstGeom prst="rect">
-            <a:avLst>
-              <a:gd name="adj" fmla="val 9615"/>
-            </a:avLst>
-          </a:prstGeom>
-          <a:solidFill>
-            <a:srgbClr val="FFFFFF"/>
-          </a:solidFill>
-          <a:ln w="12700">
-            <a:solidFill>
-              <a:srgbClr val="0D9488"/>
-            </a:solidFill>
-            <a:prstDash val="solid"/>
-          </a:ln>
-        </p:spPr>
-      </p:sp>
-      <p:sp>
-        <p:nvSpPr>
-          <p:cNvPr id="29" name="Text 27"/>
-          <p:cNvSpPr/>
-          <p:nvPr/>
-        </p:nvSpPr>
-        <p:spPr>
-          <a:xfrm>
-            <a:off x="2313432" y="3364992"/>
-            <a:ext cx="1645920" cy="475488"/>
-          </a:xfrm>
-          <a:prstGeom prst="rect">
-            <a:avLst/>
-          </a:prstGeom>
-          <a:noFill/>
-          <a:ln/>
-        </p:spPr>
-        <p:txBody>
-          <a:bodyPr wrap="square" lIns="0" tIns="0" rIns="0" bIns="0" rtlCol="0" anchor="ctr"/>
-          <a:lstStyle/>
-          <a:p>
-            <a:pPr algn="ctr" indent="0" marL="0">
-              <a:buNone/>
-            </a:pPr>
-            <a:r>
-              <a:rPr lang="en-US" sz="1400" b="1" dirty="0">
-                <a:solidFill>
-                  <a:srgbClr val="0D9488"/>
-                </a:solidFill>
-                <a:latin typeface="Trebuchet MS" pitchFamily="34" charset="0"/>
-                <a:ea typeface="Trebuchet MS" pitchFamily="34" charset="-122"/>
-                <a:cs typeface="Trebuchet MS" pitchFamily="34" charset="-120"/>
-              </a:rPr>
-              <a:t>dic</a:t>
-            </a:r>
-            <a:endParaRPr lang="en-US" sz="1400" dirty="0"/>
-          </a:p>
-        </p:txBody>
-      </p:sp>
-      <p:sp>
-        <p:nvSpPr>
-          <p:cNvPr id="30" name="Text 28"/>
-          <p:cNvSpPr/>
-          <p:nvPr/>
-        </p:nvSpPr>
-        <p:spPr>
-          <a:xfrm>
-            <a:off x="3959352" y="3364992"/>
-            <a:ext cx="411480" cy="475488"/>
-          </a:xfrm>
-          <a:prstGeom prst="rect">
-            <a:avLst/>
-          </a:prstGeom>
-          <a:noFill/>
-          <a:ln/>
-        </p:spPr>
-        <p:txBody>
-          <a:bodyPr wrap="square" lIns="0" tIns="0" rIns="0" bIns="0" rtlCol="0" anchor="ctr"/>
-          <a:lstStyle/>
-          <a:p>
-            <a:pPr algn="ctr" indent="0" marL="0">
-              <a:buNone/>
-            </a:pPr>
-            <a:r>
-              <a:rPr lang="en-US" sz="1600" b="1" dirty="0">
-                <a:solidFill>
-                  <a:srgbClr val="0D9488"/>
-                </a:solidFill>
-                <a:latin typeface="Trebuchet MS" pitchFamily="34" charset="0"/>
-                <a:ea typeface="Trebuchet MS" pitchFamily="34" charset="-122"/>
-                <a:cs typeface="Trebuchet MS" pitchFamily="34" charset="-120"/>
-              </a:rPr>
-              <a:t>·</a:t>
-            </a:r>
-            <a:endParaRPr lang="en-US" sz="1600" dirty="0"/>
-          </a:p>
-        </p:txBody>
-      </p:sp>
-      <p:sp>
-        <p:nvSpPr>
-          <p:cNvPr id="31" name="Shape 29"/>
-          <p:cNvSpPr/>
-          <p:nvPr/>
-        </p:nvSpPr>
-        <p:spPr>
-          <a:xfrm>
-            <a:off x="4370832" y="3364992"/>
-            <a:ext cx="1645920" cy="475488"/>
-          </a:xfrm>
-          <a:prstGeom prst="rect">
-            <a:avLst>
-              <a:gd name="adj" fmla="val 9615"/>
-            </a:avLst>
-          </a:prstGeom>
-          <a:solidFill>
-            <a:srgbClr val="FFFFFF"/>
-          </a:solidFill>
-          <a:ln w="12700">
-            <a:solidFill>
-              <a:srgbClr val="0D9488"/>
-            </a:solidFill>
-            <a:prstDash val="solid"/>
-          </a:ln>
-        </p:spPr>
-      </p:sp>
-      <p:sp>
-        <p:nvSpPr>
-          <p:cNvPr id="32" name="Text 30"/>
-          <p:cNvSpPr/>
-          <p:nvPr/>
-        </p:nvSpPr>
-        <p:spPr>
-          <a:xfrm>
-            <a:off x="4370832" y="3364992"/>
-            <a:ext cx="1645920" cy="475488"/>
-          </a:xfrm>
-          <a:prstGeom prst="rect">
-            <a:avLst/>
-          </a:prstGeom>
-          <a:noFill/>
-          <a:ln/>
-        </p:spPr>
-        <p:txBody>
-          <a:bodyPr wrap="square" lIns="0" tIns="0" rIns="0" bIns="0" rtlCol="0" anchor="ctr"/>
-          <a:lstStyle/>
-          <a:p>
-            <a:pPr algn="ctr" indent="0" marL="0">
-              <a:buNone/>
-            </a:pPr>
-            <a:r>
-              <a:rPr lang="en-US" sz="1400" b="1" dirty="0">
-                <a:solidFill>
-                  <a:srgbClr val="0D9488"/>
-                </a:solidFill>
-                <a:latin typeface="Trebuchet MS" pitchFamily="34" charset="0"/>
-                <a:ea typeface="Trebuchet MS" pitchFamily="34" charset="-122"/>
-                <a:cs typeface="Trebuchet MS" pitchFamily="34" charset="-120"/>
-              </a:rPr>
-              <a:t>ta</a:t>
-            </a:r>
-            <a:endParaRPr lang="en-US" sz="1400" dirty="0"/>
-          </a:p>
-        </p:txBody>
-      </p:sp>
-      <p:sp>
-        <p:nvSpPr>
-          <p:cNvPr id="33" name="Text 31"/>
-          <p:cNvSpPr/>
-          <p:nvPr/>
-        </p:nvSpPr>
-        <p:spPr>
-          <a:xfrm>
-            <a:off x="6016752" y="3364992"/>
-            <a:ext cx="411480" cy="475488"/>
-          </a:xfrm>
-          <a:prstGeom prst="rect">
-            <a:avLst/>
-          </a:prstGeom>
-          <a:noFill/>
-          <a:ln/>
-        </p:spPr>
-        <p:txBody>
-          <a:bodyPr wrap="square" lIns="0" tIns="0" rIns="0" bIns="0" rtlCol="0" anchor="ctr"/>
-          <a:lstStyle/>
-          <a:p>
-            <a:pPr algn="ctr" indent="0" marL="0">
-              <a:buNone/>
-            </a:pPr>
-            <a:r>
-              <a:rPr lang="en-US" sz="1600" b="1" dirty="0">
-                <a:solidFill>
-                  <a:srgbClr val="0D9488"/>
-                </a:solidFill>
-                <a:latin typeface="Trebuchet MS" pitchFamily="34" charset="0"/>
-                <a:ea typeface="Trebuchet MS" pitchFamily="34" charset="-122"/>
-                <a:cs typeface="Trebuchet MS" pitchFamily="34" charset="-120"/>
-              </a:rPr>
-              <a:t>·</a:t>
-            </a:r>
-            <a:endParaRPr lang="en-US" sz="1600" dirty="0"/>
-          </a:p>
-        </p:txBody>
-      </p:sp>
-      <p:sp>
-        <p:nvSpPr>
-          <p:cNvPr id="34" name="Shape 32"/>
-          <p:cNvSpPr/>
-          <p:nvPr/>
-        </p:nvSpPr>
-        <p:spPr>
-          <a:xfrm>
-            <a:off x="6428232" y="3364992"/>
-            <a:ext cx="1645920" cy="475488"/>
-          </a:xfrm>
-          <a:prstGeom prst="rect">
-            <a:avLst>
-              <a:gd name="adj" fmla="val 9615"/>
-            </a:avLst>
-          </a:prstGeom>
-          <a:solidFill>
-            <a:srgbClr val="FFFFFF"/>
-          </a:solidFill>
-          <a:ln w="12700">
-            <a:solidFill>
-              <a:srgbClr val="0D9488"/>
-            </a:solidFill>
-            <a:prstDash val="solid"/>
-          </a:ln>
-        </p:spPr>
-      </p:sp>
-      <p:sp>
-        <p:nvSpPr>
-          <p:cNvPr id="35" name="Text 33"/>
-          <p:cNvSpPr/>
-          <p:nvPr/>
-        </p:nvSpPr>
-        <p:spPr>
-          <a:xfrm>
-            <a:off x="6428232" y="3364992"/>
-            <a:ext cx="1645920" cy="475488"/>
-          </a:xfrm>
-          <a:prstGeom prst="rect">
-            <a:avLst/>
-          </a:prstGeom>
-          <a:noFill/>
-          <a:ln/>
-        </p:spPr>
-        <p:txBody>
-          <a:bodyPr wrap="square" lIns="0" tIns="0" rIns="0" bIns="0" rtlCol="0" anchor="ctr"/>
-          <a:lstStyle/>
-          <a:p>
-            <a:pPr algn="ctr" indent="0" marL="0">
-              <a:buNone/>
-            </a:pPr>
-            <a:r>
-              <a:rPr lang="en-US" sz="1400" b="1" dirty="0">
-                <a:solidFill>
-                  <a:srgbClr val="0D9488"/>
-                </a:solidFill>
-                <a:latin typeface="Trebuchet MS" pitchFamily="34" charset="0"/>
-                <a:ea typeface="Trebuchet MS" pitchFamily="34" charset="-122"/>
-                <a:cs typeface="Trebuchet MS" pitchFamily="34" charset="-120"/>
-              </a:rPr>
-              <a:t>tor</a:t>
-            </a:r>
-            <a:endParaRPr lang="en-US" sz="1400" dirty="0"/>
-          </a:p>
-        </p:txBody>
-      </p:sp>
-      <p:sp>
-        <p:nvSpPr>
-          <p:cNvPr id="36" name="Shape 34"/>
-          <p:cNvSpPr/>
-          <p:nvPr/>
-        </p:nvSpPr>
-        <p:spPr>
-          <a:xfrm>
-            <a:off x="365760" y="4096512"/>
-            <a:ext cx="1371600" cy="804672"/>
-          </a:xfrm>
-          <a:prstGeom prst="rect">
-            <a:avLst>
-              <a:gd name="adj" fmla="val 6818"/>
-            </a:avLst>
-          </a:prstGeom>
-          <a:solidFill>
-            <a:srgbClr val="E2E8F0"/>
-          </a:solidFill>
-          <a:ln w="12700">
-            <a:solidFill>
-              <a:srgbClr val="E2E8F0"/>
-            </a:solidFill>
-            <a:prstDash val="solid"/>
-          </a:ln>
-        </p:spPr>
-      </p:sp>
-      <p:sp>
-        <p:nvSpPr>
-          <p:cNvPr id="37" name="Text 35"/>
-          <p:cNvSpPr/>
-          <p:nvPr/>
-        </p:nvSpPr>
-        <p:spPr>
-          <a:xfrm>
-            <a:off x="365760" y="4096512"/>
-            <a:ext cx="1371600" cy="804672"/>
-          </a:xfrm>
-          <a:prstGeom prst="rect">
-            <a:avLst/>
-          </a:prstGeom>
-          <a:noFill/>
-          <a:ln/>
-        </p:spPr>
-        <p:txBody>
-          <a:bodyPr wrap="square" lIns="0" tIns="0" rIns="0" bIns="0" rtlCol="0" anchor="ctr"/>
-          <a:lstStyle/>
-          <a:p>
-            <a:pPr algn="ctr" indent="0" marL="0">
-              <a:buNone/>
-            </a:pPr>
-            <a:r>
-              <a:rPr lang="en-US" sz="1100" b="1" dirty="0">
-                <a:solidFill>
-                  <a:srgbClr val="475569"/>
-                </a:solidFill>
-                <a:latin typeface="Trebuchet MS" pitchFamily="34" charset="0"/>
-                <a:ea typeface="Trebuchet MS" pitchFamily="34" charset="-122"/>
-                <a:cs typeface="Trebuchet MS" pitchFamily="34" charset="-120"/>
-              </a:rPr>
-              <a:t>Phonemes</a:t>
-            </a:r>
-            <a:endParaRPr lang="en-US" sz="1100" dirty="0"/>
-          </a:p>
-        </p:txBody>
-      </p:sp>
-      <p:sp>
-        <p:nvSpPr>
-          <p:cNvPr id="38" name="Shape 36"/>
-          <p:cNvSpPr/>
-          <p:nvPr/>
-        </p:nvSpPr>
-        <p:spPr>
-          <a:xfrm>
-            <a:off x="1874520" y="4096512"/>
-            <a:ext cx="6903720" cy="804672"/>
-          </a:xfrm>
-          <a:prstGeom prst="rect">
-            <a:avLst>
-              <a:gd name="adj" fmla="val 6818"/>
-            </a:avLst>
-          </a:prstGeom>
-          <a:solidFill>
-            <a:srgbClr val="FCE7F3"/>
-          </a:solidFill>
-          <a:ln w="12700">
-            <a:solidFill>
-              <a:srgbClr val="DB2777"/>
-            </a:solidFill>
-            <a:prstDash val="solid"/>
-          </a:ln>
-        </p:spPr>
-      </p:sp>
-      <p:sp>
-        <p:nvSpPr>
-          <p:cNvPr id="39" name="Shape 37"/>
-          <p:cNvSpPr/>
-          <p:nvPr/>
-        </p:nvSpPr>
-        <p:spPr>
-          <a:xfrm>
-            <a:off x="2124837" y="4169664"/>
-            <a:ext cx="685800" cy="384048"/>
-          </a:xfrm>
-          <a:prstGeom prst="rect">
-            <a:avLst>
-              <a:gd name="adj" fmla="val 9524"/>
-            </a:avLst>
-          </a:prstGeom>
-          <a:solidFill>
-            <a:srgbClr val="FFFFFF"/>
-          </a:solidFill>
-          <a:ln w="12700">
-            <a:solidFill>
-              <a:srgbClr val="DB2777"/>
-            </a:solidFill>
-            <a:prstDash val="solid"/>
-          </a:ln>
-        </p:spPr>
-      </p:sp>
-      <p:sp>
-        <p:nvSpPr>
-          <p:cNvPr id="40" name="Text 38"/>
-          <p:cNvSpPr/>
-          <p:nvPr/>
-        </p:nvSpPr>
-        <p:spPr>
-          <a:xfrm>
-            <a:off x="2124837" y="4169664"/>
-            <a:ext cx="685800" cy="384048"/>
-          </a:xfrm>
-          <a:prstGeom prst="rect">
-            <a:avLst/>
-          </a:prstGeom>
-          <a:noFill/>
-          <a:ln/>
-        </p:spPr>
-        <p:txBody>
-          <a:bodyPr wrap="square" lIns="0" tIns="0" rIns="0" bIns="0" rtlCol="0" anchor="ctr"/>
-          <a:lstStyle/>
-          <a:p>
-            <a:pPr algn="ctr" indent="0" marL="0">
-              <a:buNone/>
-            </a:pPr>
-            <a:r>
-              <a:rPr lang="en-US" sz="900" b="1" dirty="0">
-                <a:solidFill>
-                  <a:srgbClr val="9D174D"/>
-                </a:solidFill>
-                <a:latin typeface="Trebuchet MS" pitchFamily="34" charset="0"/>
-                <a:ea typeface="Trebuchet MS" pitchFamily="34" charset="-122"/>
-                <a:cs typeface="Trebuchet MS" pitchFamily="34" charset="-120"/>
-              </a:rPr>
-              <a:t>d</a:t>
-            </a:r>
-            <a:endParaRPr lang="en-US" sz="900" dirty="0"/>
-          </a:p>
-        </p:txBody>
-      </p:sp>
-      <p:sp>
-        <p:nvSpPr>
-          <p:cNvPr id="41" name="Shape 39"/>
-          <p:cNvSpPr/>
-          <p:nvPr/>
-        </p:nvSpPr>
-        <p:spPr>
-          <a:xfrm>
-            <a:off x="3033522" y="4169664"/>
-            <a:ext cx="685800" cy="384048"/>
-          </a:xfrm>
-          <a:prstGeom prst="rect">
-            <a:avLst>
-              <a:gd name="adj" fmla="val 9524"/>
-            </a:avLst>
-          </a:prstGeom>
-          <a:solidFill>
-            <a:srgbClr val="FFFFFF"/>
-          </a:solidFill>
-          <a:ln w="12700">
-            <a:solidFill>
-              <a:srgbClr val="DB2777"/>
-            </a:solidFill>
-            <a:prstDash val="solid"/>
-          </a:ln>
-        </p:spPr>
-      </p:sp>
-      <p:sp>
-        <p:nvSpPr>
-          <p:cNvPr id="42" name="Text 40"/>
-          <p:cNvSpPr/>
-          <p:nvPr/>
-        </p:nvSpPr>
-        <p:spPr>
-          <a:xfrm>
-            <a:off x="3033522" y="4169664"/>
-            <a:ext cx="685800" cy="384048"/>
-          </a:xfrm>
-          <a:prstGeom prst="rect">
-            <a:avLst/>
-          </a:prstGeom>
-          <a:noFill/>
-          <a:ln/>
-        </p:spPr>
-        <p:txBody>
-          <a:bodyPr wrap="square" lIns="0" tIns="0" rIns="0" bIns="0" rtlCol="0" anchor="ctr"/>
-          <a:lstStyle/>
-          <a:p>
-            <a:pPr algn="ctr" indent="0" marL="0">
-              <a:buNone/>
-            </a:pPr>
-            <a:r>
-              <a:rPr lang="en-US" sz="900" b="1" dirty="0">
-                <a:solidFill>
-                  <a:srgbClr val="9D174D"/>
-                </a:solidFill>
-                <a:latin typeface="Trebuchet MS" pitchFamily="34" charset="0"/>
-                <a:ea typeface="Trebuchet MS" pitchFamily="34" charset="-122"/>
-                <a:cs typeface="Trebuchet MS" pitchFamily="34" charset="-120"/>
-              </a:rPr>
-              <a:t>i</a:t>
-            </a:r>
-            <a:endParaRPr lang="en-US" sz="900" dirty="0"/>
-          </a:p>
-        </p:txBody>
-      </p:sp>
-      <p:sp>
-        <p:nvSpPr>
-          <p:cNvPr id="43" name="Shape 41"/>
-          <p:cNvSpPr/>
-          <p:nvPr/>
-        </p:nvSpPr>
-        <p:spPr>
-          <a:xfrm>
-            <a:off x="3942207" y="4169664"/>
-            <a:ext cx="685800" cy="384048"/>
-          </a:xfrm>
-          <a:prstGeom prst="rect">
-            <a:avLst>
-              <a:gd name="adj" fmla="val 9524"/>
-            </a:avLst>
-          </a:prstGeom>
-          <a:solidFill>
-            <a:srgbClr val="FFFFFF"/>
-          </a:solidFill>
-          <a:ln w="12700">
-            <a:solidFill>
-              <a:srgbClr val="DB2777"/>
-            </a:solidFill>
-            <a:prstDash val="solid"/>
-          </a:ln>
-        </p:spPr>
-      </p:sp>
-      <p:sp>
-        <p:nvSpPr>
-          <p:cNvPr id="44" name="Text 42"/>
-          <p:cNvSpPr/>
-          <p:nvPr/>
-        </p:nvSpPr>
-        <p:spPr>
-          <a:xfrm>
-            <a:off x="3942207" y="4169664"/>
-            <a:ext cx="685800" cy="384048"/>
-          </a:xfrm>
-          <a:prstGeom prst="rect">
-            <a:avLst/>
-          </a:prstGeom>
-          <a:noFill/>
-          <a:ln/>
-        </p:spPr>
-        <p:txBody>
-          <a:bodyPr wrap="square" lIns="0" tIns="0" rIns="0" bIns="0" rtlCol="0" anchor="ctr"/>
-          <a:lstStyle/>
-          <a:p>
-            <a:pPr algn="ctr" indent="0" marL="0">
-              <a:buNone/>
-            </a:pPr>
-            <a:r>
-              <a:rPr lang="en-US" sz="900" b="1" dirty="0">
-                <a:solidFill>
-                  <a:srgbClr val="9D174D"/>
-                </a:solidFill>
-                <a:latin typeface="Trebuchet MS" pitchFamily="34" charset="0"/>
-                <a:ea typeface="Trebuchet MS" pitchFamily="34" charset="-122"/>
-                <a:cs typeface="Trebuchet MS" pitchFamily="34" charset="-120"/>
-              </a:rPr>
-              <a:t>c</a:t>
-            </a:r>
-            <a:endParaRPr lang="en-US" sz="900" dirty="0"/>
-          </a:p>
-        </p:txBody>
-      </p:sp>
-      <p:sp>
-        <p:nvSpPr>
-          <p:cNvPr id="45" name="Text 43"/>
-          <p:cNvSpPr/>
-          <p:nvPr/>
-        </p:nvSpPr>
-        <p:spPr>
-          <a:xfrm>
-            <a:off x="3942207" y="4572000"/>
-            <a:ext cx="685800" cy="219456"/>
-          </a:xfrm>
-          <a:prstGeom prst="rect">
-            <a:avLst/>
-          </a:prstGeom>
-          <a:noFill/>
-          <a:ln/>
-        </p:spPr>
-        <p:txBody>
-          <a:bodyPr wrap="square" lIns="0" tIns="0" rIns="0" bIns="0" rtlCol="0" anchor="t"/>
-          <a:lstStyle/>
-          <a:p>
-            <a:pPr algn="ctr" indent="0" marL="0">
-              <a:buNone/>
-            </a:pPr>
-            <a:r>
-              <a:rPr lang="en-US" sz="750" i="1" dirty="0">
-                <a:solidFill>
-                  <a:srgbClr val="94A3B8"/>
-                </a:solidFill>
-                <a:latin typeface="Calibri" pitchFamily="34" charset="0"/>
-                <a:ea typeface="Calibri" pitchFamily="34" charset="-122"/>
-                <a:cs typeface="Calibri" pitchFamily="34" charset="-120"/>
-              </a:rPr>
-              <a:t>/k/</a:t>
-            </a:r>
-            <a:endParaRPr lang="en-US" sz="750" dirty="0"/>
-          </a:p>
-        </p:txBody>
-      </p:sp>
-      <p:sp>
-        <p:nvSpPr>
-          <p:cNvPr id="46" name="Shape 44"/>
-          <p:cNvSpPr/>
-          <p:nvPr/>
-        </p:nvSpPr>
-        <p:spPr>
-          <a:xfrm>
-            <a:off x="4850892" y="4169664"/>
-            <a:ext cx="685800" cy="384048"/>
-          </a:xfrm>
-          <a:prstGeom prst="rect">
-            <a:avLst>
-              <a:gd name="adj" fmla="val 9524"/>
-            </a:avLst>
-          </a:prstGeom>
-          <a:solidFill>
-            <a:srgbClr val="FFFFFF"/>
-          </a:solidFill>
-          <a:ln w="12700">
-            <a:solidFill>
-              <a:srgbClr val="DB2777"/>
-            </a:solidFill>
-            <a:prstDash val="solid"/>
-          </a:ln>
-        </p:spPr>
-      </p:sp>
-      <p:sp>
-        <p:nvSpPr>
-          <p:cNvPr id="47" name="Text 45"/>
-          <p:cNvSpPr/>
-          <p:nvPr/>
-        </p:nvSpPr>
-        <p:spPr>
-          <a:xfrm>
-            <a:off x="4850892" y="4169664"/>
-            <a:ext cx="685800" cy="384048"/>
-          </a:xfrm>
-          <a:prstGeom prst="rect">
-            <a:avLst/>
-          </a:prstGeom>
-          <a:noFill/>
-          <a:ln/>
-        </p:spPr>
-        <p:txBody>
-          <a:bodyPr wrap="square" lIns="0" tIns="0" rIns="0" bIns="0" rtlCol="0" anchor="ctr"/>
-          <a:lstStyle/>
-          <a:p>
-            <a:pPr algn="ctr" indent="0" marL="0">
-              <a:buNone/>
-            </a:pPr>
-            <a:r>
-              <a:rPr lang="en-US" sz="900" b="1" dirty="0">
-                <a:solidFill>
-                  <a:srgbClr val="9D174D"/>
-                </a:solidFill>
-                <a:latin typeface="Trebuchet MS" pitchFamily="34" charset="0"/>
-                <a:ea typeface="Trebuchet MS" pitchFamily="34" charset="-122"/>
-                <a:cs typeface="Trebuchet MS" pitchFamily="34" charset="-120"/>
-              </a:rPr>
               <a:t>t</a:t>
-            </a:r>
-            <a:endParaRPr lang="en-US" sz="900" dirty="0"/>
-          </a:p>
-        </p:txBody>
-      </p:sp>
-      <p:sp>
-        <p:nvSpPr>
-          <p:cNvPr id="48" name="Shape 46"/>
-          <p:cNvSpPr/>
-          <p:nvPr/>
-        </p:nvSpPr>
-        <p:spPr>
-          <a:xfrm>
-            <a:off x="5759577" y="4169664"/>
-            <a:ext cx="685800" cy="384048"/>
-          </a:xfrm>
-          <a:prstGeom prst="rect">
-            <a:avLst>
-              <a:gd name="adj" fmla="val 9524"/>
-            </a:avLst>
-          </a:prstGeom>
-          <a:solidFill>
-            <a:srgbClr val="FFFFFF"/>
-          </a:solidFill>
-          <a:ln w="12700">
-            <a:solidFill>
-              <a:srgbClr val="DB2777"/>
-            </a:solidFill>
-            <a:prstDash val="solid"/>
-          </a:ln>
-        </p:spPr>
-      </p:sp>
-      <p:sp>
-        <p:nvSpPr>
-          <p:cNvPr id="49" name="Text 47"/>
-          <p:cNvSpPr/>
-          <p:nvPr/>
-        </p:nvSpPr>
-        <p:spPr>
-          <a:xfrm>
-            <a:off x="5759577" y="4169664"/>
-            <a:ext cx="685800" cy="384048"/>
-          </a:xfrm>
-          <a:prstGeom prst="rect">
-            <a:avLst/>
-          </a:prstGeom>
-          <a:noFill/>
-          <a:ln/>
-        </p:spPr>
-        <p:txBody>
-          <a:bodyPr wrap="square" lIns="0" tIns="0" rIns="0" bIns="0" rtlCol="0" anchor="ctr"/>
-          <a:lstStyle/>
-          <a:p>
-            <a:pPr algn="ctr" indent="0" marL="0">
-              <a:buNone/>
-            </a:pPr>
-            <a:r>
-              <a:rPr lang="en-US" sz="900" b="1" dirty="0">
-                <a:solidFill>
-                  <a:srgbClr val="9D174D"/>
-                </a:solidFill>
-                <a:latin typeface="Trebuchet MS" pitchFamily="34" charset="0"/>
-                <a:ea typeface="Trebuchet MS" pitchFamily="34" charset="-122"/>
-                <a:cs typeface="Trebuchet MS" pitchFamily="34" charset="-120"/>
-              </a:rPr>
-              <a:t>a</a:t>
-            </a:r>
-            <a:endParaRPr lang="en-US" sz="900" dirty="0"/>
-          </a:p>
-        </p:txBody>
-      </p:sp>
-      <p:sp>
-        <p:nvSpPr>
-          <p:cNvPr id="50" name="Shape 48"/>
-          <p:cNvSpPr/>
-          <p:nvPr/>
-        </p:nvSpPr>
-        <p:spPr>
-          <a:xfrm>
-            <a:off x="6668262" y="4169664"/>
-            <a:ext cx="685800" cy="384048"/>
-          </a:xfrm>
-          <a:prstGeom prst="rect">
-            <a:avLst>
-              <a:gd name="adj" fmla="val 9524"/>
-            </a:avLst>
-          </a:prstGeom>
-          <a:solidFill>
-            <a:srgbClr val="FFFFFF"/>
-          </a:solidFill>
-          <a:ln w="12700">
-            <a:solidFill>
-              <a:srgbClr val="DB2777"/>
-            </a:solidFill>
-            <a:prstDash val="solid"/>
-          </a:ln>
-        </p:spPr>
-      </p:sp>
-      <p:sp>
-        <p:nvSpPr>
-          <p:cNvPr id="51" name="Text 49"/>
-          <p:cNvSpPr/>
-          <p:nvPr/>
-        </p:nvSpPr>
-        <p:spPr>
-          <a:xfrm>
-            <a:off x="6668262" y="4169664"/>
-            <a:ext cx="685800" cy="384048"/>
-          </a:xfrm>
-          <a:prstGeom prst="rect">
-            <a:avLst/>
-          </a:prstGeom>
-          <a:noFill/>
-          <a:ln/>
-        </p:spPr>
-        <p:txBody>
-          <a:bodyPr wrap="square" lIns="0" tIns="0" rIns="0" bIns="0" rtlCol="0" anchor="ctr"/>
-          <a:lstStyle/>
-          <a:p>
-            <a:pPr algn="ctr" indent="0" marL="0">
-              <a:buNone/>
-            </a:pPr>
-            <a:r>
-              <a:rPr lang="en-US" sz="900" b="1" dirty="0">
-                <a:solidFill>
-                  <a:srgbClr val="9D174D"/>
-                </a:solidFill>
-                <a:latin typeface="Trebuchet MS" pitchFamily="34" charset="0"/>
-                <a:ea typeface="Trebuchet MS" pitchFamily="34" charset="-122"/>
-                <a:cs typeface="Trebuchet MS" pitchFamily="34" charset="-120"/>
-              </a:rPr>
-              <a:t>t</a:t>
-            </a:r>
-            <a:endParaRPr lang="en-US" sz="900" dirty="0"/>
-          </a:p>
-        </p:txBody>
-      </p:sp>
-      <p:sp>
-        <p:nvSpPr>
-          <p:cNvPr id="52" name="Shape 50"/>
-          <p:cNvSpPr/>
-          <p:nvPr/>
-        </p:nvSpPr>
-        <p:spPr>
-          <a:xfrm>
-            <a:off x="7576947" y="4169664"/>
-            <a:ext cx="685800" cy="384048"/>
-          </a:xfrm>
-          <a:prstGeom prst="rect">
-            <a:avLst>
-              <a:gd name="adj" fmla="val 9524"/>
-            </a:avLst>
-          </a:prstGeom>
-          <a:solidFill>
-            <a:srgbClr val="FFFFFF"/>
-          </a:solidFill>
-          <a:ln w="12700">
-            <a:solidFill>
-              <a:srgbClr val="DB2777"/>
-            </a:solidFill>
-            <a:prstDash val="solid"/>
-          </a:ln>
-        </p:spPr>
-      </p:sp>
-      <p:sp>
-        <p:nvSpPr>
-          <p:cNvPr id="53" name="Text 51"/>
-          <p:cNvSpPr/>
-          <p:nvPr/>
-        </p:nvSpPr>
-        <p:spPr>
-          <a:xfrm>
-            <a:off x="7576947" y="4169664"/>
-            <a:ext cx="685800" cy="384048"/>
-          </a:xfrm>
-          <a:prstGeom prst="rect">
-            <a:avLst/>
-          </a:prstGeom>
-          <a:noFill/>
-          <a:ln/>
-        </p:spPr>
-        <p:txBody>
-          <a:bodyPr wrap="square" lIns="0" tIns="0" rIns="0" bIns="0" rtlCol="0" anchor="ctr"/>
-          <a:lstStyle/>
-          <a:p>
-            <a:pPr algn="ctr" indent="0" marL="0">
-              <a:buNone/>
-            </a:pPr>
-            <a:r>
-              <a:rPr lang="en-US" sz="900" b="1" dirty="0">
-                <a:solidFill>
-                  <a:srgbClr val="9D174D"/>
-                </a:solidFill>
-                <a:latin typeface="Trebuchet MS" pitchFamily="34" charset="0"/>
-                <a:ea typeface="Trebuchet MS" pitchFamily="34" charset="-122"/>
-                <a:cs typeface="Trebuchet MS" pitchFamily="34" charset="-120"/>
-              </a:rPr>
-              <a:t>or</a:t>
             </a:r>
             <a:endParaRPr lang="en-US" sz="900" dirty="0"/>
           </a:p>
@@ -22993,7 +22993,7 @@
                 <a:ea typeface="Trebuchet MS" pitchFamily="34" charset="-122"/>
                 <a:cs typeface="Trebuchet MS" pitchFamily="34" charset="-120"/>
               </a:rPr>
-              <a:t>contradict</a:t>
+              <a:t>contradiction</a:t>
             </a:r>
             <a:endParaRPr lang="en-US" sz="2800" dirty="0"/>
           </a:p>
@@ -23820,7 +23820,7 @@
                 <a:ea typeface="Trebuchet MS" pitchFamily="34" charset="-122"/>
                 <a:cs typeface="Trebuchet MS" pitchFamily="34" charset="-120"/>
               </a:rPr>
-              <a:t>contradict</a:t>
+              <a:t>contradiction</a:t>
             </a:r>
             <a:endParaRPr lang="en-US" sz="2800" dirty="0"/>
           </a:p>
@@ -23900,7 +23900,7 @@
         </p:nvSpPr>
         <p:spPr>
           <a:xfrm>
-            <a:off x="2938272" y="2258568"/>
+            <a:off x="2221992" y="2258568"/>
             <a:ext cx="1828800" cy="292608"/>
           </a:xfrm>
           <a:prstGeom prst="rect">
@@ -23934,7 +23934,7 @@
         </p:nvSpPr>
         <p:spPr>
           <a:xfrm>
-            <a:off x="2938272" y="2258568"/>
+            <a:off x="2221992" y="2258568"/>
             <a:ext cx="1828800" cy="292608"/>
           </a:xfrm>
           <a:prstGeom prst="rect">
@@ -23973,7 +23973,7 @@
         </p:nvSpPr>
         <p:spPr>
           <a:xfrm>
-            <a:off x="2938272" y="2569464"/>
+            <a:off x="2221992" y="2569464"/>
             <a:ext cx="1828800" cy="201168"/>
           </a:xfrm>
           <a:prstGeom prst="rect">
@@ -24012,7 +24012,7 @@
         </p:nvSpPr>
         <p:spPr>
           <a:xfrm>
-            <a:off x="5803392" y="2258568"/>
+            <a:off x="4370832" y="2258568"/>
             <a:ext cx="1828800" cy="292608"/>
           </a:xfrm>
           <a:prstGeom prst="rect">
@@ -24046,7 +24046,7 @@
         </p:nvSpPr>
         <p:spPr>
           <a:xfrm>
-            <a:off x="5803392" y="2258568"/>
+            <a:off x="4370832" y="2258568"/>
             <a:ext cx="1828800" cy="292608"/>
           </a:xfrm>
           <a:prstGeom prst="rect">
@@ -24085,7 +24085,7 @@
         </p:nvSpPr>
         <p:spPr>
           <a:xfrm>
-            <a:off x="5803392" y="2569464"/>
+            <a:off x="4370832" y="2569464"/>
             <a:ext cx="1828800" cy="201168"/>
           </a:xfrm>
           <a:prstGeom prst="rect">
@@ -24124,6 +24124,118 @@
         </p:nvSpPr>
         <p:spPr>
           <a:xfrm>
+            <a:off x="6519672" y="2258568"/>
+            <a:ext cx="1828800" cy="292608"/>
+          </a:xfrm>
+          <a:prstGeom prst="rect">
+            <a:avLst>
+              <a:gd name="adj" fmla="val 25000"/>
+            </a:avLst>
+          </a:prstGeom>
+          <a:solidFill>
+            <a:srgbClr val="FCE7F3"/>
+          </a:solidFill>
+          <a:ln w="19050">
+            <a:solidFill>
+              <a:srgbClr val="DB2777"/>
+            </a:solidFill>
+            <a:prstDash val="solid"/>
+          </a:ln>
+          <a:effectLst>
+            <a:outerShdw sx="100000" sy="100000" kx="0" ky="0" algn="bl" rotWithShape="0" blurRad="101600" dist="38100" dir="8100000">
+              <a:srgbClr val="000000">
+                <a:alpha val="12000"/>
+              </a:srgbClr>
+            </a:outerShdw>
+          </a:effectLst>
+        </p:spPr>
+      </p:sp>
+      <p:sp>
+        <p:nvSpPr>
+          <p:cNvPr id="23" name="Text 21"/>
+          <p:cNvSpPr/>
+          <p:nvPr/>
+        </p:nvSpPr>
+        <p:spPr>
+          <a:xfrm>
+            <a:off x="6519672" y="2258568"/>
+            <a:ext cx="1828800" cy="292608"/>
+          </a:xfrm>
+          <a:prstGeom prst="rect">
+            <a:avLst/>
+          </a:prstGeom>
+          <a:noFill/>
+          <a:ln/>
+        </p:spPr>
+        <p:txBody>
+          <a:bodyPr wrap="square" lIns="0" tIns="0" rIns="0" bIns="0" rtlCol="0" anchor="ctr"/>
+          <a:lstStyle/>
+          <a:p>
+            <a:pPr algn="ctr" indent="0" marL="0">
+              <a:buNone/>
+            </a:pPr>
+            <a:r>
+              <a:rPr lang="en-US" sz="1300" b="1" dirty="0">
+                <a:solidFill>
+                  <a:srgbClr val="9D174D"/>
+                </a:solidFill>
+                <a:latin typeface="Trebuchet MS" pitchFamily="34" charset="0"/>
+                <a:ea typeface="Trebuchet MS" pitchFamily="34" charset="-122"/>
+                <a:cs typeface="Trebuchet MS" pitchFamily="34" charset="-120"/>
+              </a:rPr>
+              <a:t>ion</a:t>
+            </a:r>
+            <a:endParaRPr lang="en-US" sz="1300" dirty="0"/>
+          </a:p>
+        </p:txBody>
+      </p:sp>
+      <p:sp>
+        <p:nvSpPr>
+          <p:cNvPr id="24" name="Text 22"/>
+          <p:cNvSpPr/>
+          <p:nvPr/>
+        </p:nvSpPr>
+        <p:spPr>
+          <a:xfrm>
+            <a:off x="6519672" y="2569464"/>
+            <a:ext cx="1828800" cy="201168"/>
+          </a:xfrm>
+          <a:prstGeom prst="rect">
+            <a:avLst/>
+          </a:prstGeom>
+          <a:noFill/>
+          <a:ln/>
+        </p:spPr>
+        <p:txBody>
+          <a:bodyPr wrap="square" lIns="0" tIns="0" rIns="0" bIns="0" rtlCol="0" anchor="t"/>
+          <a:lstStyle/>
+          <a:p>
+            <a:pPr algn="ctr" indent="0" marL="0">
+              <a:buNone/>
+            </a:pPr>
+            <a:r>
+              <a:rPr lang="en-US" sz="850" dirty="0">
+                <a:solidFill>
+                  <a:srgbClr val="475569"/>
+                </a:solidFill>
+                <a:latin typeface="Calibri" pitchFamily="34" charset="0"/>
+                <a:ea typeface="Calibri" pitchFamily="34" charset="-122"/>
+                <a:cs typeface="Calibri" pitchFamily="34" charset="-120"/>
+              </a:rPr>
+              <a:t>act or result of</a:t>
+            </a:r>
+            <a:endParaRPr lang="en-US" sz="850" dirty="0"/>
+          </a:p>
+        </p:txBody>
+      </p:sp>
+      <p:sp>
+        <p:nvSpPr>
+          <p:cNvPr id="25" name="Shape 23"/>
+          <p:cNvSpPr/>
+          <p:nvPr/>
+        </p:nvSpPr>
+        <p:spPr>
+          <a:xfrm>
             <a:off x="365760" y="3273552"/>
             <a:ext cx="1371600" cy="658368"/>
           </a:xfrm>
@@ -24145,7 +24257,7 @@
       </p:sp>
       <p:sp>
         <p:nvSpPr>
-          <p:cNvPr id="23" name="Text 21"/>
+          <p:cNvPr id="26" name="Text 24"/>
           <p:cNvSpPr/>
           <p:nvPr/>
         </p:nvSpPr>
@@ -24184,7 +24296,7 @@
       </p:sp>
       <p:sp>
         <p:nvSpPr>
-          <p:cNvPr id="24" name="Shape 22"/>
+          <p:cNvPr id="27" name="Shape 25"/>
           <p:cNvSpPr/>
           <p:nvPr/>
         </p:nvSpPr>
@@ -24211,7 +24323,7 @@
       </p:sp>
       <p:sp>
         <p:nvSpPr>
-          <p:cNvPr id="25" name="Text 23"/>
+          <p:cNvPr id="28" name="Text 26"/>
           <p:cNvSpPr/>
           <p:nvPr/>
         </p:nvSpPr>
@@ -24250,7 +24362,7 @@
       </p:sp>
       <p:sp>
         <p:nvSpPr>
-          <p:cNvPr id="26" name="Shape 24"/>
+          <p:cNvPr id="29" name="Shape 27"/>
           <p:cNvSpPr/>
           <p:nvPr/>
         </p:nvSpPr>
@@ -24277,7 +24389,7 @@
       </p:sp>
       <p:sp>
         <p:nvSpPr>
-          <p:cNvPr id="27" name="Text 25"/>
+          <p:cNvPr id="30" name="Text 28"/>
           <p:cNvSpPr/>
           <p:nvPr/>
         </p:nvSpPr>
@@ -24316,7 +24428,7 @@
       </p:sp>
       <p:sp>
         <p:nvSpPr>
-          <p:cNvPr id="28" name="Shape 26"/>
+          <p:cNvPr id="31" name="Shape 29"/>
           <p:cNvSpPr/>
           <p:nvPr/>
         </p:nvSpPr>
@@ -24343,7 +24455,7 @@
       </p:sp>
       <p:sp>
         <p:nvSpPr>
-          <p:cNvPr id="29" name="Text 27"/>
+          <p:cNvPr id="32" name="Text 30"/>
           <p:cNvSpPr/>
           <p:nvPr/>
         </p:nvSpPr>
@@ -25524,7 +25636,7 @@
                 <a:ea typeface="Trebuchet MS" pitchFamily="34" charset="-122"/>
                 <a:cs typeface="Trebuchet MS" pitchFamily="34" charset="-120"/>
               </a:rPr>
-              <a:t>contradict</a:t>
+              <a:t>contradiction</a:t>
             </a:r>
             <a:endParaRPr lang="en-US" sz="2800" dirty="0"/>
           </a:p>
@@ -25604,7 +25716,7 @@
         </p:nvSpPr>
         <p:spPr>
           <a:xfrm>
-            <a:off x="2938272" y="2258568"/>
+            <a:off x="2221992" y="2258568"/>
             <a:ext cx="1828800" cy="292608"/>
           </a:xfrm>
           <a:prstGeom prst="rect">
@@ -25638,7 +25750,7 @@
         </p:nvSpPr>
         <p:spPr>
           <a:xfrm>
-            <a:off x="2938272" y="2258568"/>
+            <a:off x="2221992" y="2258568"/>
             <a:ext cx="1828800" cy="292608"/>
           </a:xfrm>
           <a:prstGeom prst="rect">
@@ -25677,7 +25789,7 @@
         </p:nvSpPr>
         <p:spPr>
           <a:xfrm>
-            <a:off x="2938272" y="2569464"/>
+            <a:off x="2221992" y="2569464"/>
             <a:ext cx="1828800" cy="201168"/>
           </a:xfrm>
           <a:prstGeom prst="rect">
@@ -25716,7 +25828,7 @@
         </p:nvSpPr>
         <p:spPr>
           <a:xfrm>
-            <a:off x="5803392" y="2258568"/>
+            <a:off x="4370832" y="2258568"/>
             <a:ext cx="1828800" cy="292608"/>
           </a:xfrm>
           <a:prstGeom prst="rect">
@@ -25750,7 +25862,7 @@
         </p:nvSpPr>
         <p:spPr>
           <a:xfrm>
-            <a:off x="5803392" y="2258568"/>
+            <a:off x="4370832" y="2258568"/>
             <a:ext cx="1828800" cy="292608"/>
           </a:xfrm>
           <a:prstGeom prst="rect">
@@ -25789,7 +25901,7 @@
         </p:nvSpPr>
         <p:spPr>
           <a:xfrm>
-            <a:off x="5803392" y="2569464"/>
+            <a:off x="4370832" y="2569464"/>
             <a:ext cx="1828800" cy="201168"/>
           </a:xfrm>
           <a:prstGeom prst="rect">
@@ -25828,6 +25940,118 @@
         </p:nvSpPr>
         <p:spPr>
           <a:xfrm>
+            <a:off x="6519672" y="2258568"/>
+            <a:ext cx="1828800" cy="292608"/>
+          </a:xfrm>
+          <a:prstGeom prst="rect">
+            <a:avLst>
+              <a:gd name="adj" fmla="val 25000"/>
+            </a:avLst>
+          </a:prstGeom>
+          <a:solidFill>
+            <a:srgbClr val="FCE7F3"/>
+          </a:solidFill>
+          <a:ln w="19050">
+            <a:solidFill>
+              <a:srgbClr val="DB2777"/>
+            </a:solidFill>
+            <a:prstDash val="solid"/>
+          </a:ln>
+          <a:effectLst>
+            <a:outerShdw sx="100000" sy="100000" kx="0" ky="0" algn="bl" rotWithShape="0" blurRad="101600" dist="38100" dir="8100000">
+              <a:srgbClr val="000000">
+                <a:alpha val="12000"/>
+              </a:srgbClr>
+            </a:outerShdw>
+          </a:effectLst>
+        </p:spPr>
+      </p:sp>
+      <p:sp>
+        <p:nvSpPr>
+          <p:cNvPr id="23" name="Text 21"/>
+          <p:cNvSpPr/>
+          <p:nvPr/>
+        </p:nvSpPr>
+        <p:spPr>
+          <a:xfrm>
+            <a:off x="6519672" y="2258568"/>
+            <a:ext cx="1828800" cy="292608"/>
+          </a:xfrm>
+          <a:prstGeom prst="rect">
+            <a:avLst/>
+          </a:prstGeom>
+          <a:noFill/>
+          <a:ln/>
+        </p:spPr>
+        <p:txBody>
+          <a:bodyPr wrap="square" lIns="0" tIns="0" rIns="0" bIns="0" rtlCol="0" anchor="ctr"/>
+          <a:lstStyle/>
+          <a:p>
+            <a:pPr algn="ctr" indent="0" marL="0">
+              <a:buNone/>
+            </a:pPr>
+            <a:r>
+              <a:rPr lang="en-US" sz="1300" b="1" dirty="0">
+                <a:solidFill>
+                  <a:srgbClr val="9D174D"/>
+                </a:solidFill>
+                <a:latin typeface="Trebuchet MS" pitchFamily="34" charset="0"/>
+                <a:ea typeface="Trebuchet MS" pitchFamily="34" charset="-122"/>
+                <a:cs typeface="Trebuchet MS" pitchFamily="34" charset="-120"/>
+              </a:rPr>
+              <a:t>ion</a:t>
+            </a:r>
+            <a:endParaRPr lang="en-US" sz="1300" dirty="0"/>
+          </a:p>
+        </p:txBody>
+      </p:sp>
+      <p:sp>
+        <p:nvSpPr>
+          <p:cNvPr id="24" name="Text 22"/>
+          <p:cNvSpPr/>
+          <p:nvPr/>
+        </p:nvSpPr>
+        <p:spPr>
+          <a:xfrm>
+            <a:off x="6519672" y="2569464"/>
+            <a:ext cx="1828800" cy="201168"/>
+          </a:xfrm>
+          <a:prstGeom prst="rect">
+            <a:avLst/>
+          </a:prstGeom>
+          <a:noFill/>
+          <a:ln/>
+        </p:spPr>
+        <p:txBody>
+          <a:bodyPr wrap="square" lIns="0" tIns="0" rIns="0" bIns="0" rtlCol="0" anchor="t"/>
+          <a:lstStyle/>
+          <a:p>
+            <a:pPr algn="ctr" indent="0" marL="0">
+              <a:buNone/>
+            </a:pPr>
+            <a:r>
+              <a:rPr lang="en-US" sz="850" dirty="0">
+                <a:solidFill>
+                  <a:srgbClr val="475569"/>
+                </a:solidFill>
+                <a:latin typeface="Calibri" pitchFamily="34" charset="0"/>
+                <a:ea typeface="Calibri" pitchFamily="34" charset="-122"/>
+                <a:cs typeface="Calibri" pitchFamily="34" charset="-120"/>
+              </a:rPr>
+              <a:t>act or result of</a:t>
+            </a:r>
+            <a:endParaRPr lang="en-US" sz="850" dirty="0"/>
+          </a:p>
+        </p:txBody>
+      </p:sp>
+      <p:sp>
+        <p:nvSpPr>
+          <p:cNvPr id="25" name="Shape 23"/>
+          <p:cNvSpPr/>
+          <p:nvPr/>
+        </p:nvSpPr>
+        <p:spPr>
+          <a:xfrm>
             <a:off x="365760" y="3273552"/>
             <a:ext cx="1371600" cy="658368"/>
           </a:xfrm>
@@ -25849,7 +26073,7 @@
       </p:sp>
       <p:sp>
         <p:nvSpPr>
-          <p:cNvPr id="23" name="Text 21"/>
+          <p:cNvPr id="26" name="Text 24"/>
           <p:cNvSpPr/>
           <p:nvPr/>
         </p:nvSpPr>
@@ -25888,7 +26112,7 @@
       </p:sp>
       <p:sp>
         <p:nvSpPr>
-          <p:cNvPr id="24" name="Shape 22"/>
+          <p:cNvPr id="27" name="Shape 25"/>
           <p:cNvSpPr/>
           <p:nvPr/>
         </p:nvSpPr>
@@ -25915,14 +26139,14 @@
       </p:sp>
       <p:sp>
         <p:nvSpPr>
-          <p:cNvPr id="25" name="Shape 23"/>
-          <p:cNvSpPr/>
-          <p:nvPr/>
-        </p:nvSpPr>
-        <p:spPr>
-          <a:xfrm>
-            <a:off x="2313432" y="3364992"/>
-            <a:ext cx="1645920" cy="475488"/>
+          <p:cNvPr id="28" name="Shape 26"/>
+          <p:cNvSpPr/>
+          <p:nvPr/>
+        </p:nvSpPr>
+        <p:spPr>
+          <a:xfrm>
+            <a:off x="1975104" y="3364992"/>
+            <a:ext cx="1554480" cy="475488"/>
           </a:xfrm>
           <a:prstGeom prst="rect">
             <a:avLst>
@@ -25942,14 +26166,14 @@
       </p:sp>
       <p:sp>
         <p:nvSpPr>
-          <p:cNvPr id="26" name="Text 24"/>
-          <p:cNvSpPr/>
-          <p:nvPr/>
-        </p:nvSpPr>
-        <p:spPr>
-          <a:xfrm>
-            <a:off x="2313432" y="3364992"/>
-            <a:ext cx="1645920" cy="475488"/>
+          <p:cNvPr id="29" name="Text 27"/>
+          <p:cNvSpPr/>
+          <p:nvPr/>
+        </p:nvSpPr>
+        <p:spPr>
+          <a:xfrm>
+            <a:off x="1975104" y="3364992"/>
+            <a:ext cx="1554480" cy="475488"/>
           </a:xfrm>
           <a:prstGeom prst="rect">
             <a:avLst/>
@@ -25981,14 +26205,14 @@
       </p:sp>
       <p:sp>
         <p:nvSpPr>
-          <p:cNvPr id="27" name="Text 25"/>
-          <p:cNvSpPr/>
-          <p:nvPr/>
-        </p:nvSpPr>
-        <p:spPr>
-          <a:xfrm>
-            <a:off x="3959352" y="3364992"/>
-            <a:ext cx="411480" cy="475488"/>
+          <p:cNvPr id="30" name="Text 28"/>
+          <p:cNvSpPr/>
+          <p:nvPr/>
+        </p:nvSpPr>
+        <p:spPr>
+          <a:xfrm>
+            <a:off x="3529584" y="3364992"/>
+            <a:ext cx="73152" cy="475488"/>
           </a:xfrm>
           <a:prstGeom prst="rect">
             <a:avLst/>
@@ -26020,14 +26244,14 @@
       </p:sp>
       <p:sp>
         <p:nvSpPr>
-          <p:cNvPr id="28" name="Shape 26"/>
-          <p:cNvSpPr/>
-          <p:nvPr/>
-        </p:nvSpPr>
-        <p:spPr>
-          <a:xfrm>
-            <a:off x="4370832" y="3364992"/>
-            <a:ext cx="1645920" cy="475488"/>
+          <p:cNvPr id="31" name="Shape 29"/>
+          <p:cNvSpPr/>
+          <p:nvPr/>
+        </p:nvSpPr>
+        <p:spPr>
+          <a:xfrm>
+            <a:off x="3602736" y="3364992"/>
+            <a:ext cx="1554480" cy="475488"/>
           </a:xfrm>
           <a:prstGeom prst="rect">
             <a:avLst>
@@ -26047,14 +26271,14 @@
       </p:sp>
       <p:sp>
         <p:nvSpPr>
-          <p:cNvPr id="29" name="Text 27"/>
-          <p:cNvSpPr/>
-          <p:nvPr/>
-        </p:nvSpPr>
-        <p:spPr>
-          <a:xfrm>
-            <a:off x="4370832" y="3364992"/>
-            <a:ext cx="1645920" cy="475488"/>
+          <p:cNvPr id="32" name="Text 30"/>
+          <p:cNvSpPr/>
+          <p:nvPr/>
+        </p:nvSpPr>
+        <p:spPr>
+          <a:xfrm>
+            <a:off x="3602736" y="3364992"/>
+            <a:ext cx="1554480" cy="475488"/>
           </a:xfrm>
           <a:prstGeom prst="rect">
             <a:avLst/>
@@ -26086,14 +26310,14 @@
       </p:sp>
       <p:sp>
         <p:nvSpPr>
-          <p:cNvPr id="30" name="Text 28"/>
-          <p:cNvSpPr/>
-          <p:nvPr/>
-        </p:nvSpPr>
-        <p:spPr>
-          <a:xfrm>
-            <a:off x="6016752" y="3364992"/>
-            <a:ext cx="411480" cy="475488"/>
+          <p:cNvPr id="33" name="Text 31"/>
+          <p:cNvSpPr/>
+          <p:nvPr/>
+        </p:nvSpPr>
+        <p:spPr>
+          <a:xfrm>
+            <a:off x="5157216" y="3364992"/>
+            <a:ext cx="73152" cy="475488"/>
           </a:xfrm>
           <a:prstGeom prst="rect">
             <a:avLst/>
@@ -26125,14 +26349,14 @@
       </p:sp>
       <p:sp>
         <p:nvSpPr>
-          <p:cNvPr id="31" name="Shape 29"/>
-          <p:cNvSpPr/>
-          <p:nvPr/>
-        </p:nvSpPr>
-        <p:spPr>
-          <a:xfrm>
-            <a:off x="6428232" y="3364992"/>
-            <a:ext cx="1645920" cy="475488"/>
+          <p:cNvPr id="34" name="Shape 32"/>
+          <p:cNvSpPr/>
+          <p:nvPr/>
+        </p:nvSpPr>
+        <p:spPr>
+          <a:xfrm>
+            <a:off x="5230368" y="3364992"/>
+            <a:ext cx="1554480" cy="475488"/>
           </a:xfrm>
           <a:prstGeom prst="rect">
             <a:avLst>
@@ -26152,14 +26376,14 @@
       </p:sp>
       <p:sp>
         <p:nvSpPr>
-          <p:cNvPr id="32" name="Text 30"/>
-          <p:cNvSpPr/>
-          <p:nvPr/>
-        </p:nvSpPr>
-        <p:spPr>
-          <a:xfrm>
-            <a:off x="6428232" y="3364992"/>
-            <a:ext cx="1645920" cy="475488"/>
+          <p:cNvPr id="35" name="Text 33"/>
+          <p:cNvSpPr/>
+          <p:nvPr/>
+        </p:nvSpPr>
+        <p:spPr>
+          <a:xfrm>
+            <a:off x="5230368" y="3364992"/>
+            <a:ext cx="1554480" cy="475488"/>
           </a:xfrm>
           <a:prstGeom prst="rect">
             <a:avLst/>
@@ -26183,7 +26407,7 @@
                 <a:ea typeface="Trebuchet MS" pitchFamily="34" charset="-122"/>
                 <a:cs typeface="Trebuchet MS" pitchFamily="34" charset="-120"/>
               </a:rPr>
-              <a:t>dict</a:t>
+              <a:t>dic</a:t>
             </a:r>
             <a:endParaRPr lang="en-US" sz="1400" dirty="0"/>
           </a:p>
@@ -26191,7 +26415,112 @@
       </p:sp>
       <p:sp>
         <p:nvSpPr>
-          <p:cNvPr id="33" name="Shape 31"/>
+          <p:cNvPr id="36" name="Text 34"/>
+          <p:cNvSpPr/>
+          <p:nvPr/>
+        </p:nvSpPr>
+        <p:spPr>
+          <a:xfrm>
+            <a:off x="6784848" y="3364992"/>
+            <a:ext cx="73152" cy="475488"/>
+          </a:xfrm>
+          <a:prstGeom prst="rect">
+            <a:avLst/>
+          </a:prstGeom>
+          <a:noFill/>
+          <a:ln/>
+        </p:spPr>
+        <p:txBody>
+          <a:bodyPr wrap="square" lIns="0" tIns="0" rIns="0" bIns="0" rtlCol="0" anchor="ctr"/>
+          <a:lstStyle/>
+          <a:p>
+            <a:pPr algn="ctr" indent="0" marL="0">
+              <a:buNone/>
+            </a:pPr>
+            <a:r>
+              <a:rPr lang="en-US" sz="1600" b="1" dirty="0">
+                <a:solidFill>
+                  <a:srgbClr val="0D9488"/>
+                </a:solidFill>
+                <a:latin typeface="Trebuchet MS" pitchFamily="34" charset="0"/>
+                <a:ea typeface="Trebuchet MS" pitchFamily="34" charset="-122"/>
+                <a:cs typeface="Trebuchet MS" pitchFamily="34" charset="-120"/>
+              </a:rPr>
+              <a:t>·</a:t>
+            </a:r>
+            <a:endParaRPr lang="en-US" sz="1600" dirty="0"/>
+          </a:p>
+        </p:txBody>
+      </p:sp>
+      <p:sp>
+        <p:nvSpPr>
+          <p:cNvPr id="37" name="Shape 35"/>
+          <p:cNvSpPr/>
+          <p:nvPr/>
+        </p:nvSpPr>
+        <p:spPr>
+          <a:xfrm>
+            <a:off x="6858000" y="3364992"/>
+            <a:ext cx="1554480" cy="475488"/>
+          </a:xfrm>
+          <a:prstGeom prst="rect">
+            <a:avLst>
+              <a:gd name="adj" fmla="val 9615"/>
+            </a:avLst>
+          </a:prstGeom>
+          <a:solidFill>
+            <a:srgbClr val="FFFFFF"/>
+          </a:solidFill>
+          <a:ln w="12700">
+            <a:solidFill>
+              <a:srgbClr val="0D9488"/>
+            </a:solidFill>
+            <a:prstDash val="solid"/>
+          </a:ln>
+        </p:spPr>
+      </p:sp>
+      <p:sp>
+        <p:nvSpPr>
+          <p:cNvPr id="38" name="Text 36"/>
+          <p:cNvSpPr/>
+          <p:nvPr/>
+        </p:nvSpPr>
+        <p:spPr>
+          <a:xfrm>
+            <a:off x="6858000" y="3364992"/>
+            <a:ext cx="1554480" cy="475488"/>
+          </a:xfrm>
+          <a:prstGeom prst="rect">
+            <a:avLst/>
+          </a:prstGeom>
+          <a:noFill/>
+          <a:ln/>
+        </p:spPr>
+        <p:txBody>
+          <a:bodyPr wrap="square" lIns="0" tIns="0" rIns="0" bIns="0" rtlCol="0" anchor="ctr"/>
+          <a:lstStyle/>
+          <a:p>
+            <a:pPr algn="ctr" indent="0" marL="0">
+              <a:buNone/>
+            </a:pPr>
+            <a:r>
+              <a:rPr lang="en-US" sz="1400" b="1" dirty="0">
+                <a:solidFill>
+                  <a:srgbClr val="0D9488"/>
+                </a:solidFill>
+                <a:latin typeface="Trebuchet MS" pitchFamily="34" charset="0"/>
+                <a:ea typeface="Trebuchet MS" pitchFamily="34" charset="-122"/>
+                <a:cs typeface="Trebuchet MS" pitchFamily="34" charset="-120"/>
+              </a:rPr>
+              <a:t>tion</a:t>
+            </a:r>
+            <a:endParaRPr lang="en-US" sz="1400" dirty="0"/>
+          </a:p>
+        </p:txBody>
+      </p:sp>
+      <p:sp>
+        <p:nvSpPr>
+          <p:cNvPr id="39" name="Shape 37"/>
           <p:cNvSpPr/>
           <p:nvPr/>
         </p:nvSpPr>
@@ -26218,7 +26547,7 @@
       </p:sp>
       <p:sp>
         <p:nvSpPr>
-          <p:cNvPr id="34" name="Text 32"/>
+          <p:cNvPr id="40" name="Text 38"/>
           <p:cNvSpPr/>
           <p:nvPr/>
         </p:nvSpPr>
@@ -26257,7 +26586,7 @@
       </p:sp>
       <p:sp>
         <p:nvSpPr>
-          <p:cNvPr id="35" name="Shape 33"/>
+          <p:cNvPr id="41" name="Shape 39"/>
           <p:cNvSpPr/>
           <p:nvPr/>
         </p:nvSpPr>
@@ -26284,7 +26613,7 @@
       </p:sp>
       <p:sp>
         <p:nvSpPr>
-          <p:cNvPr id="36" name="Text 34"/>
+          <p:cNvPr id="42" name="Text 40"/>
           <p:cNvSpPr/>
           <p:nvPr/>
         </p:nvSpPr>
@@ -26746,7 +27075,7 @@
                 <a:ea typeface="Trebuchet MS" pitchFamily="34" charset="-122"/>
                 <a:cs typeface="Trebuchet MS" pitchFamily="34" charset="-120"/>
               </a:rPr>
-              <a:t>contradict</a:t>
+              <a:t>contradiction</a:t>
             </a:r>
             <a:endParaRPr lang="en-US" sz="2800" dirty="0"/>
           </a:p>
@@ -26826,7 +27155,7 @@
         </p:nvSpPr>
         <p:spPr>
           <a:xfrm>
-            <a:off x="2938272" y="2258568"/>
+            <a:off x="2221992" y="2258568"/>
             <a:ext cx="1828800" cy="292608"/>
           </a:xfrm>
           <a:prstGeom prst="rect">
@@ -26860,7 +27189,7 @@
         </p:nvSpPr>
         <p:spPr>
           <a:xfrm>
-            <a:off x="2938272" y="2258568"/>
+            <a:off x="2221992" y="2258568"/>
             <a:ext cx="1828800" cy="292608"/>
           </a:xfrm>
           <a:prstGeom prst="rect">
@@ -26899,7 +27228,7 @@
         </p:nvSpPr>
         <p:spPr>
           <a:xfrm>
-            <a:off x="2938272" y="2569464"/>
+            <a:off x="2221992" y="2569464"/>
             <a:ext cx="1828800" cy="201168"/>
           </a:xfrm>
           <a:prstGeom prst="rect">
@@ -26938,7 +27267,7 @@
         </p:nvSpPr>
         <p:spPr>
           <a:xfrm>
-            <a:off x="5803392" y="2258568"/>
+            <a:off x="4370832" y="2258568"/>
             <a:ext cx="1828800" cy="292608"/>
           </a:xfrm>
           <a:prstGeom prst="rect">
@@ -26972,7 +27301,7 @@
         </p:nvSpPr>
         <p:spPr>
           <a:xfrm>
-            <a:off x="5803392" y="2258568"/>
+            <a:off x="4370832" y="2258568"/>
             <a:ext cx="1828800" cy="292608"/>
           </a:xfrm>
           <a:prstGeom prst="rect">
@@ -27011,7 +27340,7 @@
         </p:nvSpPr>
         <p:spPr>
           <a:xfrm>
-            <a:off x="5803392" y="2569464"/>
+            <a:off x="4370832" y="2569464"/>
             <a:ext cx="1828800" cy="201168"/>
           </a:xfrm>
           <a:prstGeom prst="rect">
@@ -27050,6 +27379,118 @@
         </p:nvSpPr>
         <p:spPr>
           <a:xfrm>
+            <a:off x="6519672" y="2258568"/>
+            <a:ext cx="1828800" cy="292608"/>
+          </a:xfrm>
+          <a:prstGeom prst="rect">
+            <a:avLst>
+              <a:gd name="adj" fmla="val 25000"/>
+            </a:avLst>
+          </a:prstGeom>
+          <a:solidFill>
+            <a:srgbClr val="FCE7F3"/>
+          </a:solidFill>
+          <a:ln w="19050">
+            <a:solidFill>
+              <a:srgbClr val="DB2777"/>
+            </a:solidFill>
+            <a:prstDash val="solid"/>
+          </a:ln>
+          <a:effectLst>
+            <a:outerShdw sx="100000" sy="100000" kx="0" ky="0" algn="bl" rotWithShape="0" blurRad="101600" dist="38100" dir="8100000">
+              <a:srgbClr val="000000">
+                <a:alpha val="12000"/>
+              </a:srgbClr>
+            </a:outerShdw>
+          </a:effectLst>
+        </p:spPr>
+      </p:sp>
+      <p:sp>
+        <p:nvSpPr>
+          <p:cNvPr id="23" name="Text 21"/>
+          <p:cNvSpPr/>
+          <p:nvPr/>
+        </p:nvSpPr>
+        <p:spPr>
+          <a:xfrm>
+            <a:off x="6519672" y="2258568"/>
+            <a:ext cx="1828800" cy="292608"/>
+          </a:xfrm>
+          <a:prstGeom prst="rect">
+            <a:avLst/>
+          </a:prstGeom>
+          <a:noFill/>
+          <a:ln/>
+        </p:spPr>
+        <p:txBody>
+          <a:bodyPr wrap="square" lIns="0" tIns="0" rIns="0" bIns="0" rtlCol="0" anchor="ctr"/>
+          <a:lstStyle/>
+          <a:p>
+            <a:pPr algn="ctr" indent="0" marL="0">
+              <a:buNone/>
+            </a:pPr>
+            <a:r>
+              <a:rPr lang="en-US" sz="1300" b="1" dirty="0">
+                <a:solidFill>
+                  <a:srgbClr val="9D174D"/>
+                </a:solidFill>
+                <a:latin typeface="Trebuchet MS" pitchFamily="34" charset="0"/>
+                <a:ea typeface="Trebuchet MS" pitchFamily="34" charset="-122"/>
+                <a:cs typeface="Trebuchet MS" pitchFamily="34" charset="-120"/>
+              </a:rPr>
+              <a:t>ion</a:t>
+            </a:r>
+            <a:endParaRPr lang="en-US" sz="1300" dirty="0"/>
+          </a:p>
+        </p:txBody>
+      </p:sp>
+      <p:sp>
+        <p:nvSpPr>
+          <p:cNvPr id="24" name="Text 22"/>
+          <p:cNvSpPr/>
+          <p:nvPr/>
+        </p:nvSpPr>
+        <p:spPr>
+          <a:xfrm>
+            <a:off x="6519672" y="2569464"/>
+            <a:ext cx="1828800" cy="201168"/>
+          </a:xfrm>
+          <a:prstGeom prst="rect">
+            <a:avLst/>
+          </a:prstGeom>
+          <a:noFill/>
+          <a:ln/>
+        </p:spPr>
+        <p:txBody>
+          <a:bodyPr wrap="square" lIns="0" tIns="0" rIns="0" bIns="0" rtlCol="0" anchor="t"/>
+          <a:lstStyle/>
+          <a:p>
+            <a:pPr algn="ctr" indent="0" marL="0">
+              <a:buNone/>
+            </a:pPr>
+            <a:r>
+              <a:rPr lang="en-US" sz="850" dirty="0">
+                <a:solidFill>
+                  <a:srgbClr val="475569"/>
+                </a:solidFill>
+                <a:latin typeface="Calibri" pitchFamily="34" charset="0"/>
+                <a:ea typeface="Calibri" pitchFamily="34" charset="-122"/>
+                <a:cs typeface="Calibri" pitchFamily="34" charset="-120"/>
+              </a:rPr>
+              <a:t>act or result of</a:t>
+            </a:r>
+            <a:endParaRPr lang="en-US" sz="850" dirty="0"/>
+          </a:p>
+        </p:txBody>
+      </p:sp>
+      <p:sp>
+        <p:nvSpPr>
+          <p:cNvPr id="25" name="Shape 23"/>
+          <p:cNvSpPr/>
+          <p:nvPr/>
+        </p:nvSpPr>
+        <p:spPr>
+          <a:xfrm>
             <a:off x="365760" y="3273552"/>
             <a:ext cx="1371600" cy="658368"/>
           </a:xfrm>
@@ -27071,7 +27512,7 @@
       </p:sp>
       <p:sp>
         <p:nvSpPr>
-          <p:cNvPr id="23" name="Text 21"/>
+          <p:cNvPr id="26" name="Text 24"/>
           <p:cNvSpPr/>
           <p:nvPr/>
         </p:nvSpPr>
@@ -27110,7 +27551,7 @@
       </p:sp>
       <p:sp>
         <p:nvSpPr>
-          <p:cNvPr id="24" name="Shape 22"/>
+          <p:cNvPr id="27" name="Shape 25"/>
           <p:cNvSpPr/>
           <p:nvPr/>
         </p:nvSpPr>
@@ -27137,14 +27578,14 @@
       </p:sp>
       <p:sp>
         <p:nvSpPr>
-          <p:cNvPr id="25" name="Shape 23"/>
-          <p:cNvSpPr/>
-          <p:nvPr/>
-        </p:nvSpPr>
-        <p:spPr>
-          <a:xfrm>
-            <a:off x="2313432" y="3364992"/>
-            <a:ext cx="1645920" cy="475488"/>
+          <p:cNvPr id="28" name="Shape 26"/>
+          <p:cNvSpPr/>
+          <p:nvPr/>
+        </p:nvSpPr>
+        <p:spPr>
+          <a:xfrm>
+            <a:off x="1975104" y="3364992"/>
+            <a:ext cx="1554480" cy="475488"/>
           </a:xfrm>
           <a:prstGeom prst="rect">
             <a:avLst>
@@ -27164,14 +27605,14 @@
       </p:sp>
       <p:sp>
         <p:nvSpPr>
-          <p:cNvPr id="26" name="Text 24"/>
-          <p:cNvSpPr/>
-          <p:nvPr/>
-        </p:nvSpPr>
-        <p:spPr>
-          <a:xfrm>
-            <a:off x="2313432" y="3364992"/>
-            <a:ext cx="1645920" cy="475488"/>
+          <p:cNvPr id="29" name="Text 27"/>
+          <p:cNvSpPr/>
+          <p:nvPr/>
+        </p:nvSpPr>
+        <p:spPr>
+          <a:xfrm>
+            <a:off x="1975104" y="3364992"/>
+            <a:ext cx="1554480" cy="475488"/>
           </a:xfrm>
           <a:prstGeom prst="rect">
             <a:avLst/>
@@ -27203,14 +27644,14 @@
       </p:sp>
       <p:sp>
         <p:nvSpPr>
-          <p:cNvPr id="27" name="Text 25"/>
-          <p:cNvSpPr/>
-          <p:nvPr/>
-        </p:nvSpPr>
-        <p:spPr>
-          <a:xfrm>
-            <a:off x="3959352" y="3364992"/>
-            <a:ext cx="411480" cy="475488"/>
+          <p:cNvPr id="30" name="Text 28"/>
+          <p:cNvSpPr/>
+          <p:nvPr/>
+        </p:nvSpPr>
+        <p:spPr>
+          <a:xfrm>
+            <a:off x="3529584" y="3364992"/>
+            <a:ext cx="73152" cy="475488"/>
           </a:xfrm>
           <a:prstGeom prst="rect">
             <a:avLst/>
@@ -27242,14 +27683,14 @@
       </p:sp>
       <p:sp>
         <p:nvSpPr>
-          <p:cNvPr id="28" name="Shape 26"/>
-          <p:cNvSpPr/>
-          <p:nvPr/>
-        </p:nvSpPr>
-        <p:spPr>
-          <a:xfrm>
-            <a:off x="4370832" y="3364992"/>
-            <a:ext cx="1645920" cy="475488"/>
+          <p:cNvPr id="31" name="Shape 29"/>
+          <p:cNvSpPr/>
+          <p:nvPr/>
+        </p:nvSpPr>
+        <p:spPr>
+          <a:xfrm>
+            <a:off x="3602736" y="3364992"/>
+            <a:ext cx="1554480" cy="475488"/>
           </a:xfrm>
           <a:prstGeom prst="rect">
             <a:avLst>
@@ -27269,14 +27710,14 @@
       </p:sp>
       <p:sp>
         <p:nvSpPr>
-          <p:cNvPr id="29" name="Text 27"/>
-          <p:cNvSpPr/>
-          <p:nvPr/>
-        </p:nvSpPr>
-        <p:spPr>
-          <a:xfrm>
-            <a:off x="4370832" y="3364992"/>
-            <a:ext cx="1645920" cy="475488"/>
+          <p:cNvPr id="32" name="Text 30"/>
+          <p:cNvSpPr/>
+          <p:nvPr/>
+        </p:nvSpPr>
+        <p:spPr>
+          <a:xfrm>
+            <a:off x="3602736" y="3364992"/>
+            <a:ext cx="1554480" cy="475488"/>
           </a:xfrm>
           <a:prstGeom prst="rect">
             <a:avLst/>
@@ -27308,14 +27749,14 @@
       </p:sp>
       <p:sp>
         <p:nvSpPr>
-          <p:cNvPr id="30" name="Text 28"/>
-          <p:cNvSpPr/>
-          <p:nvPr/>
-        </p:nvSpPr>
-        <p:spPr>
-          <a:xfrm>
-            <a:off x="6016752" y="3364992"/>
-            <a:ext cx="411480" cy="475488"/>
+          <p:cNvPr id="33" name="Text 31"/>
+          <p:cNvSpPr/>
+          <p:nvPr/>
+        </p:nvSpPr>
+        <p:spPr>
+          <a:xfrm>
+            <a:off x="5157216" y="3364992"/>
+            <a:ext cx="73152" cy="475488"/>
           </a:xfrm>
           <a:prstGeom prst="rect">
             <a:avLst/>
@@ -27347,14 +27788,14 @@
       </p:sp>
       <p:sp>
         <p:nvSpPr>
-          <p:cNvPr id="31" name="Shape 29"/>
-          <p:cNvSpPr/>
-          <p:nvPr/>
-        </p:nvSpPr>
-        <p:spPr>
-          <a:xfrm>
-            <a:off x="6428232" y="3364992"/>
-            <a:ext cx="1645920" cy="475488"/>
+          <p:cNvPr id="34" name="Shape 32"/>
+          <p:cNvSpPr/>
+          <p:nvPr/>
+        </p:nvSpPr>
+        <p:spPr>
+          <a:xfrm>
+            <a:off x="5230368" y="3364992"/>
+            <a:ext cx="1554480" cy="475488"/>
           </a:xfrm>
           <a:prstGeom prst="rect">
             <a:avLst>
@@ -27374,14 +27815,14 @@
       </p:sp>
       <p:sp>
         <p:nvSpPr>
-          <p:cNvPr id="32" name="Text 30"/>
-          <p:cNvSpPr/>
-          <p:nvPr/>
-        </p:nvSpPr>
-        <p:spPr>
-          <a:xfrm>
-            <a:off x="6428232" y="3364992"/>
-            <a:ext cx="1645920" cy="475488"/>
+          <p:cNvPr id="35" name="Text 33"/>
+          <p:cNvSpPr/>
+          <p:nvPr/>
+        </p:nvSpPr>
+        <p:spPr>
+          <a:xfrm>
+            <a:off x="5230368" y="3364992"/>
+            <a:ext cx="1554480" cy="475488"/>
           </a:xfrm>
           <a:prstGeom prst="rect">
             <a:avLst/>
@@ -27405,7 +27846,7 @@
                 <a:ea typeface="Trebuchet MS" pitchFamily="34" charset="-122"/>
                 <a:cs typeface="Trebuchet MS" pitchFamily="34" charset="-120"/>
               </a:rPr>
-              <a:t>dict</a:t>
+              <a:t>dic</a:t>
             </a:r>
             <a:endParaRPr lang="en-US" sz="1400" dirty="0"/>
           </a:p>
@@ -27413,7 +27854,112 @@
       </p:sp>
       <p:sp>
         <p:nvSpPr>
-          <p:cNvPr id="33" name="Shape 31"/>
+          <p:cNvPr id="36" name="Text 34"/>
+          <p:cNvSpPr/>
+          <p:nvPr/>
+        </p:nvSpPr>
+        <p:spPr>
+          <a:xfrm>
+            <a:off x="6784848" y="3364992"/>
+            <a:ext cx="73152" cy="475488"/>
+          </a:xfrm>
+          <a:prstGeom prst="rect">
+            <a:avLst/>
+          </a:prstGeom>
+          <a:noFill/>
+          <a:ln/>
+        </p:spPr>
+        <p:txBody>
+          <a:bodyPr wrap="square" lIns="0" tIns="0" rIns="0" bIns="0" rtlCol="0" anchor="ctr"/>
+          <a:lstStyle/>
+          <a:p>
+            <a:pPr algn="ctr" indent="0" marL="0">
+              <a:buNone/>
+            </a:pPr>
+            <a:r>
+              <a:rPr lang="en-US" sz="1600" b="1" dirty="0">
+                <a:solidFill>
+                  <a:srgbClr val="0D9488"/>
+                </a:solidFill>
+                <a:latin typeface="Trebuchet MS" pitchFamily="34" charset="0"/>
+                <a:ea typeface="Trebuchet MS" pitchFamily="34" charset="-122"/>
+                <a:cs typeface="Trebuchet MS" pitchFamily="34" charset="-120"/>
+              </a:rPr>
+              <a:t>·</a:t>
+            </a:r>
+            <a:endParaRPr lang="en-US" sz="1600" dirty="0"/>
+          </a:p>
+        </p:txBody>
+      </p:sp>
+      <p:sp>
+        <p:nvSpPr>
+          <p:cNvPr id="37" name="Shape 35"/>
+          <p:cNvSpPr/>
+          <p:nvPr/>
+        </p:nvSpPr>
+        <p:spPr>
+          <a:xfrm>
+            <a:off x="6858000" y="3364992"/>
+            <a:ext cx="1554480" cy="475488"/>
+          </a:xfrm>
+          <a:prstGeom prst="rect">
+            <a:avLst>
+              <a:gd name="adj" fmla="val 9615"/>
+            </a:avLst>
+          </a:prstGeom>
+          <a:solidFill>
+            <a:srgbClr val="FFFFFF"/>
+          </a:solidFill>
+          <a:ln w="12700">
+            <a:solidFill>
+              <a:srgbClr val="0D9488"/>
+            </a:solidFill>
+            <a:prstDash val="solid"/>
+          </a:ln>
+        </p:spPr>
+      </p:sp>
+      <p:sp>
+        <p:nvSpPr>
+          <p:cNvPr id="38" name="Text 36"/>
+          <p:cNvSpPr/>
+          <p:nvPr/>
+        </p:nvSpPr>
+        <p:spPr>
+          <a:xfrm>
+            <a:off x="6858000" y="3364992"/>
+            <a:ext cx="1554480" cy="475488"/>
+          </a:xfrm>
+          <a:prstGeom prst="rect">
+            <a:avLst/>
+          </a:prstGeom>
+          <a:noFill/>
+          <a:ln/>
+        </p:spPr>
+        <p:txBody>
+          <a:bodyPr wrap="square" lIns="0" tIns="0" rIns="0" bIns="0" rtlCol="0" anchor="ctr"/>
+          <a:lstStyle/>
+          <a:p>
+            <a:pPr algn="ctr" indent="0" marL="0">
+              <a:buNone/>
+            </a:pPr>
+            <a:r>
+              <a:rPr lang="en-US" sz="1400" b="1" dirty="0">
+                <a:solidFill>
+                  <a:srgbClr val="0D9488"/>
+                </a:solidFill>
+                <a:latin typeface="Trebuchet MS" pitchFamily="34" charset="0"/>
+                <a:ea typeface="Trebuchet MS" pitchFamily="34" charset="-122"/>
+                <a:cs typeface="Trebuchet MS" pitchFamily="34" charset="-120"/>
+              </a:rPr>
+              <a:t>tion</a:t>
+            </a:r>
+            <a:endParaRPr lang="en-US" sz="1400" dirty="0"/>
+          </a:p>
+        </p:txBody>
+      </p:sp>
+      <p:sp>
+        <p:nvSpPr>
+          <p:cNvPr id="39" name="Shape 37"/>
           <p:cNvSpPr/>
           <p:nvPr/>
         </p:nvSpPr>
@@ -27440,7 +27986,7 @@
       </p:sp>
       <p:sp>
         <p:nvSpPr>
-          <p:cNvPr id="34" name="Text 32"/>
+          <p:cNvPr id="40" name="Text 38"/>
           <p:cNvSpPr/>
           <p:nvPr/>
         </p:nvSpPr>
@@ -27479,7 +28025,7 @@
       </p:sp>
       <p:sp>
         <p:nvSpPr>
-          <p:cNvPr id="35" name="Shape 33"/>
+          <p:cNvPr id="41" name="Shape 39"/>
           <p:cNvSpPr/>
           <p:nvPr/>
         </p:nvSpPr>
@@ -27506,14 +28052,14 @@
       </p:sp>
       <p:sp>
         <p:nvSpPr>
-          <p:cNvPr id="36" name="Shape 34"/>
-          <p:cNvSpPr/>
-          <p:nvPr/>
-        </p:nvSpPr>
-        <p:spPr>
-          <a:xfrm>
-            <a:off x="1951828" y="4169664"/>
-            <a:ext cx="603504" cy="384048"/>
+          <p:cNvPr id="42" name="Shape 40"/>
+          <p:cNvSpPr/>
+          <p:nvPr/>
+        </p:nvSpPr>
+        <p:spPr>
+          <a:xfrm>
+            <a:off x="1952596" y="4169664"/>
+            <a:ext cx="493776" cy="384048"/>
           </a:xfrm>
           <a:prstGeom prst="rect">
             <a:avLst>
@@ -27533,14 +28079,14 @@
       </p:sp>
       <p:sp>
         <p:nvSpPr>
-          <p:cNvPr id="37" name="Text 35"/>
-          <p:cNvSpPr/>
-          <p:nvPr/>
-        </p:nvSpPr>
-        <p:spPr>
-          <a:xfrm>
-            <a:off x="1951828" y="4169664"/>
-            <a:ext cx="603504" cy="384048"/>
+          <p:cNvPr id="43" name="Text 41"/>
+          <p:cNvSpPr/>
+          <p:nvPr/>
+        </p:nvSpPr>
+        <p:spPr>
+          <a:xfrm>
+            <a:off x="1952596" y="4169664"/>
+            <a:ext cx="493776" cy="384048"/>
           </a:xfrm>
           <a:prstGeom prst="rect">
             <a:avLst/>
@@ -27572,14 +28118,14 @@
       </p:sp>
       <p:sp>
         <p:nvSpPr>
-          <p:cNvPr id="38" name="Text 36"/>
-          <p:cNvSpPr/>
-          <p:nvPr/>
-        </p:nvSpPr>
-        <p:spPr>
-          <a:xfrm>
-            <a:off x="1951828" y="4572000"/>
-            <a:ext cx="603504" cy="219456"/>
+          <p:cNvPr id="44" name="Text 42"/>
+          <p:cNvSpPr/>
+          <p:nvPr/>
+        </p:nvSpPr>
+        <p:spPr>
+          <a:xfrm>
+            <a:off x="1952596" y="4572000"/>
+            <a:ext cx="493776" cy="219456"/>
           </a:xfrm>
           <a:prstGeom prst="rect">
             <a:avLst/>
@@ -27611,14 +28157,14 @@
       </p:sp>
       <p:sp>
         <p:nvSpPr>
-          <p:cNvPr id="39" name="Shape 37"/>
-          <p:cNvSpPr/>
-          <p:nvPr/>
-        </p:nvSpPr>
-        <p:spPr>
-          <a:xfrm>
-            <a:off x="2605209" y="4169664"/>
-            <a:ext cx="603504" cy="384048"/>
+          <p:cNvPr id="45" name="Shape 43"/>
+          <p:cNvSpPr/>
+          <p:nvPr/>
+        </p:nvSpPr>
+        <p:spPr>
+          <a:xfrm>
+            <a:off x="2497015" y="4169664"/>
+            <a:ext cx="493776" cy="384048"/>
           </a:xfrm>
           <a:prstGeom prst="rect">
             <a:avLst>
@@ -27638,14 +28184,14 @@
       </p:sp>
       <p:sp>
         <p:nvSpPr>
-          <p:cNvPr id="40" name="Text 38"/>
-          <p:cNvSpPr/>
-          <p:nvPr/>
-        </p:nvSpPr>
-        <p:spPr>
-          <a:xfrm>
-            <a:off x="2605209" y="4169664"/>
-            <a:ext cx="603504" cy="384048"/>
+          <p:cNvPr id="46" name="Text 44"/>
+          <p:cNvSpPr/>
+          <p:nvPr/>
+        </p:nvSpPr>
+        <p:spPr>
+          <a:xfrm>
+            <a:off x="2497015" y="4169664"/>
+            <a:ext cx="493776" cy="384048"/>
           </a:xfrm>
           <a:prstGeom prst="rect">
             <a:avLst/>
@@ -27677,14 +28223,14 @@
       </p:sp>
       <p:sp>
         <p:nvSpPr>
-          <p:cNvPr id="41" name="Shape 39"/>
-          <p:cNvSpPr/>
-          <p:nvPr/>
-        </p:nvSpPr>
-        <p:spPr>
-          <a:xfrm>
-            <a:off x="3258589" y="4169664"/>
-            <a:ext cx="603504" cy="384048"/>
+          <p:cNvPr id="47" name="Shape 45"/>
+          <p:cNvSpPr/>
+          <p:nvPr/>
+        </p:nvSpPr>
+        <p:spPr>
+          <a:xfrm>
+            <a:off x="3041435" y="4169664"/>
+            <a:ext cx="493776" cy="384048"/>
           </a:xfrm>
           <a:prstGeom prst="rect">
             <a:avLst>
@@ -27704,14 +28250,14 @@
       </p:sp>
       <p:sp>
         <p:nvSpPr>
-          <p:cNvPr id="42" name="Text 40"/>
-          <p:cNvSpPr/>
-          <p:nvPr/>
-        </p:nvSpPr>
-        <p:spPr>
-          <a:xfrm>
-            <a:off x="3258589" y="4169664"/>
-            <a:ext cx="603504" cy="384048"/>
+          <p:cNvPr id="48" name="Text 46"/>
+          <p:cNvSpPr/>
+          <p:nvPr/>
+        </p:nvSpPr>
+        <p:spPr>
+          <a:xfrm>
+            <a:off x="3041435" y="4169664"/>
+            <a:ext cx="493776" cy="384048"/>
           </a:xfrm>
           <a:prstGeom prst="rect">
             <a:avLst/>
@@ -27743,14 +28289,14 @@
       </p:sp>
       <p:sp>
         <p:nvSpPr>
-          <p:cNvPr id="43" name="Shape 41"/>
-          <p:cNvSpPr/>
-          <p:nvPr/>
-        </p:nvSpPr>
-        <p:spPr>
-          <a:xfrm>
-            <a:off x="3911969" y="4169664"/>
-            <a:ext cx="603504" cy="384048"/>
+          <p:cNvPr id="49" name="Shape 47"/>
+          <p:cNvSpPr/>
+          <p:nvPr/>
+        </p:nvSpPr>
+        <p:spPr>
+          <a:xfrm>
+            <a:off x="3585855" y="4169664"/>
+            <a:ext cx="493776" cy="384048"/>
           </a:xfrm>
           <a:prstGeom prst="rect">
             <a:avLst>
@@ -27770,14 +28316,14 @@
       </p:sp>
       <p:sp>
         <p:nvSpPr>
-          <p:cNvPr id="44" name="Text 42"/>
-          <p:cNvSpPr/>
-          <p:nvPr/>
-        </p:nvSpPr>
-        <p:spPr>
-          <a:xfrm>
-            <a:off x="3911969" y="4169664"/>
-            <a:ext cx="603504" cy="384048"/>
+          <p:cNvPr id="50" name="Text 48"/>
+          <p:cNvSpPr/>
+          <p:nvPr/>
+        </p:nvSpPr>
+        <p:spPr>
+          <a:xfrm>
+            <a:off x="3585855" y="4169664"/>
+            <a:ext cx="493776" cy="384048"/>
           </a:xfrm>
           <a:prstGeom prst="rect">
             <a:avLst/>
@@ -27809,14 +28355,14 @@
       </p:sp>
       <p:sp>
         <p:nvSpPr>
-          <p:cNvPr id="45" name="Shape 43"/>
-          <p:cNvSpPr/>
-          <p:nvPr/>
-        </p:nvSpPr>
-        <p:spPr>
-          <a:xfrm>
-            <a:off x="4565350" y="4169664"/>
-            <a:ext cx="603504" cy="384048"/>
+          <p:cNvPr id="51" name="Shape 49"/>
+          <p:cNvSpPr/>
+          <p:nvPr/>
+        </p:nvSpPr>
+        <p:spPr>
+          <a:xfrm>
+            <a:off x="4130274" y="4169664"/>
+            <a:ext cx="493776" cy="384048"/>
           </a:xfrm>
           <a:prstGeom prst="rect">
             <a:avLst>
@@ -27836,14 +28382,14 @@
       </p:sp>
       <p:sp>
         <p:nvSpPr>
-          <p:cNvPr id="46" name="Text 44"/>
-          <p:cNvSpPr/>
-          <p:nvPr/>
-        </p:nvSpPr>
-        <p:spPr>
-          <a:xfrm>
-            <a:off x="4565350" y="4169664"/>
-            <a:ext cx="603504" cy="384048"/>
+          <p:cNvPr id="52" name="Text 50"/>
+          <p:cNvSpPr/>
+          <p:nvPr/>
+        </p:nvSpPr>
+        <p:spPr>
+          <a:xfrm>
+            <a:off x="4130274" y="4169664"/>
+            <a:ext cx="493776" cy="384048"/>
           </a:xfrm>
           <a:prstGeom prst="rect">
             <a:avLst/>
@@ -27875,14 +28421,14 @@
       </p:sp>
       <p:sp>
         <p:nvSpPr>
-          <p:cNvPr id="47" name="Shape 45"/>
-          <p:cNvSpPr/>
-          <p:nvPr/>
-        </p:nvSpPr>
-        <p:spPr>
-          <a:xfrm>
-            <a:off x="5218730" y="4169664"/>
-            <a:ext cx="603504" cy="384048"/>
+          <p:cNvPr id="53" name="Shape 51"/>
+          <p:cNvSpPr/>
+          <p:nvPr/>
+        </p:nvSpPr>
+        <p:spPr>
+          <a:xfrm>
+            <a:off x="4674694" y="4169664"/>
+            <a:ext cx="493776" cy="384048"/>
           </a:xfrm>
           <a:prstGeom prst="rect">
             <a:avLst>
@@ -27902,14 +28448,14 @@
       </p:sp>
       <p:sp>
         <p:nvSpPr>
-          <p:cNvPr id="48" name="Text 46"/>
-          <p:cNvSpPr/>
-          <p:nvPr/>
-        </p:nvSpPr>
-        <p:spPr>
-          <a:xfrm>
-            <a:off x="5218730" y="4169664"/>
-            <a:ext cx="603504" cy="384048"/>
+          <p:cNvPr id="54" name="Text 52"/>
+          <p:cNvSpPr/>
+          <p:nvPr/>
+        </p:nvSpPr>
+        <p:spPr>
+          <a:xfrm>
+            <a:off x="4674694" y="4169664"/>
+            <a:ext cx="493776" cy="384048"/>
           </a:xfrm>
           <a:prstGeom prst="rect">
             <a:avLst/>
@@ -27941,14 +28487,14 @@
       </p:sp>
       <p:sp>
         <p:nvSpPr>
-          <p:cNvPr id="49" name="Shape 47"/>
-          <p:cNvSpPr/>
-          <p:nvPr/>
-        </p:nvSpPr>
-        <p:spPr>
-          <a:xfrm>
-            <a:off x="5872111" y="4169664"/>
-            <a:ext cx="603504" cy="384048"/>
+          <p:cNvPr id="55" name="Shape 53"/>
+          <p:cNvSpPr/>
+          <p:nvPr/>
+        </p:nvSpPr>
+        <p:spPr>
+          <a:xfrm>
+            <a:off x="5219114" y="4169664"/>
+            <a:ext cx="493776" cy="384048"/>
           </a:xfrm>
           <a:prstGeom prst="rect">
             <a:avLst>
@@ -27968,14 +28514,14 @@
       </p:sp>
       <p:sp>
         <p:nvSpPr>
-          <p:cNvPr id="50" name="Text 48"/>
-          <p:cNvSpPr/>
-          <p:nvPr/>
-        </p:nvSpPr>
-        <p:spPr>
-          <a:xfrm>
-            <a:off x="5872111" y="4169664"/>
-            <a:ext cx="603504" cy="384048"/>
+          <p:cNvPr id="56" name="Text 54"/>
+          <p:cNvSpPr/>
+          <p:nvPr/>
+        </p:nvSpPr>
+        <p:spPr>
+          <a:xfrm>
+            <a:off x="5219114" y="4169664"/>
+            <a:ext cx="493776" cy="384048"/>
           </a:xfrm>
           <a:prstGeom prst="rect">
             <a:avLst/>
@@ -28007,14 +28553,14 @@
       </p:sp>
       <p:sp>
         <p:nvSpPr>
-          <p:cNvPr id="51" name="Shape 49"/>
-          <p:cNvSpPr/>
-          <p:nvPr/>
-        </p:nvSpPr>
-        <p:spPr>
-          <a:xfrm>
-            <a:off x="6525491" y="4169664"/>
-            <a:ext cx="603504" cy="384048"/>
+          <p:cNvPr id="57" name="Shape 55"/>
+          <p:cNvSpPr/>
+          <p:nvPr/>
+        </p:nvSpPr>
+        <p:spPr>
+          <a:xfrm>
+            <a:off x="5763534" y="4169664"/>
+            <a:ext cx="493776" cy="384048"/>
           </a:xfrm>
           <a:prstGeom prst="rect">
             <a:avLst>
@@ -28034,14 +28580,14 @@
       </p:sp>
       <p:sp>
         <p:nvSpPr>
-          <p:cNvPr id="52" name="Text 50"/>
-          <p:cNvSpPr/>
-          <p:nvPr/>
-        </p:nvSpPr>
-        <p:spPr>
-          <a:xfrm>
-            <a:off x="6525491" y="4169664"/>
-            <a:ext cx="603504" cy="384048"/>
+          <p:cNvPr id="58" name="Text 56"/>
+          <p:cNvSpPr/>
+          <p:nvPr/>
+        </p:nvSpPr>
+        <p:spPr>
+          <a:xfrm>
+            <a:off x="5763534" y="4169664"/>
+            <a:ext cx="493776" cy="384048"/>
           </a:xfrm>
           <a:prstGeom prst="rect">
             <a:avLst/>
@@ -28073,14 +28619,14 @@
       </p:sp>
       <p:sp>
         <p:nvSpPr>
-          <p:cNvPr id="53" name="Shape 51"/>
-          <p:cNvSpPr/>
-          <p:nvPr/>
-        </p:nvSpPr>
-        <p:spPr>
-          <a:xfrm>
-            <a:off x="7178871" y="4169664"/>
-            <a:ext cx="603504" cy="384048"/>
+          <p:cNvPr id="59" name="Shape 57"/>
+          <p:cNvSpPr/>
+          <p:nvPr/>
+        </p:nvSpPr>
+        <p:spPr>
+          <a:xfrm>
+            <a:off x="6307953" y="4169664"/>
+            <a:ext cx="493776" cy="384048"/>
           </a:xfrm>
           <a:prstGeom prst="rect">
             <a:avLst>
@@ -28100,14 +28646,14 @@
       </p:sp>
       <p:sp>
         <p:nvSpPr>
-          <p:cNvPr id="54" name="Text 52"/>
-          <p:cNvSpPr/>
-          <p:nvPr/>
-        </p:nvSpPr>
-        <p:spPr>
-          <a:xfrm>
-            <a:off x="7178871" y="4169664"/>
-            <a:ext cx="603504" cy="384048"/>
+          <p:cNvPr id="60" name="Text 58"/>
+          <p:cNvSpPr/>
+          <p:nvPr/>
+        </p:nvSpPr>
+        <p:spPr>
+          <a:xfrm>
+            <a:off x="6307953" y="4169664"/>
+            <a:ext cx="493776" cy="384048"/>
           </a:xfrm>
           <a:prstGeom prst="rect">
             <a:avLst/>
@@ -28139,14 +28685,14 @@
       </p:sp>
       <p:sp>
         <p:nvSpPr>
-          <p:cNvPr id="55" name="Text 53"/>
-          <p:cNvSpPr/>
-          <p:nvPr/>
-        </p:nvSpPr>
-        <p:spPr>
-          <a:xfrm>
-            <a:off x="7178871" y="4572000"/>
-            <a:ext cx="603504" cy="219456"/>
+          <p:cNvPr id="61" name="Text 59"/>
+          <p:cNvSpPr/>
+          <p:nvPr/>
+        </p:nvSpPr>
+        <p:spPr>
+          <a:xfrm>
+            <a:off x="6307953" y="4572000"/>
+            <a:ext cx="493776" cy="219456"/>
           </a:xfrm>
           <a:prstGeom prst="rect">
             <a:avLst/>
@@ -28178,14 +28724,14 @@
       </p:sp>
       <p:sp>
         <p:nvSpPr>
-          <p:cNvPr id="56" name="Shape 54"/>
-          <p:cNvSpPr/>
-          <p:nvPr/>
-        </p:nvSpPr>
-        <p:spPr>
-          <a:xfrm>
-            <a:off x="7832252" y="4169664"/>
-            <a:ext cx="603504" cy="384048"/>
+          <p:cNvPr id="62" name="Shape 60"/>
+          <p:cNvSpPr/>
+          <p:nvPr/>
+        </p:nvSpPr>
+        <p:spPr>
+          <a:xfrm>
+            <a:off x="6852373" y="4169664"/>
+            <a:ext cx="493776" cy="384048"/>
           </a:xfrm>
           <a:prstGeom prst="rect">
             <a:avLst>
@@ -28205,14 +28751,14 @@
       </p:sp>
       <p:sp>
         <p:nvSpPr>
-          <p:cNvPr id="57" name="Text 55"/>
-          <p:cNvSpPr/>
-          <p:nvPr/>
-        </p:nvSpPr>
-        <p:spPr>
-          <a:xfrm>
-            <a:off x="7832252" y="4169664"/>
-            <a:ext cx="603504" cy="384048"/>
+          <p:cNvPr id="63" name="Text 61"/>
+          <p:cNvSpPr/>
+          <p:nvPr/>
+        </p:nvSpPr>
+        <p:spPr>
+          <a:xfrm>
+            <a:off x="6852373" y="4169664"/>
+            <a:ext cx="493776" cy="384048"/>
           </a:xfrm>
           <a:prstGeom prst="rect">
             <a:avLst/>
@@ -28237,6 +28783,177 @@
                 <a:cs typeface="Trebuchet MS" pitchFamily="34" charset="-120"/>
               </a:rPr>
               <a:t>t</a:t>
+            </a:r>
+            <a:endParaRPr lang="en-US" sz="900" dirty="0"/>
+          </a:p>
+        </p:txBody>
+      </p:sp>
+      <p:sp>
+        <p:nvSpPr>
+          <p:cNvPr id="64" name="Shape 62"/>
+          <p:cNvSpPr/>
+          <p:nvPr/>
+        </p:nvSpPr>
+        <p:spPr>
+          <a:xfrm>
+            <a:off x="7396793" y="4169664"/>
+            <a:ext cx="493776" cy="384048"/>
+          </a:xfrm>
+          <a:prstGeom prst="rect">
+            <a:avLst>
+              <a:gd name="adj" fmla="val 9524"/>
+            </a:avLst>
+          </a:prstGeom>
+          <a:solidFill>
+            <a:srgbClr val="FFFFFF"/>
+          </a:solidFill>
+          <a:ln w="12700">
+            <a:solidFill>
+              <a:srgbClr val="DB2777"/>
+            </a:solidFill>
+            <a:prstDash val="solid"/>
+          </a:ln>
+        </p:spPr>
+      </p:sp>
+      <p:sp>
+        <p:nvSpPr>
+          <p:cNvPr id="65" name="Text 63"/>
+          <p:cNvSpPr/>
+          <p:nvPr/>
+        </p:nvSpPr>
+        <p:spPr>
+          <a:xfrm>
+            <a:off x="7396793" y="4169664"/>
+            <a:ext cx="493776" cy="384048"/>
+          </a:xfrm>
+          <a:prstGeom prst="rect">
+            <a:avLst/>
+          </a:prstGeom>
+          <a:noFill/>
+          <a:ln/>
+        </p:spPr>
+        <p:txBody>
+          <a:bodyPr wrap="square" lIns="0" tIns="0" rIns="0" bIns="0" rtlCol="0" anchor="ctr"/>
+          <a:lstStyle/>
+          <a:p>
+            <a:pPr algn="ctr" indent="0" marL="0">
+              <a:buNone/>
+            </a:pPr>
+            <a:r>
+              <a:rPr lang="en-US" sz="900" b="1" dirty="0">
+                <a:solidFill>
+                  <a:srgbClr val="9D174D"/>
+                </a:solidFill>
+                <a:latin typeface="Trebuchet MS" pitchFamily="34" charset="0"/>
+                <a:ea typeface="Trebuchet MS" pitchFamily="34" charset="-122"/>
+                <a:cs typeface="Trebuchet MS" pitchFamily="34" charset="-120"/>
+              </a:rPr>
+              <a:t>io</a:t>
+            </a:r>
+            <a:endParaRPr lang="en-US" sz="900" dirty="0"/>
+          </a:p>
+        </p:txBody>
+      </p:sp>
+      <p:sp>
+        <p:nvSpPr>
+          <p:cNvPr id="66" name="Text 64"/>
+          <p:cNvSpPr/>
+          <p:nvPr/>
+        </p:nvSpPr>
+        <p:spPr>
+          <a:xfrm>
+            <a:off x="7396793" y="4572000"/>
+            <a:ext cx="493776" cy="219456"/>
+          </a:xfrm>
+          <a:prstGeom prst="rect">
+            <a:avLst/>
+          </a:prstGeom>
+          <a:noFill/>
+          <a:ln/>
+        </p:spPr>
+        <p:txBody>
+          <a:bodyPr wrap="square" lIns="0" tIns="0" rIns="0" bIns="0" rtlCol="0" anchor="t"/>
+          <a:lstStyle/>
+          <a:p>
+            <a:pPr algn="ctr" indent="0" marL="0">
+              <a:buNone/>
+            </a:pPr>
+            <a:r>
+              <a:rPr lang="en-US" sz="750" i="1" dirty="0">
+                <a:solidFill>
+                  <a:srgbClr val="94A3B8"/>
+                </a:solidFill>
+                <a:latin typeface="Calibri" pitchFamily="34" charset="0"/>
+                <a:ea typeface="Calibri" pitchFamily="34" charset="-122"/>
+                <a:cs typeface="Calibri" pitchFamily="34" charset="-120"/>
+              </a:rPr>
+              <a:t>/sh/</a:t>
+            </a:r>
+            <a:endParaRPr lang="en-US" sz="750" dirty="0"/>
+          </a:p>
+        </p:txBody>
+      </p:sp>
+      <p:sp>
+        <p:nvSpPr>
+          <p:cNvPr id="67" name="Shape 65"/>
+          <p:cNvSpPr/>
+          <p:nvPr/>
+        </p:nvSpPr>
+        <p:spPr>
+          <a:xfrm>
+            <a:off x="7941212" y="4169664"/>
+            <a:ext cx="493776" cy="384048"/>
+          </a:xfrm>
+          <a:prstGeom prst="rect">
+            <a:avLst>
+              <a:gd name="adj" fmla="val 9524"/>
+            </a:avLst>
+          </a:prstGeom>
+          <a:solidFill>
+            <a:srgbClr val="FFFFFF"/>
+          </a:solidFill>
+          <a:ln w="12700">
+            <a:solidFill>
+              <a:srgbClr val="DB2777"/>
+            </a:solidFill>
+            <a:prstDash val="solid"/>
+          </a:ln>
+        </p:spPr>
+      </p:sp>
+      <p:sp>
+        <p:nvSpPr>
+          <p:cNvPr id="68" name="Text 66"/>
+          <p:cNvSpPr/>
+          <p:nvPr/>
+        </p:nvSpPr>
+        <p:spPr>
+          <a:xfrm>
+            <a:off x="7941212" y="4169664"/>
+            <a:ext cx="493776" cy="384048"/>
+          </a:xfrm>
+          <a:prstGeom prst="rect">
+            <a:avLst/>
+          </a:prstGeom>
+          <a:noFill/>
+          <a:ln/>
+        </p:spPr>
+        <p:txBody>
+          <a:bodyPr wrap="square" lIns="0" tIns="0" rIns="0" bIns="0" rtlCol="0" anchor="ctr"/>
+          <a:lstStyle/>
+          <a:p>
+            <a:pPr algn="ctr" indent="0" marL="0">
+              <a:buNone/>
+            </a:pPr>
+            <a:r>
+              <a:rPr lang="en-US" sz="900" b="1" dirty="0">
+                <a:solidFill>
+                  <a:srgbClr val="9D174D"/>
+                </a:solidFill>
+                <a:latin typeface="Trebuchet MS" pitchFamily="34" charset="0"/>
+                <a:ea typeface="Trebuchet MS" pitchFamily="34" charset="-122"/>
+                <a:cs typeface="Trebuchet MS" pitchFamily="34" charset="-120"/>
+              </a:rPr>
+              <a:t>n</a:t>
             </a:r>
             <a:endParaRPr lang="en-US" sz="900" dirty="0"/>
           </a:p>
@@ -28667,7 +29384,7 @@
                 <a:ea typeface="Trebuchet MS" pitchFamily="34" charset="-122"/>
                 <a:cs typeface="Trebuchet MS" pitchFamily="34" charset="-120"/>
               </a:rPr>
-              <a:t>edict</a:t>
+              <a:t>dictation</a:t>
             </a:r>
             <a:endParaRPr lang="en-US" sz="2800" dirty="0"/>
           </a:p>
@@ -29494,7 +30211,7 @@
                 <a:ea typeface="Trebuchet MS" pitchFamily="34" charset="-122"/>
                 <a:cs typeface="Trebuchet MS" pitchFamily="34" charset="-120"/>
               </a:rPr>
-              <a:t>edict</a:t>
+              <a:t>dictation</a:t>
             </a:r>
             <a:endParaRPr lang="en-US" sz="2800" dirty="0"/>
           </a:p>
@@ -29574,7 +30291,7 @@
         </p:nvSpPr>
         <p:spPr>
           <a:xfrm>
-            <a:off x="2938272" y="2258568"/>
+            <a:off x="2221992" y="2258568"/>
             <a:ext cx="1828800" cy="292608"/>
           </a:xfrm>
           <a:prstGeom prst="rect">
@@ -29583,11 +30300,11 @@
             </a:avLst>
           </a:prstGeom>
           <a:solidFill>
-            <a:srgbClr val="DDD6FE"/>
+            <a:srgbClr val="CCFBF1"/>
           </a:solidFill>
           <a:ln w="19050">
             <a:solidFill>
-              <a:srgbClr val="7C3AED"/>
+              <a:srgbClr val="0D9488"/>
             </a:solidFill>
             <a:prstDash val="solid"/>
           </a:ln>
@@ -29608,7 +30325,7 @@
         </p:nvSpPr>
         <p:spPr>
           <a:xfrm>
-            <a:off x="2938272" y="2258568"/>
+            <a:off x="2221992" y="2258568"/>
             <a:ext cx="1828800" cy="292608"/>
           </a:xfrm>
           <a:prstGeom prst="rect">
@@ -29627,13 +30344,13 @@
             <a:r>
               <a:rPr lang="en-US" sz="1300" b="1" dirty="0">
                 <a:solidFill>
-                  <a:srgbClr val="4C1D95"/>
+                  <a:srgbClr val="0F766E"/>
                 </a:solidFill>
                 <a:latin typeface="Trebuchet MS" pitchFamily="34" charset="0"/>
                 <a:ea typeface="Trebuchet MS" pitchFamily="34" charset="-122"/>
                 <a:cs typeface="Trebuchet MS" pitchFamily="34" charset="-120"/>
               </a:rPr>
-              <a:t>e</a:t>
+              <a:t>dict</a:t>
             </a:r>
             <a:endParaRPr lang="en-US" sz="1300" dirty="0"/>
           </a:p>
@@ -29647,7 +30364,7 @@
         </p:nvSpPr>
         <p:spPr>
           <a:xfrm>
-            <a:off x="2938272" y="2569464"/>
+            <a:off x="2221992" y="2569464"/>
             <a:ext cx="1828800" cy="201168"/>
           </a:xfrm>
           <a:prstGeom prst="rect">
@@ -29672,7 +30389,7 @@
                 <a:ea typeface="Calibri" pitchFamily="34" charset="-122"/>
                 <a:cs typeface="Calibri" pitchFamily="34" charset="-120"/>
               </a:rPr>
-              <a:t>out, from</a:t>
+              <a:t>say, speak</a:t>
             </a:r>
             <a:endParaRPr lang="en-US" sz="850" dirty="0"/>
           </a:p>
@@ -29686,7 +30403,7 @@
         </p:nvSpPr>
         <p:spPr>
           <a:xfrm>
-            <a:off x="5803392" y="2258568"/>
+            <a:off x="4370832" y="2258568"/>
             <a:ext cx="1828800" cy="292608"/>
           </a:xfrm>
           <a:prstGeom prst="rect">
@@ -29695,11 +30412,11 @@
             </a:avLst>
           </a:prstGeom>
           <a:solidFill>
-            <a:srgbClr val="CCFBF1"/>
+            <a:srgbClr val="FCE7F3"/>
           </a:solidFill>
           <a:ln w="19050">
             <a:solidFill>
-              <a:srgbClr val="0D9488"/>
+              <a:srgbClr val="DB2777"/>
             </a:solidFill>
             <a:prstDash val="solid"/>
           </a:ln>
@@ -29720,7 +30437,7 @@
         </p:nvSpPr>
         <p:spPr>
           <a:xfrm>
-            <a:off x="5803392" y="2258568"/>
+            <a:off x="4370832" y="2258568"/>
             <a:ext cx="1828800" cy="292608"/>
           </a:xfrm>
           <a:prstGeom prst="rect">
@@ -29739,13 +30456,13 @@
             <a:r>
               <a:rPr lang="en-US" sz="1300" b="1" dirty="0">
                 <a:solidFill>
-                  <a:srgbClr val="0F766E"/>
+                  <a:srgbClr val="9D174D"/>
                 </a:solidFill>
                 <a:latin typeface="Trebuchet MS" pitchFamily="34" charset="0"/>
                 <a:ea typeface="Trebuchet MS" pitchFamily="34" charset="-122"/>
                 <a:cs typeface="Trebuchet MS" pitchFamily="34" charset="-120"/>
               </a:rPr>
-              <a:t>dict</a:t>
+              <a:t>at</a:t>
             </a:r>
             <a:endParaRPr lang="en-US" sz="1300" dirty="0"/>
           </a:p>
@@ -29759,7 +30476,7 @@
         </p:nvSpPr>
         <p:spPr>
           <a:xfrm>
-            <a:off x="5803392" y="2569464"/>
+            <a:off x="4370832" y="2569464"/>
             <a:ext cx="1828800" cy="201168"/>
           </a:xfrm>
           <a:prstGeom prst="rect">
@@ -29784,7 +30501,7 @@
                 <a:ea typeface="Calibri" pitchFamily="34" charset="-122"/>
                 <a:cs typeface="Calibri" pitchFamily="34" charset="-120"/>
               </a:rPr>
-              <a:t>say, speak</a:t>
+              <a:t>action</a:t>
             </a:r>
             <a:endParaRPr lang="en-US" sz="850" dirty="0"/>
           </a:p>
@@ -29793,6 +30510,118 @@
       <p:sp>
         <p:nvSpPr>
           <p:cNvPr id="22" name="Shape 20"/>
+          <p:cNvSpPr/>
+          <p:nvPr/>
+        </p:nvSpPr>
+        <p:spPr>
+          <a:xfrm>
+            <a:off x="6519672" y="2258568"/>
+            <a:ext cx="1828800" cy="292608"/>
+          </a:xfrm>
+          <a:prstGeom prst="rect">
+            <a:avLst>
+              <a:gd name="adj" fmla="val 25000"/>
+            </a:avLst>
+          </a:prstGeom>
+          <a:solidFill>
+            <a:srgbClr val="FCE7F3"/>
+          </a:solidFill>
+          <a:ln w="19050">
+            <a:solidFill>
+              <a:srgbClr val="DB2777"/>
+            </a:solidFill>
+            <a:prstDash val="solid"/>
+          </a:ln>
+          <a:effectLst>
+            <a:outerShdw sx="100000" sy="100000" kx="0" ky="0" algn="bl" rotWithShape="0" blurRad="101600" dist="38100" dir="8100000">
+              <a:srgbClr val="000000">
+                <a:alpha val="12000"/>
+              </a:srgbClr>
+            </a:outerShdw>
+          </a:effectLst>
+        </p:spPr>
+      </p:sp>
+      <p:sp>
+        <p:nvSpPr>
+          <p:cNvPr id="23" name="Text 21"/>
+          <p:cNvSpPr/>
+          <p:nvPr/>
+        </p:nvSpPr>
+        <p:spPr>
+          <a:xfrm>
+            <a:off x="6519672" y="2258568"/>
+            <a:ext cx="1828800" cy="292608"/>
+          </a:xfrm>
+          <a:prstGeom prst="rect">
+            <a:avLst/>
+          </a:prstGeom>
+          <a:noFill/>
+          <a:ln/>
+        </p:spPr>
+        <p:txBody>
+          <a:bodyPr wrap="square" lIns="0" tIns="0" rIns="0" bIns="0" rtlCol="0" anchor="ctr"/>
+          <a:lstStyle/>
+          <a:p>
+            <a:pPr algn="ctr" indent="0" marL="0">
+              <a:buNone/>
+            </a:pPr>
+            <a:r>
+              <a:rPr lang="en-US" sz="1300" b="1" dirty="0">
+                <a:solidFill>
+                  <a:srgbClr val="9D174D"/>
+                </a:solidFill>
+                <a:latin typeface="Trebuchet MS" pitchFamily="34" charset="0"/>
+                <a:ea typeface="Trebuchet MS" pitchFamily="34" charset="-122"/>
+                <a:cs typeface="Trebuchet MS" pitchFamily="34" charset="-120"/>
+              </a:rPr>
+              <a:t>ion</a:t>
+            </a:r>
+            <a:endParaRPr lang="en-US" sz="1300" dirty="0"/>
+          </a:p>
+        </p:txBody>
+      </p:sp>
+      <p:sp>
+        <p:nvSpPr>
+          <p:cNvPr id="24" name="Text 22"/>
+          <p:cNvSpPr/>
+          <p:nvPr/>
+        </p:nvSpPr>
+        <p:spPr>
+          <a:xfrm>
+            <a:off x="6519672" y="2569464"/>
+            <a:ext cx="1828800" cy="201168"/>
+          </a:xfrm>
+          <a:prstGeom prst="rect">
+            <a:avLst/>
+          </a:prstGeom>
+          <a:noFill/>
+          <a:ln/>
+        </p:spPr>
+        <p:txBody>
+          <a:bodyPr wrap="square" lIns="0" tIns="0" rIns="0" bIns="0" rtlCol="0" anchor="t"/>
+          <a:lstStyle/>
+          <a:p>
+            <a:pPr algn="ctr" indent="0" marL="0">
+              <a:buNone/>
+            </a:pPr>
+            <a:r>
+              <a:rPr lang="en-US" sz="850" dirty="0">
+                <a:solidFill>
+                  <a:srgbClr val="475569"/>
+                </a:solidFill>
+                <a:latin typeface="Calibri" pitchFamily="34" charset="0"/>
+                <a:ea typeface="Calibri" pitchFamily="34" charset="-122"/>
+                <a:cs typeface="Calibri" pitchFamily="34" charset="-120"/>
+              </a:rPr>
+              <a:t>act or result of</a:t>
+            </a:r>
+            <a:endParaRPr lang="en-US" sz="850" dirty="0"/>
+          </a:p>
+        </p:txBody>
+      </p:sp>
+      <p:sp>
+        <p:nvSpPr>
+          <p:cNvPr id="25" name="Shape 23"/>
           <p:cNvSpPr/>
           <p:nvPr/>
         </p:nvSpPr>
@@ -29819,7 +30648,7 @@
       </p:sp>
       <p:sp>
         <p:nvSpPr>
-          <p:cNvPr id="23" name="Text 21"/>
+          <p:cNvPr id="26" name="Text 24"/>
           <p:cNvSpPr/>
           <p:nvPr/>
         </p:nvSpPr>
@@ -29858,7 +30687,7 @@
       </p:sp>
       <p:sp>
         <p:nvSpPr>
-          <p:cNvPr id="24" name="Shape 22"/>
+          <p:cNvPr id="27" name="Shape 25"/>
           <p:cNvSpPr/>
           <p:nvPr/>
         </p:nvSpPr>
@@ -29885,7 +30714,7 @@
       </p:sp>
       <p:sp>
         <p:nvSpPr>
-          <p:cNvPr id="25" name="Text 23"/>
+          <p:cNvPr id="28" name="Text 26"/>
           <p:cNvSpPr/>
           <p:nvPr/>
         </p:nvSpPr>
@@ -29924,7 +30753,7 @@
       </p:sp>
       <p:sp>
         <p:nvSpPr>
-          <p:cNvPr id="26" name="Shape 24"/>
+          <p:cNvPr id="29" name="Shape 27"/>
           <p:cNvSpPr/>
           <p:nvPr/>
         </p:nvSpPr>
@@ -29951,7 +30780,7 @@
       </p:sp>
       <p:sp>
         <p:nvSpPr>
-          <p:cNvPr id="27" name="Text 25"/>
+          <p:cNvPr id="30" name="Text 28"/>
           <p:cNvSpPr/>
           <p:nvPr/>
         </p:nvSpPr>
@@ -29990,7 +30819,7 @@
       </p:sp>
       <p:sp>
         <p:nvSpPr>
-          <p:cNvPr id="28" name="Shape 26"/>
+          <p:cNvPr id="31" name="Shape 29"/>
           <p:cNvSpPr/>
           <p:nvPr/>
         </p:nvSpPr>
@@ -30017,7 +30846,7 @@
       </p:sp>
       <p:sp>
         <p:nvSpPr>
-          <p:cNvPr id="29" name="Text 27"/>
+          <p:cNvPr id="32" name="Text 30"/>
           <p:cNvSpPr/>
           <p:nvPr/>
         </p:nvSpPr>
@@ -30479,7 +31308,7 @@
                 <a:ea typeface="Trebuchet MS" pitchFamily="34" charset="-122"/>
                 <a:cs typeface="Trebuchet MS" pitchFamily="34" charset="-120"/>
               </a:rPr>
-              <a:t>edict</a:t>
+              <a:t>dictation</a:t>
             </a:r>
             <a:endParaRPr lang="en-US" sz="2800" dirty="0"/>
           </a:p>
@@ -30559,7 +31388,7 @@
         </p:nvSpPr>
         <p:spPr>
           <a:xfrm>
-            <a:off x="2938272" y="2258568"/>
+            <a:off x="2221992" y="2258568"/>
             <a:ext cx="1828800" cy="292608"/>
           </a:xfrm>
           <a:prstGeom prst="rect">
@@ -30568,11 +31397,11 @@
             </a:avLst>
           </a:prstGeom>
           <a:solidFill>
-            <a:srgbClr val="DDD6FE"/>
+            <a:srgbClr val="CCFBF1"/>
           </a:solidFill>
           <a:ln w="19050">
             <a:solidFill>
-              <a:srgbClr val="7C3AED"/>
+              <a:srgbClr val="0D9488"/>
             </a:solidFill>
             <a:prstDash val="solid"/>
           </a:ln>
@@ -30593,7 +31422,7 @@
         </p:nvSpPr>
         <p:spPr>
           <a:xfrm>
-            <a:off x="2938272" y="2258568"/>
+            <a:off x="2221992" y="2258568"/>
             <a:ext cx="1828800" cy="292608"/>
           </a:xfrm>
           <a:prstGeom prst="rect">
@@ -30612,13 +31441,13 @@
             <a:r>
               <a:rPr lang="en-US" sz="1300" b="1" dirty="0">
                 <a:solidFill>
-                  <a:srgbClr val="4C1D95"/>
+                  <a:srgbClr val="0F766E"/>
                 </a:solidFill>
                 <a:latin typeface="Trebuchet MS" pitchFamily="34" charset="0"/>
                 <a:ea typeface="Trebuchet MS" pitchFamily="34" charset="-122"/>
                 <a:cs typeface="Trebuchet MS" pitchFamily="34" charset="-120"/>
               </a:rPr>
-              <a:t>e</a:t>
+              <a:t>dict</a:t>
             </a:r>
             <a:endParaRPr lang="en-US" sz="1300" dirty="0"/>
           </a:p>
@@ -30632,7 +31461,7 @@
         </p:nvSpPr>
         <p:spPr>
           <a:xfrm>
-            <a:off x="2938272" y="2569464"/>
+            <a:off x="2221992" y="2569464"/>
             <a:ext cx="1828800" cy="201168"/>
           </a:xfrm>
           <a:prstGeom prst="rect">
@@ -30657,7 +31486,7 @@
                 <a:ea typeface="Calibri" pitchFamily="34" charset="-122"/>
                 <a:cs typeface="Calibri" pitchFamily="34" charset="-120"/>
               </a:rPr>
-              <a:t>out, from</a:t>
+              <a:t>say, speak</a:t>
             </a:r>
             <a:endParaRPr lang="en-US" sz="850" dirty="0"/>
           </a:p>
@@ -30671,7 +31500,7 @@
         </p:nvSpPr>
         <p:spPr>
           <a:xfrm>
-            <a:off x="5803392" y="2258568"/>
+            <a:off x="4370832" y="2258568"/>
             <a:ext cx="1828800" cy="292608"/>
           </a:xfrm>
           <a:prstGeom prst="rect">
@@ -30680,11 +31509,11 @@
             </a:avLst>
           </a:prstGeom>
           <a:solidFill>
-            <a:srgbClr val="CCFBF1"/>
+            <a:srgbClr val="FCE7F3"/>
           </a:solidFill>
           <a:ln w="19050">
             <a:solidFill>
-              <a:srgbClr val="0D9488"/>
+              <a:srgbClr val="DB2777"/>
             </a:solidFill>
             <a:prstDash val="solid"/>
           </a:ln>
@@ -30705,7 +31534,7 @@
         </p:nvSpPr>
         <p:spPr>
           <a:xfrm>
-            <a:off x="5803392" y="2258568"/>
+            <a:off x="4370832" y="2258568"/>
             <a:ext cx="1828800" cy="292608"/>
           </a:xfrm>
           <a:prstGeom prst="rect">
@@ -30724,13 +31553,13 @@
             <a:r>
               <a:rPr lang="en-US" sz="1300" b="1" dirty="0">
                 <a:solidFill>
-                  <a:srgbClr val="0F766E"/>
+                  <a:srgbClr val="9D174D"/>
                 </a:solidFill>
                 <a:latin typeface="Trebuchet MS" pitchFamily="34" charset="0"/>
                 <a:ea typeface="Trebuchet MS" pitchFamily="34" charset="-122"/>
                 <a:cs typeface="Trebuchet MS" pitchFamily="34" charset="-120"/>
               </a:rPr>
-              <a:t>dict</a:t>
+              <a:t>at</a:t>
             </a:r>
             <a:endParaRPr lang="en-US" sz="1300" dirty="0"/>
           </a:p>
@@ -30744,7 +31573,7 @@
         </p:nvSpPr>
         <p:spPr>
           <a:xfrm>
-            <a:off x="5803392" y="2569464"/>
+            <a:off x="4370832" y="2569464"/>
             <a:ext cx="1828800" cy="201168"/>
           </a:xfrm>
           <a:prstGeom prst="rect">
@@ -30769,7 +31598,7 @@
                 <a:ea typeface="Calibri" pitchFamily="34" charset="-122"/>
                 <a:cs typeface="Calibri" pitchFamily="34" charset="-120"/>
               </a:rPr>
-              <a:t>say, speak</a:t>
+              <a:t>action</a:t>
             </a:r>
             <a:endParaRPr lang="en-US" sz="850" dirty="0"/>
           </a:p>
@@ -30778,6 +31607,118 @@
       <p:sp>
         <p:nvSpPr>
           <p:cNvPr id="22" name="Shape 20"/>
+          <p:cNvSpPr/>
+          <p:nvPr/>
+        </p:nvSpPr>
+        <p:spPr>
+          <a:xfrm>
+            <a:off x="6519672" y="2258568"/>
+            <a:ext cx="1828800" cy="292608"/>
+          </a:xfrm>
+          <a:prstGeom prst="rect">
+            <a:avLst>
+              <a:gd name="adj" fmla="val 25000"/>
+            </a:avLst>
+          </a:prstGeom>
+          <a:solidFill>
+            <a:srgbClr val="FCE7F3"/>
+          </a:solidFill>
+          <a:ln w="19050">
+            <a:solidFill>
+              <a:srgbClr val="DB2777"/>
+            </a:solidFill>
+            <a:prstDash val="solid"/>
+          </a:ln>
+          <a:effectLst>
+            <a:outerShdw sx="100000" sy="100000" kx="0" ky="0" algn="bl" rotWithShape="0" blurRad="101600" dist="38100" dir="8100000">
+              <a:srgbClr val="000000">
+                <a:alpha val="12000"/>
+              </a:srgbClr>
+            </a:outerShdw>
+          </a:effectLst>
+        </p:spPr>
+      </p:sp>
+      <p:sp>
+        <p:nvSpPr>
+          <p:cNvPr id="23" name="Text 21"/>
+          <p:cNvSpPr/>
+          <p:nvPr/>
+        </p:nvSpPr>
+        <p:spPr>
+          <a:xfrm>
+            <a:off x="6519672" y="2258568"/>
+            <a:ext cx="1828800" cy="292608"/>
+          </a:xfrm>
+          <a:prstGeom prst="rect">
+            <a:avLst/>
+          </a:prstGeom>
+          <a:noFill/>
+          <a:ln/>
+        </p:spPr>
+        <p:txBody>
+          <a:bodyPr wrap="square" lIns="0" tIns="0" rIns="0" bIns="0" rtlCol="0" anchor="ctr"/>
+          <a:lstStyle/>
+          <a:p>
+            <a:pPr algn="ctr" indent="0" marL="0">
+              <a:buNone/>
+            </a:pPr>
+            <a:r>
+              <a:rPr lang="en-US" sz="1300" b="1" dirty="0">
+                <a:solidFill>
+                  <a:srgbClr val="9D174D"/>
+                </a:solidFill>
+                <a:latin typeface="Trebuchet MS" pitchFamily="34" charset="0"/>
+                <a:ea typeface="Trebuchet MS" pitchFamily="34" charset="-122"/>
+                <a:cs typeface="Trebuchet MS" pitchFamily="34" charset="-120"/>
+              </a:rPr>
+              <a:t>ion</a:t>
+            </a:r>
+            <a:endParaRPr lang="en-US" sz="1300" dirty="0"/>
+          </a:p>
+        </p:txBody>
+      </p:sp>
+      <p:sp>
+        <p:nvSpPr>
+          <p:cNvPr id="24" name="Text 22"/>
+          <p:cNvSpPr/>
+          <p:nvPr/>
+        </p:nvSpPr>
+        <p:spPr>
+          <a:xfrm>
+            <a:off x="6519672" y="2569464"/>
+            <a:ext cx="1828800" cy="201168"/>
+          </a:xfrm>
+          <a:prstGeom prst="rect">
+            <a:avLst/>
+          </a:prstGeom>
+          <a:noFill/>
+          <a:ln/>
+        </p:spPr>
+        <p:txBody>
+          <a:bodyPr wrap="square" lIns="0" tIns="0" rIns="0" bIns="0" rtlCol="0" anchor="t"/>
+          <a:lstStyle/>
+          <a:p>
+            <a:pPr algn="ctr" indent="0" marL="0">
+              <a:buNone/>
+            </a:pPr>
+            <a:r>
+              <a:rPr lang="en-US" sz="850" dirty="0">
+                <a:solidFill>
+                  <a:srgbClr val="475569"/>
+                </a:solidFill>
+                <a:latin typeface="Calibri" pitchFamily="34" charset="0"/>
+                <a:ea typeface="Calibri" pitchFamily="34" charset="-122"/>
+                <a:cs typeface="Calibri" pitchFamily="34" charset="-120"/>
+              </a:rPr>
+              <a:t>act or result of</a:t>
+            </a:r>
+            <a:endParaRPr lang="en-US" sz="850" dirty="0"/>
+          </a:p>
+        </p:txBody>
+      </p:sp>
+      <p:sp>
+        <p:nvSpPr>
+          <p:cNvPr id="25" name="Shape 23"/>
           <p:cNvSpPr/>
           <p:nvPr/>
         </p:nvSpPr>
@@ -30804,7 +31745,7 @@
       </p:sp>
       <p:sp>
         <p:nvSpPr>
-          <p:cNvPr id="23" name="Text 21"/>
+          <p:cNvPr id="26" name="Text 24"/>
           <p:cNvSpPr/>
           <p:nvPr/>
         </p:nvSpPr>
@@ -30843,7 +31784,7 @@
       </p:sp>
       <p:sp>
         <p:nvSpPr>
-          <p:cNvPr id="24" name="Shape 22"/>
+          <p:cNvPr id="27" name="Shape 25"/>
           <p:cNvSpPr/>
           <p:nvPr/>
         </p:nvSpPr>
@@ -30870,13 +31811,13 @@
       </p:sp>
       <p:sp>
         <p:nvSpPr>
-          <p:cNvPr id="25" name="Shape 23"/>
-          <p:cNvSpPr/>
-          <p:nvPr/>
-        </p:nvSpPr>
-        <p:spPr>
-          <a:xfrm>
-            <a:off x="2999232" y="3364992"/>
+          <p:cNvPr id="28" name="Shape 26"/>
+          <p:cNvSpPr/>
+          <p:nvPr/>
+        </p:nvSpPr>
+        <p:spPr>
+          <a:xfrm>
+            <a:off x="2313432" y="3364992"/>
             <a:ext cx="1645920" cy="475488"/>
           </a:xfrm>
           <a:prstGeom prst="rect">
@@ -30897,13 +31838,13 @@
       </p:sp>
       <p:sp>
         <p:nvSpPr>
-          <p:cNvPr id="26" name="Text 24"/>
-          <p:cNvSpPr/>
-          <p:nvPr/>
-        </p:nvSpPr>
-        <p:spPr>
-          <a:xfrm>
-            <a:off x="2999232" y="3364992"/>
+          <p:cNvPr id="29" name="Text 27"/>
+          <p:cNvSpPr/>
+          <p:nvPr/>
+        </p:nvSpPr>
+        <p:spPr>
+          <a:xfrm>
+            <a:off x="2313432" y="3364992"/>
             <a:ext cx="1645920" cy="475488"/>
           </a:xfrm>
           <a:prstGeom prst="rect">
@@ -30928,7 +31869,7 @@
                 <a:ea typeface="Trebuchet MS" pitchFamily="34" charset="-122"/>
                 <a:cs typeface="Trebuchet MS" pitchFamily="34" charset="-120"/>
               </a:rPr>
-              <a:t>e</a:t>
+              <a:t>dic</a:t>
             </a:r>
             <a:endParaRPr lang="en-US" sz="1400" dirty="0"/>
           </a:p>
@@ -30936,14 +31877,14 @@
       </p:sp>
       <p:sp>
         <p:nvSpPr>
-          <p:cNvPr id="27" name="Text 25"/>
-          <p:cNvSpPr/>
-          <p:nvPr/>
-        </p:nvSpPr>
-        <p:spPr>
-          <a:xfrm>
-            <a:off x="4645152" y="3364992"/>
-            <a:ext cx="1097280" cy="475488"/>
+          <p:cNvPr id="30" name="Text 28"/>
+          <p:cNvSpPr/>
+          <p:nvPr/>
+        </p:nvSpPr>
+        <p:spPr>
+          <a:xfrm>
+            <a:off x="3959352" y="3364992"/>
+            <a:ext cx="411480" cy="475488"/>
           </a:xfrm>
           <a:prstGeom prst="rect">
             <a:avLst/>
@@ -30975,13 +31916,13 @@
       </p:sp>
       <p:sp>
         <p:nvSpPr>
-          <p:cNvPr id="28" name="Shape 26"/>
-          <p:cNvSpPr/>
-          <p:nvPr/>
-        </p:nvSpPr>
-        <p:spPr>
-          <a:xfrm>
-            <a:off x="5742432" y="3364992"/>
+          <p:cNvPr id="31" name="Shape 29"/>
+          <p:cNvSpPr/>
+          <p:nvPr/>
+        </p:nvSpPr>
+        <p:spPr>
+          <a:xfrm>
+            <a:off x="4370832" y="3364992"/>
             <a:ext cx="1645920" cy="475488"/>
           </a:xfrm>
           <a:prstGeom prst="rect">
@@ -31002,13 +31943,13 @@
       </p:sp>
       <p:sp>
         <p:nvSpPr>
-          <p:cNvPr id="29" name="Text 27"/>
-          <p:cNvSpPr/>
-          <p:nvPr/>
-        </p:nvSpPr>
-        <p:spPr>
-          <a:xfrm>
-            <a:off x="5742432" y="3364992"/>
+          <p:cNvPr id="32" name="Text 30"/>
+          <p:cNvSpPr/>
+          <p:nvPr/>
+        </p:nvSpPr>
+        <p:spPr>
+          <a:xfrm>
+            <a:off x="4370832" y="3364992"/>
             <a:ext cx="1645920" cy="475488"/>
           </a:xfrm>
           <a:prstGeom prst="rect">
@@ -31033,7 +31974,7 @@
                 <a:ea typeface="Trebuchet MS" pitchFamily="34" charset="-122"/>
                 <a:cs typeface="Trebuchet MS" pitchFamily="34" charset="-120"/>
               </a:rPr>
-              <a:t>dict</a:t>
+              <a:t>ta</a:t>
             </a:r>
             <a:endParaRPr lang="en-US" sz="1400" dirty="0"/>
           </a:p>
@@ -31041,7 +31982,112 @@
       </p:sp>
       <p:sp>
         <p:nvSpPr>
-          <p:cNvPr id="30" name="Shape 28"/>
+          <p:cNvPr id="33" name="Text 31"/>
+          <p:cNvSpPr/>
+          <p:nvPr/>
+        </p:nvSpPr>
+        <p:spPr>
+          <a:xfrm>
+            <a:off x="6016752" y="3364992"/>
+            <a:ext cx="411480" cy="475488"/>
+          </a:xfrm>
+          <a:prstGeom prst="rect">
+            <a:avLst/>
+          </a:prstGeom>
+          <a:noFill/>
+          <a:ln/>
+        </p:spPr>
+        <p:txBody>
+          <a:bodyPr wrap="square" lIns="0" tIns="0" rIns="0" bIns="0" rtlCol="0" anchor="ctr"/>
+          <a:lstStyle/>
+          <a:p>
+            <a:pPr algn="ctr" indent="0" marL="0">
+              <a:buNone/>
+            </a:pPr>
+            <a:r>
+              <a:rPr lang="en-US" sz="1600" b="1" dirty="0">
+                <a:solidFill>
+                  <a:srgbClr val="0D9488"/>
+                </a:solidFill>
+                <a:latin typeface="Trebuchet MS" pitchFamily="34" charset="0"/>
+                <a:ea typeface="Trebuchet MS" pitchFamily="34" charset="-122"/>
+                <a:cs typeface="Trebuchet MS" pitchFamily="34" charset="-120"/>
+              </a:rPr>
+              <a:t>·</a:t>
+            </a:r>
+            <a:endParaRPr lang="en-US" sz="1600" dirty="0"/>
+          </a:p>
+        </p:txBody>
+      </p:sp>
+      <p:sp>
+        <p:nvSpPr>
+          <p:cNvPr id="34" name="Shape 32"/>
+          <p:cNvSpPr/>
+          <p:nvPr/>
+        </p:nvSpPr>
+        <p:spPr>
+          <a:xfrm>
+            <a:off x="6428232" y="3364992"/>
+            <a:ext cx="1645920" cy="475488"/>
+          </a:xfrm>
+          <a:prstGeom prst="rect">
+            <a:avLst>
+              <a:gd name="adj" fmla="val 9615"/>
+            </a:avLst>
+          </a:prstGeom>
+          <a:solidFill>
+            <a:srgbClr val="FFFFFF"/>
+          </a:solidFill>
+          <a:ln w="12700">
+            <a:solidFill>
+              <a:srgbClr val="0D9488"/>
+            </a:solidFill>
+            <a:prstDash val="solid"/>
+          </a:ln>
+        </p:spPr>
+      </p:sp>
+      <p:sp>
+        <p:nvSpPr>
+          <p:cNvPr id="35" name="Text 33"/>
+          <p:cNvSpPr/>
+          <p:nvPr/>
+        </p:nvSpPr>
+        <p:spPr>
+          <a:xfrm>
+            <a:off x="6428232" y="3364992"/>
+            <a:ext cx="1645920" cy="475488"/>
+          </a:xfrm>
+          <a:prstGeom prst="rect">
+            <a:avLst/>
+          </a:prstGeom>
+          <a:noFill/>
+          <a:ln/>
+        </p:spPr>
+        <p:txBody>
+          <a:bodyPr wrap="square" lIns="0" tIns="0" rIns="0" bIns="0" rtlCol="0" anchor="ctr"/>
+          <a:lstStyle/>
+          <a:p>
+            <a:pPr algn="ctr" indent="0" marL="0">
+              <a:buNone/>
+            </a:pPr>
+            <a:r>
+              <a:rPr lang="en-US" sz="1400" b="1" dirty="0">
+                <a:solidFill>
+                  <a:srgbClr val="0D9488"/>
+                </a:solidFill>
+                <a:latin typeface="Trebuchet MS" pitchFamily="34" charset="0"/>
+                <a:ea typeface="Trebuchet MS" pitchFamily="34" charset="-122"/>
+                <a:cs typeface="Trebuchet MS" pitchFamily="34" charset="-120"/>
+              </a:rPr>
+              <a:t>tion</a:t>
+            </a:r>
+            <a:endParaRPr lang="en-US" sz="1400" dirty="0"/>
+          </a:p>
+        </p:txBody>
+      </p:sp>
+      <p:sp>
+        <p:nvSpPr>
+          <p:cNvPr id="36" name="Shape 34"/>
           <p:cNvSpPr/>
           <p:nvPr/>
         </p:nvSpPr>
@@ -31068,7 +32114,7 @@
       </p:sp>
       <p:sp>
         <p:nvSpPr>
-          <p:cNvPr id="31" name="Text 29"/>
+          <p:cNvPr id="37" name="Text 35"/>
           <p:cNvSpPr/>
           <p:nvPr/>
         </p:nvSpPr>
@@ -31107,7 +32153,7 @@
       </p:sp>
       <p:sp>
         <p:nvSpPr>
-          <p:cNvPr id="32" name="Shape 30"/>
+          <p:cNvPr id="38" name="Shape 36"/>
           <p:cNvSpPr/>
           <p:nvPr/>
         </p:nvSpPr>
@@ -31134,7 +32180,7 @@
       </p:sp>
       <p:sp>
         <p:nvSpPr>
-          <p:cNvPr id="33" name="Text 31"/>
+          <p:cNvPr id="39" name="Text 37"/>
           <p:cNvSpPr/>
           <p:nvPr/>
         </p:nvSpPr>
@@ -31596,7 +32642,7 @@
                 <a:ea typeface="Trebuchet MS" pitchFamily="34" charset="-122"/>
                 <a:cs typeface="Trebuchet MS" pitchFamily="34" charset="-120"/>
               </a:rPr>
-              <a:t>edict</a:t>
+              <a:t>dictation</a:t>
             </a:r>
             <a:endParaRPr lang="en-US" sz="2800" dirty="0"/>
           </a:p>
@@ -31676,7 +32722,7 @@
         </p:nvSpPr>
         <p:spPr>
           <a:xfrm>
-            <a:off x="2938272" y="2258568"/>
+            <a:off x="2221992" y="2258568"/>
             <a:ext cx="1828800" cy="292608"/>
           </a:xfrm>
           <a:prstGeom prst="rect">
@@ -31685,11 +32731,11 @@
             </a:avLst>
           </a:prstGeom>
           <a:solidFill>
-            <a:srgbClr val="DDD6FE"/>
+            <a:srgbClr val="CCFBF1"/>
           </a:solidFill>
           <a:ln w="19050">
             <a:solidFill>
-              <a:srgbClr val="7C3AED"/>
+              <a:srgbClr val="0D9488"/>
             </a:solidFill>
             <a:prstDash val="solid"/>
           </a:ln>
@@ -31710,7 +32756,7 @@
         </p:nvSpPr>
         <p:spPr>
           <a:xfrm>
-            <a:off x="2938272" y="2258568"/>
+            <a:off x="2221992" y="2258568"/>
             <a:ext cx="1828800" cy="292608"/>
           </a:xfrm>
           <a:prstGeom prst="rect">
@@ -31729,13 +32775,13 @@
             <a:r>
               <a:rPr lang="en-US" sz="1300" b="1" dirty="0">
                 <a:solidFill>
-                  <a:srgbClr val="4C1D95"/>
+                  <a:srgbClr val="0F766E"/>
                 </a:solidFill>
                 <a:latin typeface="Trebuchet MS" pitchFamily="34" charset="0"/>
                 <a:ea typeface="Trebuchet MS" pitchFamily="34" charset="-122"/>
                 <a:cs typeface="Trebuchet MS" pitchFamily="34" charset="-120"/>
               </a:rPr>
-              <a:t>e</a:t>
+              <a:t>dict</a:t>
             </a:r>
             <a:endParaRPr lang="en-US" sz="1300" dirty="0"/>
           </a:p>
@@ -31749,7 +32795,7 @@
         </p:nvSpPr>
         <p:spPr>
           <a:xfrm>
-            <a:off x="2938272" y="2569464"/>
+            <a:off x="2221992" y="2569464"/>
             <a:ext cx="1828800" cy="201168"/>
           </a:xfrm>
           <a:prstGeom prst="rect">
@@ -31774,7 +32820,7 @@
                 <a:ea typeface="Calibri" pitchFamily="34" charset="-122"/>
                 <a:cs typeface="Calibri" pitchFamily="34" charset="-120"/>
               </a:rPr>
-              <a:t>out, from</a:t>
+              <a:t>say, speak</a:t>
             </a:r>
             <a:endParaRPr lang="en-US" sz="850" dirty="0"/>
           </a:p>
@@ -31788,7 +32834,7 @@
         </p:nvSpPr>
         <p:spPr>
           <a:xfrm>
-            <a:off x="5803392" y="2258568"/>
+            <a:off x="4370832" y="2258568"/>
             <a:ext cx="1828800" cy="292608"/>
           </a:xfrm>
           <a:prstGeom prst="rect">
@@ -31797,11 +32843,11 @@
             </a:avLst>
           </a:prstGeom>
           <a:solidFill>
-            <a:srgbClr val="CCFBF1"/>
+            <a:srgbClr val="FCE7F3"/>
           </a:solidFill>
           <a:ln w="19050">
             <a:solidFill>
-              <a:srgbClr val="0D9488"/>
+              <a:srgbClr val="DB2777"/>
             </a:solidFill>
             <a:prstDash val="solid"/>
           </a:ln>
@@ -31822,7 +32868,7 @@
         </p:nvSpPr>
         <p:spPr>
           <a:xfrm>
-            <a:off x="5803392" y="2258568"/>
+            <a:off x="4370832" y="2258568"/>
             <a:ext cx="1828800" cy="292608"/>
           </a:xfrm>
           <a:prstGeom prst="rect">
@@ -31841,13 +32887,13 @@
             <a:r>
               <a:rPr lang="en-US" sz="1300" b="1" dirty="0">
                 <a:solidFill>
-                  <a:srgbClr val="0F766E"/>
+                  <a:srgbClr val="9D174D"/>
                 </a:solidFill>
                 <a:latin typeface="Trebuchet MS" pitchFamily="34" charset="0"/>
                 <a:ea typeface="Trebuchet MS" pitchFamily="34" charset="-122"/>
                 <a:cs typeface="Trebuchet MS" pitchFamily="34" charset="-120"/>
               </a:rPr>
-              <a:t>dict</a:t>
+              <a:t>at</a:t>
             </a:r>
             <a:endParaRPr lang="en-US" sz="1300" dirty="0"/>
           </a:p>
@@ -31861,7 +32907,7 @@
         </p:nvSpPr>
         <p:spPr>
           <a:xfrm>
-            <a:off x="5803392" y="2569464"/>
+            <a:off x="4370832" y="2569464"/>
             <a:ext cx="1828800" cy="201168"/>
           </a:xfrm>
           <a:prstGeom prst="rect">
@@ -31886,7 +32932,7 @@
                 <a:ea typeface="Calibri" pitchFamily="34" charset="-122"/>
                 <a:cs typeface="Calibri" pitchFamily="34" charset="-120"/>
               </a:rPr>
-              <a:t>say, speak</a:t>
+              <a:t>action</a:t>
             </a:r>
             <a:endParaRPr lang="en-US" sz="850" dirty="0"/>
           </a:p>
@@ -31895,6 +32941,118 @@
       <p:sp>
         <p:nvSpPr>
           <p:cNvPr id="22" name="Shape 20"/>
+          <p:cNvSpPr/>
+          <p:nvPr/>
+        </p:nvSpPr>
+        <p:spPr>
+          <a:xfrm>
+            <a:off x="6519672" y="2258568"/>
+            <a:ext cx="1828800" cy="292608"/>
+          </a:xfrm>
+          <a:prstGeom prst="rect">
+            <a:avLst>
+              <a:gd name="adj" fmla="val 25000"/>
+            </a:avLst>
+          </a:prstGeom>
+          <a:solidFill>
+            <a:srgbClr val="FCE7F3"/>
+          </a:solidFill>
+          <a:ln w="19050">
+            <a:solidFill>
+              <a:srgbClr val="DB2777"/>
+            </a:solidFill>
+            <a:prstDash val="solid"/>
+          </a:ln>
+          <a:effectLst>
+            <a:outerShdw sx="100000" sy="100000" kx="0" ky="0" algn="bl" rotWithShape="0" blurRad="101600" dist="38100" dir="8100000">
+              <a:srgbClr val="000000">
+                <a:alpha val="12000"/>
+              </a:srgbClr>
+            </a:outerShdw>
+          </a:effectLst>
+        </p:spPr>
+      </p:sp>
+      <p:sp>
+        <p:nvSpPr>
+          <p:cNvPr id="23" name="Text 21"/>
+          <p:cNvSpPr/>
+          <p:nvPr/>
+        </p:nvSpPr>
+        <p:spPr>
+          <a:xfrm>
+            <a:off x="6519672" y="2258568"/>
+            <a:ext cx="1828800" cy="292608"/>
+          </a:xfrm>
+          <a:prstGeom prst="rect">
+            <a:avLst/>
+          </a:prstGeom>
+          <a:noFill/>
+          <a:ln/>
+        </p:spPr>
+        <p:txBody>
+          <a:bodyPr wrap="square" lIns="0" tIns="0" rIns="0" bIns="0" rtlCol="0" anchor="ctr"/>
+          <a:lstStyle/>
+          <a:p>
+            <a:pPr algn="ctr" indent="0" marL="0">
+              <a:buNone/>
+            </a:pPr>
+            <a:r>
+              <a:rPr lang="en-US" sz="1300" b="1" dirty="0">
+                <a:solidFill>
+                  <a:srgbClr val="9D174D"/>
+                </a:solidFill>
+                <a:latin typeface="Trebuchet MS" pitchFamily="34" charset="0"/>
+                <a:ea typeface="Trebuchet MS" pitchFamily="34" charset="-122"/>
+                <a:cs typeface="Trebuchet MS" pitchFamily="34" charset="-120"/>
+              </a:rPr>
+              <a:t>ion</a:t>
+            </a:r>
+            <a:endParaRPr lang="en-US" sz="1300" dirty="0"/>
+          </a:p>
+        </p:txBody>
+      </p:sp>
+      <p:sp>
+        <p:nvSpPr>
+          <p:cNvPr id="24" name="Text 22"/>
+          <p:cNvSpPr/>
+          <p:nvPr/>
+        </p:nvSpPr>
+        <p:spPr>
+          <a:xfrm>
+            <a:off x="6519672" y="2569464"/>
+            <a:ext cx="1828800" cy="201168"/>
+          </a:xfrm>
+          <a:prstGeom prst="rect">
+            <a:avLst/>
+          </a:prstGeom>
+          <a:noFill/>
+          <a:ln/>
+        </p:spPr>
+        <p:txBody>
+          <a:bodyPr wrap="square" lIns="0" tIns="0" rIns="0" bIns="0" rtlCol="0" anchor="t"/>
+          <a:lstStyle/>
+          <a:p>
+            <a:pPr algn="ctr" indent="0" marL="0">
+              <a:buNone/>
+            </a:pPr>
+            <a:r>
+              <a:rPr lang="en-US" sz="850" dirty="0">
+                <a:solidFill>
+                  <a:srgbClr val="475569"/>
+                </a:solidFill>
+                <a:latin typeface="Calibri" pitchFamily="34" charset="0"/>
+                <a:ea typeface="Calibri" pitchFamily="34" charset="-122"/>
+                <a:cs typeface="Calibri" pitchFamily="34" charset="-120"/>
+              </a:rPr>
+              <a:t>act or result of</a:t>
+            </a:r>
+            <a:endParaRPr lang="en-US" sz="850" dirty="0"/>
+          </a:p>
+        </p:txBody>
+      </p:sp>
+      <p:sp>
+        <p:nvSpPr>
+          <p:cNvPr id="25" name="Shape 23"/>
           <p:cNvSpPr/>
           <p:nvPr/>
         </p:nvSpPr>
@@ -31921,7 +33079,7 @@
       </p:sp>
       <p:sp>
         <p:nvSpPr>
-          <p:cNvPr id="23" name="Text 21"/>
+          <p:cNvPr id="26" name="Text 24"/>
           <p:cNvSpPr/>
           <p:nvPr/>
         </p:nvSpPr>
@@ -31960,7 +33118,7 @@
       </p:sp>
       <p:sp>
         <p:nvSpPr>
-          <p:cNvPr id="24" name="Shape 22"/>
+          <p:cNvPr id="27" name="Shape 25"/>
           <p:cNvSpPr/>
           <p:nvPr/>
         </p:nvSpPr>
@@ -31987,13 +33145,13 @@
       </p:sp>
       <p:sp>
         <p:nvSpPr>
-          <p:cNvPr id="25" name="Shape 23"/>
-          <p:cNvSpPr/>
-          <p:nvPr/>
-        </p:nvSpPr>
-        <p:spPr>
-          <a:xfrm>
-            <a:off x="2999232" y="3364992"/>
+          <p:cNvPr id="28" name="Shape 26"/>
+          <p:cNvSpPr/>
+          <p:nvPr/>
+        </p:nvSpPr>
+        <p:spPr>
+          <a:xfrm>
+            <a:off x="2313432" y="3364992"/>
             <a:ext cx="1645920" cy="475488"/>
           </a:xfrm>
           <a:prstGeom prst="rect">
@@ -32014,13 +33172,13 @@
       </p:sp>
       <p:sp>
         <p:nvSpPr>
-          <p:cNvPr id="26" name="Text 24"/>
-          <p:cNvSpPr/>
-          <p:nvPr/>
-        </p:nvSpPr>
-        <p:spPr>
-          <a:xfrm>
-            <a:off x="2999232" y="3364992"/>
+          <p:cNvPr id="29" name="Text 27"/>
+          <p:cNvSpPr/>
+          <p:nvPr/>
+        </p:nvSpPr>
+        <p:spPr>
+          <a:xfrm>
+            <a:off x="2313432" y="3364992"/>
             <a:ext cx="1645920" cy="475488"/>
           </a:xfrm>
           <a:prstGeom prst="rect">
@@ -32045,7 +33203,7 @@
                 <a:ea typeface="Trebuchet MS" pitchFamily="34" charset="-122"/>
                 <a:cs typeface="Trebuchet MS" pitchFamily="34" charset="-120"/>
               </a:rPr>
-              <a:t>e</a:t>
+              <a:t>dic</a:t>
             </a:r>
             <a:endParaRPr lang="en-US" sz="1400" dirty="0"/>
           </a:p>
@@ -32053,14 +33211,14 @@
       </p:sp>
       <p:sp>
         <p:nvSpPr>
-          <p:cNvPr id="27" name="Text 25"/>
-          <p:cNvSpPr/>
-          <p:nvPr/>
-        </p:nvSpPr>
-        <p:spPr>
-          <a:xfrm>
-            <a:off x="4645152" y="3364992"/>
-            <a:ext cx="1097280" cy="475488"/>
+          <p:cNvPr id="30" name="Text 28"/>
+          <p:cNvSpPr/>
+          <p:nvPr/>
+        </p:nvSpPr>
+        <p:spPr>
+          <a:xfrm>
+            <a:off x="3959352" y="3364992"/>
+            <a:ext cx="411480" cy="475488"/>
           </a:xfrm>
           <a:prstGeom prst="rect">
             <a:avLst/>
@@ -32092,13 +33250,13 @@
       </p:sp>
       <p:sp>
         <p:nvSpPr>
-          <p:cNvPr id="28" name="Shape 26"/>
-          <p:cNvSpPr/>
-          <p:nvPr/>
-        </p:nvSpPr>
-        <p:spPr>
-          <a:xfrm>
-            <a:off x="5742432" y="3364992"/>
+          <p:cNvPr id="31" name="Shape 29"/>
+          <p:cNvSpPr/>
+          <p:nvPr/>
+        </p:nvSpPr>
+        <p:spPr>
+          <a:xfrm>
+            <a:off x="4370832" y="3364992"/>
             <a:ext cx="1645920" cy="475488"/>
           </a:xfrm>
           <a:prstGeom prst="rect">
@@ -32119,13 +33277,13 @@
       </p:sp>
       <p:sp>
         <p:nvSpPr>
-          <p:cNvPr id="29" name="Text 27"/>
-          <p:cNvSpPr/>
-          <p:nvPr/>
-        </p:nvSpPr>
-        <p:spPr>
-          <a:xfrm>
-            <a:off x="5742432" y="3364992"/>
+          <p:cNvPr id="32" name="Text 30"/>
+          <p:cNvSpPr/>
+          <p:nvPr/>
+        </p:nvSpPr>
+        <p:spPr>
+          <a:xfrm>
+            <a:off x="4370832" y="3364992"/>
             <a:ext cx="1645920" cy="475488"/>
           </a:xfrm>
           <a:prstGeom prst="rect">
@@ -32150,7 +33308,7 @@
                 <a:ea typeface="Trebuchet MS" pitchFamily="34" charset="-122"/>
                 <a:cs typeface="Trebuchet MS" pitchFamily="34" charset="-120"/>
               </a:rPr>
-              <a:t>dict</a:t>
+              <a:t>ta</a:t>
             </a:r>
             <a:endParaRPr lang="en-US" sz="1400" dirty="0"/>
           </a:p>
@@ -32158,7 +33316,112 @@
       </p:sp>
       <p:sp>
         <p:nvSpPr>
-          <p:cNvPr id="30" name="Shape 28"/>
+          <p:cNvPr id="33" name="Text 31"/>
+          <p:cNvSpPr/>
+          <p:nvPr/>
+        </p:nvSpPr>
+        <p:spPr>
+          <a:xfrm>
+            <a:off x="6016752" y="3364992"/>
+            <a:ext cx="411480" cy="475488"/>
+          </a:xfrm>
+          <a:prstGeom prst="rect">
+            <a:avLst/>
+          </a:prstGeom>
+          <a:noFill/>
+          <a:ln/>
+        </p:spPr>
+        <p:txBody>
+          <a:bodyPr wrap="square" lIns="0" tIns="0" rIns="0" bIns="0" rtlCol="0" anchor="ctr"/>
+          <a:lstStyle/>
+          <a:p>
+            <a:pPr algn="ctr" indent="0" marL="0">
+              <a:buNone/>
+            </a:pPr>
+            <a:r>
+              <a:rPr lang="en-US" sz="1600" b="1" dirty="0">
+                <a:solidFill>
+                  <a:srgbClr val="0D9488"/>
+                </a:solidFill>
+                <a:latin typeface="Trebuchet MS" pitchFamily="34" charset="0"/>
+                <a:ea typeface="Trebuchet MS" pitchFamily="34" charset="-122"/>
+                <a:cs typeface="Trebuchet MS" pitchFamily="34" charset="-120"/>
+              </a:rPr>
+              <a:t>·</a:t>
+            </a:r>
+            <a:endParaRPr lang="en-US" sz="1600" dirty="0"/>
+          </a:p>
+        </p:txBody>
+      </p:sp>
+      <p:sp>
+        <p:nvSpPr>
+          <p:cNvPr id="34" name="Shape 32"/>
+          <p:cNvSpPr/>
+          <p:nvPr/>
+        </p:nvSpPr>
+        <p:spPr>
+          <a:xfrm>
+            <a:off x="6428232" y="3364992"/>
+            <a:ext cx="1645920" cy="475488"/>
+          </a:xfrm>
+          <a:prstGeom prst="rect">
+            <a:avLst>
+              <a:gd name="adj" fmla="val 9615"/>
+            </a:avLst>
+          </a:prstGeom>
+          <a:solidFill>
+            <a:srgbClr val="FFFFFF"/>
+          </a:solidFill>
+          <a:ln w="12700">
+            <a:solidFill>
+              <a:srgbClr val="0D9488"/>
+            </a:solidFill>
+            <a:prstDash val="solid"/>
+          </a:ln>
+        </p:spPr>
+      </p:sp>
+      <p:sp>
+        <p:nvSpPr>
+          <p:cNvPr id="35" name="Text 33"/>
+          <p:cNvSpPr/>
+          <p:nvPr/>
+        </p:nvSpPr>
+        <p:spPr>
+          <a:xfrm>
+            <a:off x="6428232" y="3364992"/>
+            <a:ext cx="1645920" cy="475488"/>
+          </a:xfrm>
+          <a:prstGeom prst="rect">
+            <a:avLst/>
+          </a:prstGeom>
+          <a:noFill/>
+          <a:ln/>
+        </p:spPr>
+        <p:txBody>
+          <a:bodyPr wrap="square" lIns="0" tIns="0" rIns="0" bIns="0" rtlCol="0" anchor="ctr"/>
+          <a:lstStyle/>
+          <a:p>
+            <a:pPr algn="ctr" indent="0" marL="0">
+              <a:buNone/>
+            </a:pPr>
+            <a:r>
+              <a:rPr lang="en-US" sz="1400" b="1" dirty="0">
+                <a:solidFill>
+                  <a:srgbClr val="0D9488"/>
+                </a:solidFill>
+                <a:latin typeface="Trebuchet MS" pitchFamily="34" charset="0"/>
+                <a:ea typeface="Trebuchet MS" pitchFamily="34" charset="-122"/>
+                <a:cs typeface="Trebuchet MS" pitchFamily="34" charset="-120"/>
+              </a:rPr>
+              <a:t>tion</a:t>
+            </a:r>
+            <a:endParaRPr lang="en-US" sz="1400" dirty="0"/>
+          </a:p>
+        </p:txBody>
+      </p:sp>
+      <p:sp>
+        <p:nvSpPr>
+          <p:cNvPr id="36" name="Shape 34"/>
           <p:cNvSpPr/>
           <p:nvPr/>
         </p:nvSpPr>
@@ -32185,7 +33448,7 @@
       </p:sp>
       <p:sp>
         <p:nvSpPr>
-          <p:cNvPr id="31" name="Text 29"/>
+          <p:cNvPr id="37" name="Text 35"/>
           <p:cNvSpPr/>
           <p:nvPr/>
         </p:nvSpPr>
@@ -32224,7 +33487,7 @@
       </p:sp>
       <p:sp>
         <p:nvSpPr>
-          <p:cNvPr id="32" name="Shape 30"/>
+          <p:cNvPr id="38" name="Shape 36"/>
           <p:cNvSpPr/>
           <p:nvPr/>
         </p:nvSpPr>
@@ -32251,13 +33514,13 @@
       </p:sp>
       <p:sp>
         <p:nvSpPr>
-          <p:cNvPr id="33" name="Shape 31"/>
-          <p:cNvSpPr/>
-          <p:nvPr/>
-        </p:nvSpPr>
-        <p:spPr>
-          <a:xfrm>
-            <a:off x="2427732" y="4169664"/>
+          <p:cNvPr id="39" name="Shape 37"/>
+          <p:cNvSpPr/>
+          <p:nvPr/>
+        </p:nvSpPr>
+        <p:spPr>
+          <a:xfrm>
+            <a:off x="2023872" y="4169664"/>
             <a:ext cx="685800" cy="384048"/>
           </a:xfrm>
           <a:prstGeom prst="rect">
@@ -32278,13 +33541,13 @@
       </p:sp>
       <p:sp>
         <p:nvSpPr>
-          <p:cNvPr id="34" name="Text 32"/>
-          <p:cNvSpPr/>
-          <p:nvPr/>
-        </p:nvSpPr>
-        <p:spPr>
-          <a:xfrm>
-            <a:off x="2427732" y="4169664"/>
+          <p:cNvPr id="40" name="Text 38"/>
+          <p:cNvSpPr/>
+          <p:nvPr/>
+        </p:nvSpPr>
+        <p:spPr>
+          <a:xfrm>
+            <a:off x="2023872" y="4169664"/>
             <a:ext cx="685800" cy="384048"/>
           </a:xfrm>
           <a:prstGeom prst="rect">
@@ -32309,7 +33572,7 @@
                 <a:ea typeface="Trebuchet MS" pitchFamily="34" charset="-122"/>
                 <a:cs typeface="Trebuchet MS" pitchFamily="34" charset="-120"/>
               </a:rPr>
-              <a:t>e</a:t>
+              <a:t>d</a:t>
             </a:r>
             <a:endParaRPr lang="en-US" sz="900" dirty="0"/>
           </a:p>
@@ -32317,13 +33580,13 @@
       </p:sp>
       <p:sp>
         <p:nvSpPr>
-          <p:cNvPr id="35" name="Shape 33"/>
-          <p:cNvSpPr/>
-          <p:nvPr/>
-        </p:nvSpPr>
-        <p:spPr>
-          <a:xfrm>
-            <a:off x="3639312" y="4169664"/>
+          <p:cNvPr id="41" name="Shape 39"/>
+          <p:cNvSpPr/>
+          <p:nvPr/>
+        </p:nvSpPr>
+        <p:spPr>
+          <a:xfrm>
+            <a:off x="2831592" y="4169664"/>
             <a:ext cx="685800" cy="384048"/>
           </a:xfrm>
           <a:prstGeom prst="rect">
@@ -32344,13 +33607,13 @@
       </p:sp>
       <p:sp>
         <p:nvSpPr>
-          <p:cNvPr id="36" name="Text 34"/>
-          <p:cNvSpPr/>
-          <p:nvPr/>
-        </p:nvSpPr>
-        <p:spPr>
-          <a:xfrm>
-            <a:off x="3639312" y="4169664"/>
+          <p:cNvPr id="42" name="Text 40"/>
+          <p:cNvSpPr/>
+          <p:nvPr/>
+        </p:nvSpPr>
+        <p:spPr>
+          <a:xfrm>
+            <a:off x="2831592" y="4169664"/>
             <a:ext cx="685800" cy="384048"/>
           </a:xfrm>
           <a:prstGeom prst="rect">
@@ -32375,7 +33638,7 @@
                 <a:ea typeface="Trebuchet MS" pitchFamily="34" charset="-122"/>
                 <a:cs typeface="Trebuchet MS" pitchFamily="34" charset="-120"/>
               </a:rPr>
-              <a:t>d</a:t>
+              <a:t>i</a:t>
             </a:r>
             <a:endParaRPr lang="en-US" sz="900" dirty="0"/>
           </a:p>
@@ -32383,13 +33646,13 @@
       </p:sp>
       <p:sp>
         <p:nvSpPr>
-          <p:cNvPr id="37" name="Shape 35"/>
-          <p:cNvSpPr/>
-          <p:nvPr/>
-        </p:nvSpPr>
-        <p:spPr>
-          <a:xfrm>
-            <a:off x="4850892" y="4169664"/>
+          <p:cNvPr id="43" name="Shape 41"/>
+          <p:cNvSpPr/>
+          <p:nvPr/>
+        </p:nvSpPr>
+        <p:spPr>
+          <a:xfrm>
+            <a:off x="3639312" y="4169664"/>
             <a:ext cx="685800" cy="384048"/>
           </a:xfrm>
           <a:prstGeom prst="rect">
@@ -32410,13 +33673,13 @@
       </p:sp>
       <p:sp>
         <p:nvSpPr>
-          <p:cNvPr id="38" name="Text 36"/>
-          <p:cNvSpPr/>
-          <p:nvPr/>
-        </p:nvSpPr>
-        <p:spPr>
-          <a:xfrm>
-            <a:off x="4850892" y="4169664"/>
+          <p:cNvPr id="44" name="Text 42"/>
+          <p:cNvSpPr/>
+          <p:nvPr/>
+        </p:nvSpPr>
+        <p:spPr>
+          <a:xfrm>
+            <a:off x="3639312" y="4169664"/>
             <a:ext cx="685800" cy="384048"/>
           </a:xfrm>
           <a:prstGeom prst="rect">
@@ -32441,7 +33704,7 @@
                 <a:ea typeface="Trebuchet MS" pitchFamily="34" charset="-122"/>
                 <a:cs typeface="Trebuchet MS" pitchFamily="34" charset="-120"/>
               </a:rPr>
-              <a:t>i</a:t>
+              <a:t>c</a:t>
             </a:r>
             <a:endParaRPr lang="en-US" sz="900" dirty="0"/>
           </a:p>
@@ -32449,13 +33712,52 @@
       </p:sp>
       <p:sp>
         <p:nvSpPr>
-          <p:cNvPr id="39" name="Shape 37"/>
-          <p:cNvSpPr/>
-          <p:nvPr/>
-        </p:nvSpPr>
-        <p:spPr>
-          <a:xfrm>
-            <a:off x="6062472" y="4169664"/>
+          <p:cNvPr id="45" name="Text 43"/>
+          <p:cNvSpPr/>
+          <p:nvPr/>
+        </p:nvSpPr>
+        <p:spPr>
+          <a:xfrm>
+            <a:off x="3639312" y="4572000"/>
+            <a:ext cx="685800" cy="219456"/>
+          </a:xfrm>
+          <a:prstGeom prst="rect">
+            <a:avLst/>
+          </a:prstGeom>
+          <a:noFill/>
+          <a:ln/>
+        </p:spPr>
+        <p:txBody>
+          <a:bodyPr wrap="square" lIns="0" tIns="0" rIns="0" bIns="0" rtlCol="0" anchor="t"/>
+          <a:lstStyle/>
+          <a:p>
+            <a:pPr algn="ctr" indent="0" marL="0">
+              <a:buNone/>
+            </a:pPr>
+            <a:r>
+              <a:rPr lang="en-US" sz="750" i="1" dirty="0">
+                <a:solidFill>
+                  <a:srgbClr val="94A3B8"/>
+                </a:solidFill>
+                <a:latin typeface="Calibri" pitchFamily="34" charset="0"/>
+                <a:ea typeface="Calibri" pitchFamily="34" charset="-122"/>
+                <a:cs typeface="Calibri" pitchFamily="34" charset="-120"/>
+              </a:rPr>
+              <a:t>/k/</a:t>
+            </a:r>
+            <a:endParaRPr lang="en-US" sz="750" dirty="0"/>
+          </a:p>
+        </p:txBody>
+      </p:sp>
+      <p:sp>
+        <p:nvSpPr>
+          <p:cNvPr id="46" name="Shape 44"/>
+          <p:cNvSpPr/>
+          <p:nvPr/>
+        </p:nvSpPr>
+        <p:spPr>
+          <a:xfrm>
+            <a:off x="4447032" y="4169664"/>
             <a:ext cx="685800" cy="384048"/>
           </a:xfrm>
           <a:prstGeom prst="rect">
@@ -32476,13 +33778,13 @@
       </p:sp>
       <p:sp>
         <p:nvSpPr>
-          <p:cNvPr id="40" name="Text 38"/>
-          <p:cNvSpPr/>
-          <p:nvPr/>
-        </p:nvSpPr>
-        <p:spPr>
-          <a:xfrm>
-            <a:off x="6062472" y="4169664"/>
+          <p:cNvPr id="47" name="Text 45"/>
+          <p:cNvSpPr/>
+          <p:nvPr/>
+        </p:nvSpPr>
+        <p:spPr>
+          <a:xfrm>
+            <a:off x="4447032" y="4169664"/>
             <a:ext cx="685800" cy="384048"/>
           </a:xfrm>
           <a:prstGeom prst="rect">
@@ -32507,7 +33809,7 @@
                 <a:ea typeface="Trebuchet MS" pitchFamily="34" charset="-122"/>
                 <a:cs typeface="Trebuchet MS" pitchFamily="34" charset="-120"/>
               </a:rPr>
-              <a:t>c</a:t>
+              <a:t>t</a:t>
             </a:r>
             <a:endParaRPr lang="en-US" sz="900" dirty="0"/>
           </a:p>
@@ -32515,13 +33817,211 @@
       </p:sp>
       <p:sp>
         <p:nvSpPr>
-          <p:cNvPr id="41" name="Text 39"/>
-          <p:cNvSpPr/>
-          <p:nvPr/>
-        </p:nvSpPr>
-        <p:spPr>
-          <a:xfrm>
-            <a:off x="6062472" y="4572000"/>
+          <p:cNvPr id="48" name="Shape 46"/>
+          <p:cNvSpPr/>
+          <p:nvPr/>
+        </p:nvSpPr>
+        <p:spPr>
+          <a:xfrm>
+            <a:off x="5254752" y="4169664"/>
+            <a:ext cx="685800" cy="384048"/>
+          </a:xfrm>
+          <a:prstGeom prst="rect">
+            <a:avLst>
+              <a:gd name="adj" fmla="val 9524"/>
+            </a:avLst>
+          </a:prstGeom>
+          <a:solidFill>
+            <a:srgbClr val="FFFFFF"/>
+          </a:solidFill>
+          <a:ln w="12700">
+            <a:solidFill>
+              <a:srgbClr val="DB2777"/>
+            </a:solidFill>
+            <a:prstDash val="solid"/>
+          </a:ln>
+        </p:spPr>
+      </p:sp>
+      <p:sp>
+        <p:nvSpPr>
+          <p:cNvPr id="49" name="Text 47"/>
+          <p:cNvSpPr/>
+          <p:nvPr/>
+        </p:nvSpPr>
+        <p:spPr>
+          <a:xfrm>
+            <a:off x="5254752" y="4169664"/>
+            <a:ext cx="685800" cy="384048"/>
+          </a:xfrm>
+          <a:prstGeom prst="rect">
+            <a:avLst/>
+          </a:prstGeom>
+          <a:noFill/>
+          <a:ln/>
+        </p:spPr>
+        <p:txBody>
+          <a:bodyPr wrap="square" lIns="0" tIns="0" rIns="0" bIns="0" rtlCol="0" anchor="ctr"/>
+          <a:lstStyle/>
+          <a:p>
+            <a:pPr algn="ctr" indent="0" marL="0">
+              <a:buNone/>
+            </a:pPr>
+            <a:r>
+              <a:rPr lang="en-US" sz="900" b="1" dirty="0">
+                <a:solidFill>
+                  <a:srgbClr val="9D174D"/>
+                </a:solidFill>
+                <a:latin typeface="Trebuchet MS" pitchFamily="34" charset="0"/>
+                <a:ea typeface="Trebuchet MS" pitchFamily="34" charset="-122"/>
+                <a:cs typeface="Trebuchet MS" pitchFamily="34" charset="-120"/>
+              </a:rPr>
+              <a:t>a</a:t>
+            </a:r>
+            <a:endParaRPr lang="en-US" sz="900" dirty="0"/>
+          </a:p>
+        </p:txBody>
+      </p:sp>
+      <p:sp>
+        <p:nvSpPr>
+          <p:cNvPr id="50" name="Shape 48"/>
+          <p:cNvSpPr/>
+          <p:nvPr/>
+        </p:nvSpPr>
+        <p:spPr>
+          <a:xfrm>
+            <a:off x="6062472" y="4169664"/>
+            <a:ext cx="685800" cy="384048"/>
+          </a:xfrm>
+          <a:prstGeom prst="rect">
+            <a:avLst>
+              <a:gd name="adj" fmla="val 9524"/>
+            </a:avLst>
+          </a:prstGeom>
+          <a:solidFill>
+            <a:srgbClr val="FFFFFF"/>
+          </a:solidFill>
+          <a:ln w="12700">
+            <a:solidFill>
+              <a:srgbClr val="DB2777"/>
+            </a:solidFill>
+            <a:prstDash val="solid"/>
+          </a:ln>
+        </p:spPr>
+      </p:sp>
+      <p:sp>
+        <p:nvSpPr>
+          <p:cNvPr id="51" name="Text 49"/>
+          <p:cNvSpPr/>
+          <p:nvPr/>
+        </p:nvSpPr>
+        <p:spPr>
+          <a:xfrm>
+            <a:off x="6062472" y="4169664"/>
+            <a:ext cx="685800" cy="384048"/>
+          </a:xfrm>
+          <a:prstGeom prst="rect">
+            <a:avLst/>
+          </a:prstGeom>
+          <a:noFill/>
+          <a:ln/>
+        </p:spPr>
+        <p:txBody>
+          <a:bodyPr wrap="square" lIns="0" tIns="0" rIns="0" bIns="0" rtlCol="0" anchor="ctr"/>
+          <a:lstStyle/>
+          <a:p>
+            <a:pPr algn="ctr" indent="0" marL="0">
+              <a:buNone/>
+            </a:pPr>
+            <a:r>
+              <a:rPr lang="en-US" sz="900" b="1" dirty="0">
+                <a:solidFill>
+                  <a:srgbClr val="9D174D"/>
+                </a:solidFill>
+                <a:latin typeface="Trebuchet MS" pitchFamily="34" charset="0"/>
+                <a:ea typeface="Trebuchet MS" pitchFamily="34" charset="-122"/>
+                <a:cs typeface="Trebuchet MS" pitchFamily="34" charset="-120"/>
+              </a:rPr>
+              <a:t>t</a:t>
+            </a:r>
+            <a:endParaRPr lang="en-US" sz="900" dirty="0"/>
+          </a:p>
+        </p:txBody>
+      </p:sp>
+      <p:sp>
+        <p:nvSpPr>
+          <p:cNvPr id="52" name="Shape 50"/>
+          <p:cNvSpPr/>
+          <p:nvPr/>
+        </p:nvSpPr>
+        <p:spPr>
+          <a:xfrm>
+            <a:off x="6870192" y="4169664"/>
+            <a:ext cx="685800" cy="384048"/>
+          </a:xfrm>
+          <a:prstGeom prst="rect">
+            <a:avLst>
+              <a:gd name="adj" fmla="val 9524"/>
+            </a:avLst>
+          </a:prstGeom>
+          <a:solidFill>
+            <a:srgbClr val="FFFFFF"/>
+          </a:solidFill>
+          <a:ln w="12700">
+            <a:solidFill>
+              <a:srgbClr val="DB2777"/>
+            </a:solidFill>
+            <a:prstDash val="solid"/>
+          </a:ln>
+        </p:spPr>
+      </p:sp>
+      <p:sp>
+        <p:nvSpPr>
+          <p:cNvPr id="53" name="Text 51"/>
+          <p:cNvSpPr/>
+          <p:nvPr/>
+        </p:nvSpPr>
+        <p:spPr>
+          <a:xfrm>
+            <a:off x="6870192" y="4169664"/>
+            <a:ext cx="685800" cy="384048"/>
+          </a:xfrm>
+          <a:prstGeom prst="rect">
+            <a:avLst/>
+          </a:prstGeom>
+          <a:noFill/>
+          <a:ln/>
+        </p:spPr>
+        <p:txBody>
+          <a:bodyPr wrap="square" lIns="0" tIns="0" rIns="0" bIns="0" rtlCol="0" anchor="ctr"/>
+          <a:lstStyle/>
+          <a:p>
+            <a:pPr algn="ctr" indent="0" marL="0">
+              <a:buNone/>
+            </a:pPr>
+            <a:r>
+              <a:rPr lang="en-US" sz="900" b="1" dirty="0">
+                <a:solidFill>
+                  <a:srgbClr val="9D174D"/>
+                </a:solidFill>
+                <a:latin typeface="Trebuchet MS" pitchFamily="34" charset="0"/>
+                <a:ea typeface="Trebuchet MS" pitchFamily="34" charset="-122"/>
+                <a:cs typeface="Trebuchet MS" pitchFamily="34" charset="-120"/>
+              </a:rPr>
+              <a:t>io</a:t>
+            </a:r>
+            <a:endParaRPr lang="en-US" sz="900" dirty="0"/>
+          </a:p>
+        </p:txBody>
+      </p:sp>
+      <p:sp>
+        <p:nvSpPr>
+          <p:cNvPr id="54" name="Text 52"/>
+          <p:cNvSpPr/>
+          <p:nvPr/>
+        </p:nvSpPr>
+        <p:spPr>
+          <a:xfrm>
+            <a:off x="6870192" y="4572000"/>
             <a:ext cx="685800" cy="219456"/>
           </a:xfrm>
           <a:prstGeom prst="rect">
@@ -32546,7 +34046,7 @@
                 <a:ea typeface="Calibri" pitchFamily="34" charset="-122"/>
                 <a:cs typeface="Calibri" pitchFamily="34" charset="-120"/>
               </a:rPr>
-              <a:t>/k/</a:t>
+              <a:t>/sh/</a:t>
             </a:r>
             <a:endParaRPr lang="en-US" sz="750" dirty="0"/>
           </a:p>
@@ -32554,13 +34054,13 @@
       </p:sp>
       <p:sp>
         <p:nvSpPr>
-          <p:cNvPr id="42" name="Shape 40"/>
-          <p:cNvSpPr/>
-          <p:nvPr/>
-        </p:nvSpPr>
-        <p:spPr>
-          <a:xfrm>
-            <a:off x="7274052" y="4169664"/>
+          <p:cNvPr id="55" name="Shape 53"/>
+          <p:cNvSpPr/>
+          <p:nvPr/>
+        </p:nvSpPr>
+        <p:spPr>
+          <a:xfrm>
+            <a:off x="7677912" y="4169664"/>
             <a:ext cx="685800" cy="384048"/>
           </a:xfrm>
           <a:prstGeom prst="rect">
@@ -32581,13 +34081,13 @@
       </p:sp>
       <p:sp>
         <p:nvSpPr>
-          <p:cNvPr id="43" name="Text 41"/>
-          <p:cNvSpPr/>
-          <p:nvPr/>
-        </p:nvSpPr>
-        <p:spPr>
-          <a:xfrm>
-            <a:off x="7274052" y="4169664"/>
+          <p:cNvPr id="56" name="Text 54"/>
+          <p:cNvSpPr/>
+          <p:nvPr/>
+        </p:nvSpPr>
+        <p:spPr>
+          <a:xfrm>
+            <a:off x="7677912" y="4169664"/>
             <a:ext cx="685800" cy="384048"/>
           </a:xfrm>
           <a:prstGeom prst="rect">
@@ -32612,7 +34112,7 @@
                 <a:ea typeface="Trebuchet MS" pitchFamily="34" charset="-122"/>
                 <a:cs typeface="Trebuchet MS" pitchFamily="34" charset="-120"/>
               </a:rPr>
-              <a:t>t</a:t>
+              <a:t>n</a:t>
             </a:r>
             <a:endParaRPr lang="en-US" sz="900" dirty="0"/>
           </a:p>
@@ -34566,7 +36066,7 @@
                 <a:ea typeface="Trebuchet MS" pitchFamily="34" charset="-122"/>
                 <a:cs typeface="Trebuchet MS" pitchFamily="34" charset="-120"/>
               </a:rPr>
-              <a:t>con-</a:t>
+              <a:t>contra-</a:t>
             </a:r>
             <a:endParaRPr lang="en-US" sz="1300" dirty="0"/>
           </a:p>
@@ -34719,7 +36219,7 @@
                 <a:ea typeface="Trebuchet MS" pitchFamily="34" charset="-122"/>
                 <a:cs typeface="Trebuchet MS" pitchFamily="34" charset="-120"/>
               </a:rPr>
-              <a:t>in-</a:t>
+              <a:t>e-</a:t>
             </a:r>
             <a:endParaRPr lang="en-US" sz="1300" dirty="0"/>
           </a:p>
@@ -34872,7 +36372,7 @@
                 <a:ea typeface="Trebuchet MS" pitchFamily="34" charset="-122"/>
                 <a:cs typeface="Trebuchet MS" pitchFamily="34" charset="-120"/>
               </a:rPr>
-              <a:t>e-</a:t>
+              <a:t>in-</a:t>
             </a:r>
             <a:endParaRPr lang="en-US" sz="1300" dirty="0"/>
           </a:p>
@@ -35025,7 +36525,7 @@
                 <a:ea typeface="Trebuchet MS" pitchFamily="34" charset="-122"/>
                 <a:cs typeface="Trebuchet MS" pitchFamily="34" charset="-120"/>
               </a:rPr>
-              <a:t>bene-</a:t>
+              <a:t>vale-</a:t>
             </a:r>
             <a:endParaRPr lang="en-US" sz="1300" dirty="0"/>
           </a:p>
@@ -35114,7 +36614,7 @@
                 <a:ea typeface="Trebuchet MS" pitchFamily="34" charset="-122"/>
                 <a:cs typeface="Trebuchet MS" pitchFamily="34" charset="-120"/>
               </a:rPr>
-              <a:t>-orship</a:t>
+              <a:t>-um</a:t>
             </a:r>
             <a:endParaRPr lang="en-US" sz="1300" dirty="0"/>
           </a:p>
@@ -35219,7 +36719,7 @@
                 <a:ea typeface="Trebuchet MS" pitchFamily="34" charset="-122"/>
                 <a:cs typeface="Trebuchet MS" pitchFamily="34" charset="-120"/>
               </a:rPr>
-              <a:t>dictate</a:t>
+              <a:t>dictionary</a:t>
             </a:r>
             <a:endParaRPr lang="en-US" sz="1200" dirty="0"/>
           </a:p>
@@ -35285,7 +36785,7 @@
                 <a:ea typeface="Trebuchet MS" pitchFamily="34" charset="-122"/>
                 <a:cs typeface="Trebuchet MS" pitchFamily="34" charset="-120"/>
               </a:rPr>
-              <a:t>predict</a:t>
+              <a:t>dictate</a:t>
             </a:r>
             <a:endParaRPr lang="en-US" sz="1200" dirty="0"/>
           </a:p>
@@ -35351,7 +36851,7 @@
                 <a:ea typeface="Trebuchet MS" pitchFamily="34" charset="-122"/>
                 <a:cs typeface="Trebuchet MS" pitchFamily="34" charset="-120"/>
               </a:rPr>
-              <a:t>contradict</a:t>
+              <a:t>predict</a:t>
             </a:r>
             <a:endParaRPr lang="en-US" sz="1200" dirty="0"/>
           </a:p>
@@ -35417,7 +36917,7 @@
                 <a:ea typeface="Trebuchet MS" pitchFamily="34" charset="-122"/>
                 <a:cs typeface="Trebuchet MS" pitchFamily="34" charset="-120"/>
               </a:rPr>
-              <a:t>dictionary</a:t>
+              <a:t>contradict</a:t>
             </a:r>
             <a:endParaRPr lang="en-US" sz="1200" dirty="0"/>
           </a:p>
@@ -35615,7 +37115,7 @@
                 <a:ea typeface="Trebuchet MS" pitchFamily="34" charset="-122"/>
                 <a:cs typeface="Trebuchet MS" pitchFamily="34" charset="-120"/>
               </a:rPr>
-              <a:t>benediction</a:t>
+              <a:t>dictator</a:t>
             </a:r>
             <a:endParaRPr lang="en-US" sz="1200" dirty="0"/>
           </a:p>
@@ -35681,7 +37181,7 @@
                 <a:ea typeface="Trebuchet MS" pitchFamily="34" charset="-122"/>
                 <a:cs typeface="Trebuchet MS" pitchFamily="34" charset="-120"/>
               </a:rPr>
-              <a:t>dictator</a:t>
+              <a:t>prediction</a:t>
             </a:r>
             <a:endParaRPr lang="en-US" sz="1200" dirty="0"/>
           </a:p>
@@ -36869,7 +38369,7 @@
                 <a:ea typeface="Calibri" pitchFamily="34" charset="-122"/>
                 <a:cs typeface="Calibri" pitchFamily="34" charset="-120"/>
               </a:rPr>
-              <a:t>1.  The root 'dict' comes from Latin and means to say or speak.</a:t>
+              <a:t>1.  A dictionary is connected to 'dict' because it contains words and their meanings.</a:t>
             </a:r>
             <a:endParaRPr lang="en-US" sz="1300" dirty="0"/>
           </a:p>
@@ -37008,7 +38508,7 @@
                 <a:ea typeface="Calibri" pitchFamily="34" charset="-122"/>
                 <a:cs typeface="Calibri" pitchFamily="34" charset="-120"/>
               </a:rPr>
-              <a:t>2.  The word 'predict' means to speak about something after it has already happened.</a:t>
+              <a:t>2.  The root 'dict' comes from a Greek word meaning to write.</a:t>
             </a:r>
             <a:endParaRPr lang="en-US" sz="1300" dirty="0"/>
           </a:p>
@@ -37147,7 +38647,7 @@
                 <a:ea typeface="Calibri" pitchFamily="34" charset="-122"/>
                 <a:cs typeface="Calibri" pitchFamily="34" charset="-120"/>
               </a:rPr>
-              <a:t>3.  A dictionary is connected to 'dict' because it is a book about words and their meanings.</a:t>
+              <a:t>3.  The prefix 'contra' in 'contradict' means against or opposite.</a:t>
             </a:r>
             <a:endParaRPr lang="en-US" sz="1300" dirty="0"/>
           </a:p>
@@ -37286,7 +38786,7 @@
                 <a:ea typeface="Calibri" pitchFamily="34" charset="-122"/>
                 <a:cs typeface="Calibri" pitchFamily="34" charset="-120"/>
               </a:rPr>
-              <a:t>4.  The word 'dictator' contains the root 'dict' because a dictator issues commands and orders.</a:t>
+              <a:t>4.  The root 'dict' comes from a Latin word meaning to say or speak.</a:t>
             </a:r>
             <a:endParaRPr lang="en-US" sz="1300" dirty="0"/>
           </a:p>
@@ -37425,7 +38925,7 @@
                 <a:ea typeface="Calibri" pitchFamily="34" charset="-122"/>
                 <a:cs typeface="Calibri" pitchFamily="34" charset="-120"/>
               </a:rPr>
-              <a:t>5.  The root 'dict' comes from the Greek word for writing.</a:t>
+              <a:t>5.  The word 'predict' means to say what happened in the past.</a:t>
             </a:r>
             <a:endParaRPr lang="en-US" sz="1300" dirty="0"/>
           </a:p>
@@ -38064,7 +39564,7 @@
                 <a:ea typeface="Trebuchet MS" pitchFamily="34" charset="-122"/>
                 <a:cs typeface="Trebuchet MS" pitchFamily="34" charset="-120"/>
               </a:rPr>
-              <a:t>dictate</a:t>
+              <a:t>dictionary</a:t>
             </a:r>
             <a:endParaRPr lang="en-US" sz="1300" dirty="0"/>
           </a:p>
@@ -38130,7 +39630,7 @@
                 <a:ea typeface="Trebuchet MS" pitchFamily="34" charset="-122"/>
                 <a:cs typeface="Trebuchet MS" pitchFamily="34" charset="-120"/>
               </a:rPr>
-              <a:t>predict</a:t>
+              <a:t>dictate</a:t>
             </a:r>
             <a:endParaRPr lang="en-US" sz="1300" dirty="0"/>
           </a:p>
@@ -38196,7 +39696,7 @@
                 <a:ea typeface="Trebuchet MS" pitchFamily="34" charset="-122"/>
                 <a:cs typeface="Trebuchet MS" pitchFamily="34" charset="-120"/>
               </a:rPr>
-              <a:t>contradict</a:t>
+              <a:t>predict</a:t>
             </a:r>
             <a:endParaRPr lang="en-US" sz="1300" dirty="0"/>
           </a:p>
@@ -38262,7 +39762,7 @@
                 <a:ea typeface="Trebuchet MS" pitchFamily="34" charset="-122"/>
                 <a:cs typeface="Trebuchet MS" pitchFamily="34" charset="-120"/>
               </a:rPr>
-              <a:t>dictionary</a:t>
+              <a:t>contradict</a:t>
             </a:r>
             <a:endParaRPr lang="en-US" sz="1300" dirty="0"/>
           </a:p>
@@ -38460,7 +39960,7 @@
                 <a:ea typeface="Trebuchet MS" pitchFamily="34" charset="-122"/>
                 <a:cs typeface="Trebuchet MS" pitchFamily="34" charset="-120"/>
               </a:rPr>
-              <a:t>benediction</a:t>
+              <a:t>dictator</a:t>
             </a:r>
             <a:endParaRPr lang="en-US" sz="1300" dirty="0"/>
           </a:p>
@@ -39245,7 +40745,7 @@
                 <a:ea typeface="Trebuchet MS" pitchFamily="34" charset="-122"/>
                 <a:cs typeface="Trebuchet MS" pitchFamily="34" charset="-120"/>
               </a:rPr>
-              <a:t>con-</a:t>
+              <a:t>contra-</a:t>
             </a:r>
             <a:endParaRPr lang="en-US" sz="1300" dirty="0"/>
           </a:p>
@@ -39398,7 +40898,7 @@
                 <a:ea typeface="Trebuchet MS" pitchFamily="34" charset="-122"/>
                 <a:cs typeface="Trebuchet MS" pitchFamily="34" charset="-120"/>
               </a:rPr>
-              <a:t>in-</a:t>
+              <a:t>e-</a:t>
             </a:r>
             <a:endParaRPr lang="en-US" sz="1300" dirty="0"/>
           </a:p>
@@ -39551,7 +41051,7 @@
                 <a:ea typeface="Trebuchet MS" pitchFamily="34" charset="-122"/>
                 <a:cs typeface="Trebuchet MS" pitchFamily="34" charset="-120"/>
               </a:rPr>
-              <a:t>e-</a:t>
+              <a:t>in-</a:t>
             </a:r>
             <a:endParaRPr lang="en-US" sz="1300" dirty="0"/>
           </a:p>
@@ -39704,7 +41204,7 @@
                 <a:ea typeface="Trebuchet MS" pitchFamily="34" charset="-122"/>
                 <a:cs typeface="Trebuchet MS" pitchFamily="34" charset="-120"/>
               </a:rPr>
-              <a:t>bene-</a:t>
+              <a:t>vale-</a:t>
             </a:r>
             <a:endParaRPr lang="en-US" sz="1300" dirty="0"/>
           </a:p>
@@ -39793,7 +41293,7 @@
                 <a:ea typeface="Trebuchet MS" pitchFamily="34" charset="-122"/>
                 <a:cs typeface="Trebuchet MS" pitchFamily="34" charset="-120"/>
               </a:rPr>
-              <a:t>-orship</a:t>
+              <a:t>-um</a:t>
             </a:r>
             <a:endParaRPr lang="en-US" sz="1300" dirty="0"/>
           </a:p>
@@ -40234,7 +41734,7 @@
                 <a:ea typeface="Trebuchet MS" pitchFamily="34" charset="-122"/>
                 <a:cs typeface="Trebuchet MS" pitchFamily="34" charset="-120"/>
               </a:rPr>
-              <a:t>dictate</a:t>
+              <a:t>dictionary</a:t>
             </a:r>
             <a:endParaRPr lang="en-US" sz="1400" dirty="0"/>
           </a:p>
@@ -40638,7 +42138,7 @@
                 <a:ea typeface="Trebuchet MS" pitchFamily="34" charset="-122"/>
                 <a:cs typeface="Trebuchet MS" pitchFamily="34" charset="-120"/>
               </a:rPr>
-              <a:t>dictate</a:t>
+              <a:t>dictionary</a:t>
             </a:r>
             <a:endParaRPr lang="en-US" sz="1200" dirty="0"/>
           </a:p>
@@ -40704,7 +42204,7 @@
                 <a:ea typeface="Calibri" pitchFamily="34" charset="-122"/>
                 <a:cs typeface="Calibri" pitchFamily="34" charset="-120"/>
               </a:rPr>
-              <a:t>An official decision or judgement made after carefully considering the facts.</a:t>
+              <a:t>An official decision or judgement, especially in a court of law.</a:t>
             </a:r>
             <a:endParaRPr lang="en-US" sz="1200" dirty="0"/>
           </a:p>
@@ -40777,7 +42277,7 @@
                 <a:ea typeface="Trebuchet MS" pitchFamily="34" charset="-122"/>
                 <a:cs typeface="Trebuchet MS" pitchFamily="34" charset="-120"/>
               </a:rPr>
-              <a:t>predict</a:t>
+              <a:t>dictate</a:t>
             </a:r>
             <a:endParaRPr lang="en-US" sz="1200" dirty="0"/>
           </a:p>
@@ -40843,7 +42343,7 @@
                 <a:ea typeface="Calibri" pitchFamily="34" charset="-122"/>
                 <a:cs typeface="Calibri" pitchFamily="34" charset="-120"/>
               </a:rPr>
-              <a:t>A blessing or kind words spoken at the end of a church service.</a:t>
+              <a:t>A leader who has complete power and tells everyone what to do.</a:t>
             </a:r>
             <a:endParaRPr lang="en-US" sz="1200" dirty="0"/>
           </a:p>
@@ -40916,7 +42416,7 @@
                 <a:ea typeface="Trebuchet MS" pitchFamily="34" charset="-122"/>
                 <a:cs typeface="Trebuchet MS" pitchFamily="34" charset="-120"/>
               </a:rPr>
-              <a:t>contradict</a:t>
+              <a:t>predict</a:t>
             </a:r>
             <a:endParaRPr lang="en-US" sz="1200" dirty="0"/>
           </a:p>
@@ -40982,7 +42482,7 @@
                 <a:ea typeface="Calibri" pitchFamily="34" charset="-122"/>
                 <a:cs typeface="Calibri" pitchFamily="34" charset="-120"/>
               </a:rPr>
-              <a:t>To say something out loud for someone else to write down, or to give orders.</a:t>
+              <a:t>A book that lists words and explains what they mean.</a:t>
             </a:r>
             <a:endParaRPr lang="en-US" sz="1200" dirty="0"/>
           </a:p>
@@ -41055,7 +42555,7 @@
                 <a:ea typeface="Trebuchet MS" pitchFamily="34" charset="-122"/>
                 <a:cs typeface="Trebuchet MS" pitchFamily="34" charset="-120"/>
               </a:rPr>
-              <a:t>dictionary</a:t>
+              <a:t>contradict</a:t>
             </a:r>
             <a:endParaRPr lang="en-US" sz="1200" dirty="0"/>
           </a:p>
@@ -41121,7 +42621,7 @@
                 <a:ea typeface="Calibri" pitchFamily="34" charset="-122"/>
                 <a:cs typeface="Calibri" pitchFamily="34" charset="-120"/>
               </a:rPr>
-              <a:t>An official order or announcement made by someone in authority.</a:t>
+              <a:t>An official order or rule announced by someone in authority.</a:t>
             </a:r>
             <a:endParaRPr lang="en-US" sz="1200" dirty="0"/>
           </a:p>
@@ -41260,7 +42760,7 @@
                 <a:ea typeface="Calibri" pitchFamily="34" charset="-122"/>
                 <a:cs typeface="Calibri" pitchFamily="34" charset="-120"/>
               </a:rPr>
-              <a:t>To say the opposite of what someone else has said.</a:t>
+              <a:t>To say what you think will happen before it occurs.</a:t>
             </a:r>
             <a:endParaRPr lang="en-US" sz="1200" dirty="0"/>
           </a:p>
@@ -41399,7 +42899,7 @@
                 <a:ea typeface="Calibri" pitchFamily="34" charset="-122"/>
                 <a:cs typeface="Calibri" pitchFamily="34" charset="-120"/>
               </a:rPr>
-              <a:t>A book that explains the meaning of words in a language.</a:t>
+              <a:t>To say the opposite of what someone else has said.</a:t>
             </a:r>
             <a:endParaRPr lang="en-US" sz="1200" dirty="0"/>
           </a:p>
@@ -41472,7 +42972,7 @@
                 <a:ea typeface="Trebuchet MS" pitchFamily="34" charset="-122"/>
                 <a:cs typeface="Trebuchet MS" pitchFamily="34" charset="-120"/>
               </a:rPr>
-              <a:t>benediction</a:t>
+              <a:t>dictator</a:t>
             </a:r>
             <a:endParaRPr lang="en-US" sz="1200" dirty="0"/>
           </a:p>
@@ -41538,7 +43038,7 @@
                 <a:ea typeface="Calibri" pitchFamily="34" charset="-122"/>
                 <a:cs typeface="Calibri" pitchFamily="34" charset="-120"/>
               </a:rPr>
-              <a:t>To say what you think will happen before it actually does.</a:t>
+              <a:t>To say words aloud for someone else to write down, or to give orders.</a:t>
             </a:r>
             <a:endParaRPr lang="en-US" sz="1200" dirty="0"/>
           </a:p>
@@ -42033,7 +43533,7 @@
                 <a:ea typeface="Calibri" pitchFamily="34" charset="-122"/>
                 <a:cs typeface="Calibri" pitchFamily="34" charset="-120"/>
               </a:rPr>
-              <a:t>The teacher will dictate a sentence and the students must write every word correctly.</a:t>
+              <a:t>The scientist made a bold prediction that it would rain on the day of our school sports carnival.</a:t>
             </a:r>
             <a:endParaRPr lang="en-US" sz="1500" dirty="0"/>
           </a:p>
@@ -42197,7 +43697,7 @@
                 <a:ea typeface="Calibri" pitchFamily="34" charset="-122"/>
                 <a:cs typeface="Calibri" pitchFamily="34" charset="-120"/>
               </a:rPr>
-              <a:t>Scientists can predict the weather by studying clouds, wind, and temperature patterns.</a:t>
+              <a:t>Our teacher asked us to open our dictionaries and find the meaning of the word 'perseverance'.</a:t>
             </a:r>
             <a:endParaRPr lang="en-US" sz="1500" dirty="0"/>
           </a:p>
@@ -42361,7 +43861,7 @@
                 <a:ea typeface="Calibri" pitchFamily="34" charset="-122"/>
                 <a:cs typeface="Calibri" pitchFamily="34" charset="-120"/>
               </a:rPr>
-              <a:t>It is rude to contradict someone without listening carefully to what they have said.</a:t>
+              <a:t>It is rude to contradict someone in front of the whole class without listening to their full explanation.</a:t>
             </a:r>
             <a:endParaRPr lang="en-US" sz="1500" dirty="0"/>
           </a:p>
